--- a/slides/CSC336-Lecture-27-Components-Props-and-Events.pptx
+++ b/slides/CSC336-Lecture-27-Components-Props-and-Events.pptx
@@ -3726,79 +3726,44 @@
       </p:sp>
       <p:sp>
         <p:nvSpPr>
-          <p:cNvPr id="6" name="Text 4"/>
-          <p:cNvSpPr txBox="1"/>
-          <p:nvPr/>
-        </p:nvSpPr>
-        <p:spPr>
-          <a:xfrm>
-            <a:off x="640080" y="6446520"/>
-            <a:ext cx="8686800" cy="292608"/>
-          </a:xfrm>
-          <a:prstGeom prst="rect">
-            <a:avLst/>
-          </a:prstGeom>
-          <a:noFill/>
-          <a:ln/>
-        </p:spPr>
-        <p:txBody>
-          <a:bodyPr wrap="square" lIns="0" tIns="0" rIns="0" bIns="0" rtlCol="0" anchor="ctr"/>
-          <a:lstStyle/>
-          <a:p>
-            <a:pPr algn="l" indent="0" marL="0">
-              <a:buNone/>
-            </a:pPr>
-            <a:r>
-              <a:rPr lang="en-US" sz="900" dirty="0">
-                <a:solidFill>
-                  <a:srgbClr val="9AA3D8"/>
-                </a:solidFill>
-                <a:latin typeface="Calibri" pitchFamily="34" charset="0"/>
-                <a:ea typeface="Calibri" pitchFamily="34" charset="-122"/>
-                <a:cs typeface="Calibri" pitchFamily="34" charset="-120"/>
-              </a:rPr>
-              <a:t>Usman Akram  •  COMSATS University Islamabad</a:t>
-            </a:r>
-            <a:endParaRPr lang="en-US" sz="900" dirty="0"/>
-          </a:p>
-        </p:txBody>
-      </p:sp>
-      <p:sp>
-        <p:nvSpPr>
-          <p:cNvPr id="7" name="Text 5"/>
-          <p:cNvSpPr txBox="1"/>
-          <p:nvPr/>
-        </p:nvSpPr>
-        <p:spPr>
-          <a:xfrm>
-            <a:off x="11155680" y="6446520"/>
-            <a:ext cx="457200" cy="292608"/>
-          </a:xfrm>
-          <a:prstGeom prst="rect">
-            <a:avLst/>
-          </a:prstGeom>
-          <a:noFill/>
-          <a:ln/>
-        </p:spPr>
-        <p:txBody>
-          <a:bodyPr wrap="square" lIns="0" tIns="0" rIns="0" bIns="0" rtlCol="0" anchor="ctr"/>
-          <a:lstStyle/>
-          <a:p>
-            <a:pPr algn="r" indent="0" marL="0">
-              <a:buNone/>
-            </a:pPr>
-            <a:r>
-              <a:rPr lang="en-US" sz="900" dirty="0">
-                <a:solidFill>
-                  <a:srgbClr val="9AA3D8"/>
-                </a:solidFill>
-                <a:latin typeface="Calibri" pitchFamily="34" charset="0"/>
-                <a:ea typeface="Calibri" pitchFamily="34" charset="-122"/>
-                <a:cs typeface="Calibri" pitchFamily="34" charset="-120"/>
-              </a:rPr>
-              <a:t>1</a:t>
-            </a:r>
-            <a:endParaRPr lang="en-US" sz="900" dirty="0"/>
+          <p:cNvPr id="8" name="cuinotes-footer-mark"/>
+          <p:cNvSpPr txBox="1"/>
+          <p:nvPr/>
+        </p:nvSpPr>
+        <p:spPr>
+          <a:xfrm>
+            <a:off x="9951720" y="6455664"/>
+            <a:ext cx="2011680" cy="292608"/>
+          </a:xfrm>
+          <a:prstGeom prst="rect">
+            <a:avLst/>
+          </a:prstGeom>
+          <a:noFill/>
+        </p:spPr>
+        <p:txBody>
+          <a:bodyPr wrap="none" lIns="0" rIns="0" tIns="0" bIns="0">
+            <a:spAutoFit/>
+          </a:bodyPr>
+          <a:lstStyle/>
+          <a:p>
+            <a:pPr algn="r"/>
+            <a:r>
+              <a:rPr sz="1000">
+                <a:solidFill>
+                  <a:srgbClr val="8A939B"/>
+                </a:solidFill>
+                <a:hlinkClick r:id="rId3"/>
+              </a:rPr>
+              <a:t>cuinotes.com</a:t>
+            </a:r>
+            <a:r>
+              <a:rPr sz="1000">
+                <a:solidFill>
+                  <a:srgbClr val="8A939B"/>
+                </a:solidFill>
+              </a:rPr>
+              <a:t>  ·  1</a:t>
+            </a:r>
           </a:p>
         </p:txBody>
       </p:sp>
@@ -3933,6 +3898,10 @@
           </a:solidFill>
           <a:ln/>
         </p:spPr>
+        <p:txBody>
+          <a:bodyPr/>
+          <a:p/>
+        </p:txBody>
       </p:sp>
       <p:sp>
         <p:nvSpPr>
@@ -4176,79 +4145,44 @@
       </p:sp>
       <p:sp>
         <p:nvSpPr>
-          <p:cNvPr id="6" name="Text 4"/>
-          <p:cNvSpPr txBox="1"/>
-          <p:nvPr/>
-        </p:nvSpPr>
-        <p:spPr>
-          <a:xfrm>
-            <a:off x="640080" y="6446520"/>
-            <a:ext cx="8686800" cy="292608"/>
-          </a:xfrm>
-          <a:prstGeom prst="rect">
-            <a:avLst/>
-          </a:prstGeom>
-          <a:noFill/>
-          <a:ln/>
-        </p:spPr>
-        <p:txBody>
-          <a:bodyPr wrap="square" lIns="0" tIns="0" rIns="0" bIns="0" rtlCol="0" anchor="ctr"/>
-          <a:lstStyle/>
-          <a:p>
-            <a:pPr algn="l" indent="0" marL="0">
-              <a:buNone/>
-            </a:pPr>
-            <a:r>
-              <a:rPr lang="en-US" sz="900" dirty="0">
-                <a:solidFill>
-                  <a:srgbClr val="5D5D72"/>
-                </a:solidFill>
-                <a:latin typeface="Calibri" pitchFamily="34" charset="0"/>
-                <a:ea typeface="Calibri" pitchFamily="34" charset="-122"/>
-                <a:cs typeface="Calibri" pitchFamily="34" charset="-120"/>
-              </a:rPr>
-              <a:t>Usman Akram  •  COMSATS University Islamabad</a:t>
-            </a:r>
-            <a:endParaRPr lang="en-US" sz="900" dirty="0"/>
-          </a:p>
-        </p:txBody>
-      </p:sp>
-      <p:sp>
-        <p:nvSpPr>
-          <p:cNvPr id="7" name="Text 5"/>
-          <p:cNvSpPr txBox="1"/>
-          <p:nvPr/>
-        </p:nvSpPr>
-        <p:spPr>
-          <a:xfrm>
-            <a:off x="11155680" y="6446520"/>
-            <a:ext cx="457200" cy="292608"/>
-          </a:xfrm>
-          <a:prstGeom prst="rect">
-            <a:avLst/>
-          </a:prstGeom>
-          <a:noFill/>
-          <a:ln/>
-        </p:spPr>
-        <p:txBody>
-          <a:bodyPr wrap="square" lIns="0" tIns="0" rIns="0" bIns="0" rtlCol="0" anchor="ctr"/>
-          <a:lstStyle/>
-          <a:p>
-            <a:pPr algn="r" indent="0" marL="0">
-              <a:buNone/>
-            </a:pPr>
-            <a:r>
-              <a:rPr lang="en-US" sz="900" dirty="0">
-                <a:solidFill>
-                  <a:srgbClr val="5D5D72"/>
-                </a:solidFill>
-                <a:latin typeface="Calibri" pitchFamily="34" charset="0"/>
-                <a:ea typeface="Calibri" pitchFamily="34" charset="-122"/>
-                <a:cs typeface="Calibri" pitchFamily="34" charset="-120"/>
-              </a:rPr>
-              <a:t>10</a:t>
-            </a:r>
-            <a:endParaRPr lang="en-US" sz="900" dirty="0"/>
+          <p:cNvPr id="8" name="cuinotes-footer-mark"/>
+          <p:cNvSpPr txBox="1"/>
+          <p:nvPr/>
+        </p:nvSpPr>
+        <p:spPr>
+          <a:xfrm>
+            <a:off x="9951720" y="6455664"/>
+            <a:ext cx="2011680" cy="292608"/>
+          </a:xfrm>
+          <a:prstGeom prst="rect">
+            <a:avLst/>
+          </a:prstGeom>
+          <a:noFill/>
+        </p:spPr>
+        <p:txBody>
+          <a:bodyPr wrap="none" lIns="0" rIns="0" tIns="0" bIns="0">
+            <a:spAutoFit/>
+          </a:bodyPr>
+          <a:lstStyle/>
+          <a:p>
+            <a:pPr algn="r"/>
+            <a:r>
+              <a:rPr sz="1000">
+                <a:solidFill>
+                  <a:srgbClr val="8A939B"/>
+                </a:solidFill>
+                <a:hlinkClick r:id="rId3"/>
+              </a:rPr>
+              <a:t>cuinotes.com</a:t>
+            </a:r>
+            <a:r>
+              <a:rPr sz="1000">
+                <a:solidFill>
+                  <a:srgbClr val="8A939B"/>
+                </a:solidFill>
+              </a:rPr>
+              <a:t>  ·  10</a:t>
+            </a:r>
           </a:p>
         </p:txBody>
       </p:sp>
@@ -4388,6 +4322,10 @@
             <a:prstDash val="solid"/>
           </a:ln>
         </p:spPr>
+        <p:txBody>
+          <a:bodyPr/>
+          <a:p/>
+        </p:txBody>
       </p:sp>
       <p:sp>
         <p:nvSpPr>
@@ -4469,79 +4407,44 @@
       </p:sp>
       <p:sp>
         <p:nvSpPr>
-          <p:cNvPr id="7" name="Text 5"/>
-          <p:cNvSpPr txBox="1"/>
-          <p:nvPr/>
-        </p:nvSpPr>
-        <p:spPr>
-          <a:xfrm>
-            <a:off x="640080" y="6446520"/>
-            <a:ext cx="8686800" cy="292608"/>
-          </a:xfrm>
-          <a:prstGeom prst="rect">
-            <a:avLst/>
-          </a:prstGeom>
-          <a:noFill/>
-          <a:ln/>
-        </p:spPr>
-        <p:txBody>
-          <a:bodyPr wrap="square" lIns="0" tIns="0" rIns="0" bIns="0" rtlCol="0" anchor="ctr"/>
-          <a:lstStyle/>
-          <a:p>
-            <a:pPr algn="l" indent="0" marL="0">
-              <a:buNone/>
-            </a:pPr>
-            <a:r>
-              <a:rPr lang="en-US" sz="900" dirty="0">
-                <a:solidFill>
-                  <a:srgbClr val="5D5D72"/>
-                </a:solidFill>
-                <a:latin typeface="Calibri" pitchFamily="34" charset="0"/>
-                <a:ea typeface="Calibri" pitchFamily="34" charset="-122"/>
-                <a:cs typeface="Calibri" pitchFamily="34" charset="-120"/>
-              </a:rPr>
-              <a:t>Usman Akram  •  COMSATS University Islamabad</a:t>
-            </a:r>
-            <a:endParaRPr lang="en-US" sz="900" dirty="0"/>
-          </a:p>
-        </p:txBody>
-      </p:sp>
-      <p:sp>
-        <p:nvSpPr>
-          <p:cNvPr id="8" name="Text 6"/>
-          <p:cNvSpPr txBox="1"/>
-          <p:nvPr/>
-        </p:nvSpPr>
-        <p:spPr>
-          <a:xfrm>
-            <a:off x="11155680" y="6446520"/>
-            <a:ext cx="457200" cy="292608"/>
-          </a:xfrm>
-          <a:prstGeom prst="rect">
-            <a:avLst/>
-          </a:prstGeom>
-          <a:noFill/>
-          <a:ln/>
-        </p:spPr>
-        <p:txBody>
-          <a:bodyPr wrap="square" lIns="0" tIns="0" rIns="0" bIns="0" rtlCol="0" anchor="ctr"/>
-          <a:lstStyle/>
-          <a:p>
-            <a:pPr algn="r" indent="0" marL="0">
-              <a:buNone/>
-            </a:pPr>
-            <a:r>
-              <a:rPr lang="en-US" sz="900" dirty="0">
-                <a:solidFill>
-                  <a:srgbClr val="5D5D72"/>
-                </a:solidFill>
-                <a:latin typeface="Calibri" pitchFamily="34" charset="0"/>
-                <a:ea typeface="Calibri" pitchFamily="34" charset="-122"/>
-                <a:cs typeface="Calibri" pitchFamily="34" charset="-120"/>
-              </a:rPr>
-              <a:t>11</a:t>
-            </a:r>
-            <a:endParaRPr lang="en-US" sz="900" dirty="0"/>
+          <p:cNvPr id="9" name="cuinotes-footer-mark"/>
+          <p:cNvSpPr txBox="1"/>
+          <p:nvPr/>
+        </p:nvSpPr>
+        <p:spPr>
+          <a:xfrm>
+            <a:off x="9951720" y="6455664"/>
+            <a:ext cx="2011680" cy="292608"/>
+          </a:xfrm>
+          <a:prstGeom prst="rect">
+            <a:avLst/>
+          </a:prstGeom>
+          <a:noFill/>
+        </p:spPr>
+        <p:txBody>
+          <a:bodyPr wrap="none" lIns="0" rIns="0" tIns="0" bIns="0">
+            <a:spAutoFit/>
+          </a:bodyPr>
+          <a:lstStyle/>
+          <a:p>
+            <a:pPr algn="r"/>
+            <a:r>
+              <a:rPr sz="1000">
+                <a:solidFill>
+                  <a:srgbClr val="8A939B"/>
+                </a:solidFill>
+                <a:hlinkClick r:id="rId3"/>
+              </a:rPr>
+              <a:t>cuinotes.com</a:t>
+            </a:r>
+            <a:r>
+              <a:rPr sz="1000">
+                <a:solidFill>
+                  <a:srgbClr val="8A939B"/>
+                </a:solidFill>
+              </a:rPr>
+              <a:t>  ·  11</a:t>
+            </a:r>
           </a:p>
         </p:txBody>
       </p:sp>
@@ -4676,6 +4579,10 @@
           </a:solidFill>
           <a:ln/>
         </p:spPr>
+        <p:txBody>
+          <a:bodyPr/>
+          <a:p/>
+        </p:txBody>
       </p:sp>
       <p:sp>
         <p:nvSpPr>
@@ -4930,79 +4837,44 @@
       </p:sp>
       <p:sp>
         <p:nvSpPr>
-          <p:cNvPr id="6" name="Text 4"/>
-          <p:cNvSpPr txBox="1"/>
-          <p:nvPr/>
-        </p:nvSpPr>
-        <p:spPr>
-          <a:xfrm>
-            <a:off x="640080" y="6446520"/>
-            <a:ext cx="8686800" cy="292608"/>
-          </a:xfrm>
-          <a:prstGeom prst="rect">
-            <a:avLst/>
-          </a:prstGeom>
-          <a:noFill/>
-          <a:ln/>
-        </p:spPr>
-        <p:txBody>
-          <a:bodyPr wrap="square" lIns="0" tIns="0" rIns="0" bIns="0" rtlCol="0" anchor="ctr"/>
-          <a:lstStyle/>
-          <a:p>
-            <a:pPr algn="l" indent="0" marL="0">
-              <a:buNone/>
-            </a:pPr>
-            <a:r>
-              <a:rPr lang="en-US" sz="900" dirty="0">
-                <a:solidFill>
-                  <a:srgbClr val="5D5D72"/>
-                </a:solidFill>
-                <a:latin typeface="Calibri" pitchFamily="34" charset="0"/>
-                <a:ea typeface="Calibri" pitchFamily="34" charset="-122"/>
-                <a:cs typeface="Calibri" pitchFamily="34" charset="-120"/>
-              </a:rPr>
-              <a:t>Usman Akram  •  COMSATS University Islamabad</a:t>
-            </a:r>
-            <a:endParaRPr lang="en-US" sz="900" dirty="0"/>
-          </a:p>
-        </p:txBody>
-      </p:sp>
-      <p:sp>
-        <p:nvSpPr>
-          <p:cNvPr id="7" name="Text 5"/>
-          <p:cNvSpPr txBox="1"/>
-          <p:nvPr/>
-        </p:nvSpPr>
-        <p:spPr>
-          <a:xfrm>
-            <a:off x="11155680" y="6446520"/>
-            <a:ext cx="457200" cy="292608"/>
-          </a:xfrm>
-          <a:prstGeom prst="rect">
-            <a:avLst/>
-          </a:prstGeom>
-          <a:noFill/>
-          <a:ln/>
-        </p:spPr>
-        <p:txBody>
-          <a:bodyPr wrap="square" lIns="0" tIns="0" rIns="0" bIns="0" rtlCol="0" anchor="ctr"/>
-          <a:lstStyle/>
-          <a:p>
-            <a:pPr algn="r" indent="0" marL="0">
-              <a:buNone/>
-            </a:pPr>
-            <a:r>
-              <a:rPr lang="en-US" sz="900" dirty="0">
-                <a:solidFill>
-                  <a:srgbClr val="5D5D72"/>
-                </a:solidFill>
-                <a:latin typeface="Calibri" pitchFamily="34" charset="0"/>
-                <a:ea typeface="Calibri" pitchFamily="34" charset="-122"/>
-                <a:cs typeface="Calibri" pitchFamily="34" charset="-120"/>
-              </a:rPr>
-              <a:t>12</a:t>
-            </a:r>
-            <a:endParaRPr lang="en-US" sz="900" dirty="0"/>
+          <p:cNvPr id="8" name="cuinotes-footer-mark"/>
+          <p:cNvSpPr txBox="1"/>
+          <p:nvPr/>
+        </p:nvSpPr>
+        <p:spPr>
+          <a:xfrm>
+            <a:off x="9951720" y="6455664"/>
+            <a:ext cx="2011680" cy="292608"/>
+          </a:xfrm>
+          <a:prstGeom prst="rect">
+            <a:avLst/>
+          </a:prstGeom>
+          <a:noFill/>
+        </p:spPr>
+        <p:txBody>
+          <a:bodyPr wrap="none" lIns="0" rIns="0" tIns="0" bIns="0">
+            <a:spAutoFit/>
+          </a:bodyPr>
+          <a:lstStyle/>
+          <a:p>
+            <a:pPr algn="r"/>
+            <a:r>
+              <a:rPr sz="1000">
+                <a:solidFill>
+                  <a:srgbClr val="8A939B"/>
+                </a:solidFill>
+                <a:hlinkClick r:id="rId3"/>
+              </a:rPr>
+              <a:t>cuinotes.com</a:t>
+            </a:r>
+            <a:r>
+              <a:rPr sz="1000">
+                <a:solidFill>
+                  <a:srgbClr val="8A939B"/>
+                </a:solidFill>
+              </a:rPr>
+              <a:t>  ·  12</a:t>
+            </a:r>
           </a:p>
         </p:txBody>
       </p:sp>
@@ -5188,6 +5060,10 @@
             </a:outerShdw>
           </a:effectLst>
         </p:spPr>
+        <p:txBody>
+          <a:bodyPr/>
+          <a:p/>
+        </p:txBody>
       </p:sp>
       <p:pic>
         <p:nvPicPr>
@@ -5215,79 +5091,44 @@
       </p:pic>
       <p:sp>
         <p:nvSpPr>
-          <p:cNvPr id="7" name="Text 4"/>
-          <p:cNvSpPr txBox="1"/>
-          <p:nvPr/>
-        </p:nvSpPr>
-        <p:spPr>
-          <a:xfrm>
-            <a:off x="640080" y="6446520"/>
-            <a:ext cx="8686800" cy="292608"/>
-          </a:xfrm>
-          <a:prstGeom prst="rect">
-            <a:avLst/>
-          </a:prstGeom>
-          <a:noFill/>
-          <a:ln/>
-        </p:spPr>
-        <p:txBody>
-          <a:bodyPr wrap="square" lIns="0" tIns="0" rIns="0" bIns="0" rtlCol="0" anchor="ctr"/>
-          <a:lstStyle/>
-          <a:p>
-            <a:pPr algn="l" indent="0" marL="0">
-              <a:buNone/>
-            </a:pPr>
-            <a:r>
-              <a:rPr lang="en-US" sz="900" dirty="0">
-                <a:solidFill>
-                  <a:srgbClr val="5D5D72"/>
-                </a:solidFill>
-                <a:latin typeface="Calibri" pitchFamily="34" charset="0"/>
-                <a:ea typeface="Calibri" pitchFamily="34" charset="-122"/>
-                <a:cs typeface="Calibri" pitchFamily="34" charset="-120"/>
-              </a:rPr>
-              <a:t>Usman Akram  •  COMSATS University Islamabad</a:t>
-            </a:r>
-            <a:endParaRPr lang="en-US" sz="900" dirty="0"/>
-          </a:p>
-        </p:txBody>
-      </p:sp>
-      <p:sp>
-        <p:nvSpPr>
-          <p:cNvPr id="8" name="Text 5"/>
-          <p:cNvSpPr txBox="1"/>
-          <p:nvPr/>
-        </p:nvSpPr>
-        <p:spPr>
-          <a:xfrm>
-            <a:off x="11155680" y="6446520"/>
-            <a:ext cx="457200" cy="292608"/>
-          </a:xfrm>
-          <a:prstGeom prst="rect">
-            <a:avLst/>
-          </a:prstGeom>
-          <a:noFill/>
-          <a:ln/>
-        </p:spPr>
-        <p:txBody>
-          <a:bodyPr wrap="square" lIns="0" tIns="0" rIns="0" bIns="0" rtlCol="0" anchor="ctr"/>
-          <a:lstStyle/>
-          <a:p>
-            <a:pPr algn="r" indent="0" marL="0">
-              <a:buNone/>
-            </a:pPr>
-            <a:r>
-              <a:rPr lang="en-US" sz="900" dirty="0">
-                <a:solidFill>
-                  <a:srgbClr val="5D5D72"/>
-                </a:solidFill>
-                <a:latin typeface="Calibri" pitchFamily="34" charset="0"/>
-                <a:ea typeface="Calibri" pitchFamily="34" charset="-122"/>
-                <a:cs typeface="Calibri" pitchFamily="34" charset="-120"/>
-              </a:rPr>
-              <a:t>13</a:t>
-            </a:r>
-            <a:endParaRPr lang="en-US" sz="900" dirty="0"/>
+          <p:cNvPr id="9" name="cuinotes-footer-mark"/>
+          <p:cNvSpPr txBox="1"/>
+          <p:nvPr/>
+        </p:nvSpPr>
+        <p:spPr>
+          <a:xfrm>
+            <a:off x="9951720" y="6455664"/>
+            <a:ext cx="2011680" cy="292608"/>
+          </a:xfrm>
+          <a:prstGeom prst="rect">
+            <a:avLst/>
+          </a:prstGeom>
+          <a:noFill/>
+        </p:spPr>
+        <p:txBody>
+          <a:bodyPr wrap="none" lIns="0" rIns="0" tIns="0" bIns="0">
+            <a:spAutoFit/>
+          </a:bodyPr>
+          <a:lstStyle/>
+          <a:p>
+            <a:pPr algn="r"/>
+            <a:r>
+              <a:rPr sz="1000">
+                <a:solidFill>
+                  <a:srgbClr val="8A939B"/>
+                </a:solidFill>
+                <a:hlinkClick r:id="rId4"/>
+              </a:rPr>
+              <a:t>cuinotes.com</a:t>
+            </a:r>
+            <a:r>
+              <a:rPr sz="1000">
+                <a:solidFill>
+                  <a:srgbClr val="8A939B"/>
+                </a:solidFill>
+              </a:rPr>
+              <a:t>  ·  13</a:t>
+            </a:r>
           </a:p>
         </p:txBody>
       </p:sp>
@@ -5422,6 +5263,10 @@
           </a:solidFill>
           <a:ln/>
         </p:spPr>
+        <p:txBody>
+          <a:bodyPr/>
+          <a:p/>
+        </p:txBody>
       </p:sp>
       <p:sp>
         <p:nvSpPr>
@@ -5595,79 +5440,44 @@
       </p:sp>
       <p:sp>
         <p:nvSpPr>
-          <p:cNvPr id="7" name="Text 5"/>
-          <p:cNvSpPr txBox="1"/>
-          <p:nvPr/>
-        </p:nvSpPr>
-        <p:spPr>
-          <a:xfrm>
-            <a:off x="640080" y="6446520"/>
-            <a:ext cx="8686800" cy="292608"/>
-          </a:xfrm>
-          <a:prstGeom prst="rect">
-            <a:avLst/>
-          </a:prstGeom>
-          <a:noFill/>
-          <a:ln/>
-        </p:spPr>
-        <p:txBody>
-          <a:bodyPr wrap="square" lIns="0" tIns="0" rIns="0" bIns="0" rtlCol="0" anchor="ctr"/>
-          <a:lstStyle/>
-          <a:p>
-            <a:pPr algn="l" indent="0" marL="0">
-              <a:buNone/>
-            </a:pPr>
-            <a:r>
-              <a:rPr lang="en-US" sz="900" dirty="0">
-                <a:solidFill>
-                  <a:srgbClr val="5D5D72"/>
-                </a:solidFill>
-                <a:latin typeface="Calibri" pitchFamily="34" charset="0"/>
-                <a:ea typeface="Calibri" pitchFamily="34" charset="-122"/>
-                <a:cs typeface="Calibri" pitchFamily="34" charset="-120"/>
-              </a:rPr>
-              <a:t>Usman Akram  •  COMSATS University Islamabad</a:t>
-            </a:r>
-            <a:endParaRPr lang="en-US" sz="900" dirty="0"/>
-          </a:p>
-        </p:txBody>
-      </p:sp>
-      <p:sp>
-        <p:nvSpPr>
-          <p:cNvPr id="8" name="Text 6"/>
-          <p:cNvSpPr txBox="1"/>
-          <p:nvPr/>
-        </p:nvSpPr>
-        <p:spPr>
-          <a:xfrm>
-            <a:off x="11155680" y="6446520"/>
-            <a:ext cx="457200" cy="292608"/>
-          </a:xfrm>
-          <a:prstGeom prst="rect">
-            <a:avLst/>
-          </a:prstGeom>
-          <a:noFill/>
-          <a:ln/>
-        </p:spPr>
-        <p:txBody>
-          <a:bodyPr wrap="square" lIns="0" tIns="0" rIns="0" bIns="0" rtlCol="0" anchor="ctr"/>
-          <a:lstStyle/>
-          <a:p>
-            <a:pPr algn="r" indent="0" marL="0">
-              <a:buNone/>
-            </a:pPr>
-            <a:r>
-              <a:rPr lang="en-US" sz="900" dirty="0">
-                <a:solidFill>
-                  <a:srgbClr val="5D5D72"/>
-                </a:solidFill>
-                <a:latin typeface="Calibri" pitchFamily="34" charset="0"/>
-                <a:ea typeface="Calibri" pitchFamily="34" charset="-122"/>
-                <a:cs typeface="Calibri" pitchFamily="34" charset="-120"/>
-              </a:rPr>
-              <a:t>14</a:t>
-            </a:r>
-            <a:endParaRPr lang="en-US" sz="900" dirty="0"/>
+          <p:cNvPr id="9" name="cuinotes-footer-mark"/>
+          <p:cNvSpPr txBox="1"/>
+          <p:nvPr/>
+        </p:nvSpPr>
+        <p:spPr>
+          <a:xfrm>
+            <a:off x="9951720" y="6455664"/>
+            <a:ext cx="2011680" cy="292608"/>
+          </a:xfrm>
+          <a:prstGeom prst="rect">
+            <a:avLst/>
+          </a:prstGeom>
+          <a:noFill/>
+        </p:spPr>
+        <p:txBody>
+          <a:bodyPr wrap="none" lIns="0" rIns="0" tIns="0" bIns="0">
+            <a:spAutoFit/>
+          </a:bodyPr>
+          <a:lstStyle/>
+          <a:p>
+            <a:pPr algn="r"/>
+            <a:r>
+              <a:rPr sz="1000">
+                <a:solidFill>
+                  <a:srgbClr val="8A939B"/>
+                </a:solidFill>
+                <a:hlinkClick r:id="rId3"/>
+              </a:rPr>
+              <a:t>cuinotes.com</a:t>
+            </a:r>
+            <a:r>
+              <a:rPr sz="1000">
+                <a:solidFill>
+                  <a:srgbClr val="8A939B"/>
+                </a:solidFill>
+              </a:rPr>
+              <a:t>  ·  14</a:t>
+            </a:r>
           </a:p>
         </p:txBody>
       </p:sp>
@@ -5800,6 +5610,10 @@
           </a:solidFill>
           <a:ln/>
         </p:spPr>
+        <p:txBody>
+          <a:bodyPr/>
+          <a:p/>
+        </p:txBody>
       </p:sp>
       <p:sp>
         <p:nvSpPr>
@@ -5898,6 +5712,10 @@
           </a:solidFill>
           <a:ln/>
         </p:spPr>
+        <p:txBody>
+          <a:bodyPr/>
+          <a:p/>
+        </p:txBody>
       </p:sp>
       <p:sp>
         <p:nvSpPr>
@@ -5996,6 +5814,10 @@
           </a:solidFill>
           <a:ln/>
         </p:spPr>
+        <p:txBody>
+          <a:bodyPr/>
+          <a:p/>
+        </p:txBody>
       </p:sp>
       <p:sp>
         <p:nvSpPr>
@@ -6077,79 +5899,44 @@
       </p:sp>
       <p:sp>
         <p:nvSpPr>
-          <p:cNvPr id="13" name="Text 11"/>
-          <p:cNvSpPr txBox="1"/>
-          <p:nvPr/>
-        </p:nvSpPr>
-        <p:spPr>
-          <a:xfrm>
-            <a:off x="640080" y="6446520"/>
-            <a:ext cx="8686800" cy="292608"/>
-          </a:xfrm>
-          <a:prstGeom prst="rect">
-            <a:avLst/>
-          </a:prstGeom>
-          <a:noFill/>
-          <a:ln/>
-        </p:spPr>
-        <p:txBody>
-          <a:bodyPr wrap="square" lIns="0" tIns="0" rIns="0" bIns="0" rtlCol="0" anchor="ctr"/>
-          <a:lstStyle/>
-          <a:p>
-            <a:pPr algn="l" indent="0" marL="0">
-              <a:buNone/>
-            </a:pPr>
-            <a:r>
-              <a:rPr lang="en-US" sz="900" dirty="0">
-                <a:solidFill>
-                  <a:srgbClr val="5D5D72"/>
-                </a:solidFill>
-                <a:latin typeface="Calibri" pitchFamily="34" charset="0"/>
-                <a:ea typeface="Calibri" pitchFamily="34" charset="-122"/>
-                <a:cs typeface="Calibri" pitchFamily="34" charset="-120"/>
-              </a:rPr>
-              <a:t>Usman Akram  •  COMSATS University Islamabad</a:t>
-            </a:r>
-            <a:endParaRPr lang="en-US" sz="900" dirty="0"/>
-          </a:p>
-        </p:txBody>
-      </p:sp>
-      <p:sp>
-        <p:nvSpPr>
-          <p:cNvPr id="14" name="Text 12"/>
-          <p:cNvSpPr txBox="1"/>
-          <p:nvPr/>
-        </p:nvSpPr>
-        <p:spPr>
-          <a:xfrm>
-            <a:off x="11155680" y="6446520"/>
-            <a:ext cx="457200" cy="292608"/>
-          </a:xfrm>
-          <a:prstGeom prst="rect">
-            <a:avLst/>
-          </a:prstGeom>
-          <a:noFill/>
-          <a:ln/>
-        </p:spPr>
-        <p:txBody>
-          <a:bodyPr wrap="square" lIns="0" tIns="0" rIns="0" bIns="0" rtlCol="0" anchor="ctr"/>
-          <a:lstStyle/>
-          <a:p>
-            <a:pPr algn="r" indent="0" marL="0">
-              <a:buNone/>
-            </a:pPr>
-            <a:r>
-              <a:rPr lang="en-US" sz="900" dirty="0">
-                <a:solidFill>
-                  <a:srgbClr val="5D5D72"/>
-                </a:solidFill>
-                <a:latin typeface="Calibri" pitchFamily="34" charset="0"/>
-                <a:ea typeface="Calibri" pitchFamily="34" charset="-122"/>
-                <a:cs typeface="Calibri" pitchFamily="34" charset="-120"/>
-              </a:rPr>
-              <a:t>15</a:t>
-            </a:r>
-            <a:endParaRPr lang="en-US" sz="900" dirty="0"/>
+          <p:cNvPr id="15" name="cuinotes-footer-mark"/>
+          <p:cNvSpPr txBox="1"/>
+          <p:nvPr/>
+        </p:nvSpPr>
+        <p:spPr>
+          <a:xfrm>
+            <a:off x="9951720" y="6455664"/>
+            <a:ext cx="2011680" cy="292608"/>
+          </a:xfrm>
+          <a:prstGeom prst="rect">
+            <a:avLst/>
+          </a:prstGeom>
+          <a:noFill/>
+        </p:spPr>
+        <p:txBody>
+          <a:bodyPr wrap="none" lIns="0" rIns="0" tIns="0" bIns="0">
+            <a:spAutoFit/>
+          </a:bodyPr>
+          <a:lstStyle/>
+          <a:p>
+            <a:pPr algn="r"/>
+            <a:r>
+              <a:rPr sz="1000">
+                <a:solidFill>
+                  <a:srgbClr val="8A939B"/>
+                </a:solidFill>
+                <a:hlinkClick r:id="rId3"/>
+              </a:rPr>
+              <a:t>cuinotes.com</a:t>
+            </a:r>
+            <a:r>
+              <a:rPr sz="1000">
+                <a:solidFill>
+                  <a:srgbClr val="8A939B"/>
+                </a:solidFill>
+              </a:rPr>
+              <a:t>  ·  15</a:t>
+            </a:r>
           </a:p>
         </p:txBody>
       </p:sp>
@@ -6284,6 +6071,10 @@
           </a:solidFill>
           <a:ln/>
         </p:spPr>
+        <p:txBody>
+          <a:bodyPr/>
+          <a:p/>
+        </p:txBody>
       </p:sp>
       <p:sp>
         <p:nvSpPr>
@@ -6547,79 +6338,44 @@
       </p:sp>
       <p:sp>
         <p:nvSpPr>
-          <p:cNvPr id="6" name="Text 4"/>
-          <p:cNvSpPr txBox="1"/>
-          <p:nvPr/>
-        </p:nvSpPr>
-        <p:spPr>
-          <a:xfrm>
-            <a:off x="640080" y="6446520"/>
-            <a:ext cx="8686800" cy="292608"/>
-          </a:xfrm>
-          <a:prstGeom prst="rect">
-            <a:avLst/>
-          </a:prstGeom>
-          <a:noFill/>
-          <a:ln/>
-        </p:spPr>
-        <p:txBody>
-          <a:bodyPr wrap="square" lIns="0" tIns="0" rIns="0" bIns="0" rtlCol="0" anchor="ctr"/>
-          <a:lstStyle/>
-          <a:p>
-            <a:pPr algn="l" indent="0" marL="0">
-              <a:buNone/>
-            </a:pPr>
-            <a:r>
-              <a:rPr lang="en-US" sz="900" dirty="0">
-                <a:solidFill>
-                  <a:srgbClr val="5D5D72"/>
-                </a:solidFill>
-                <a:latin typeface="Calibri" pitchFamily="34" charset="0"/>
-                <a:ea typeface="Calibri" pitchFamily="34" charset="-122"/>
-                <a:cs typeface="Calibri" pitchFamily="34" charset="-120"/>
-              </a:rPr>
-              <a:t>Usman Akram  •  COMSATS University Islamabad</a:t>
-            </a:r>
-            <a:endParaRPr lang="en-US" sz="900" dirty="0"/>
-          </a:p>
-        </p:txBody>
-      </p:sp>
-      <p:sp>
-        <p:nvSpPr>
-          <p:cNvPr id="7" name="Text 5"/>
-          <p:cNvSpPr txBox="1"/>
-          <p:nvPr/>
-        </p:nvSpPr>
-        <p:spPr>
-          <a:xfrm>
-            <a:off x="11155680" y="6446520"/>
-            <a:ext cx="457200" cy="292608"/>
-          </a:xfrm>
-          <a:prstGeom prst="rect">
-            <a:avLst/>
-          </a:prstGeom>
-          <a:noFill/>
-          <a:ln/>
-        </p:spPr>
-        <p:txBody>
-          <a:bodyPr wrap="square" lIns="0" tIns="0" rIns="0" bIns="0" rtlCol="0" anchor="ctr"/>
-          <a:lstStyle/>
-          <a:p>
-            <a:pPr algn="r" indent="0" marL="0">
-              <a:buNone/>
-            </a:pPr>
-            <a:r>
-              <a:rPr lang="en-US" sz="900" dirty="0">
-                <a:solidFill>
-                  <a:srgbClr val="5D5D72"/>
-                </a:solidFill>
-                <a:latin typeface="Calibri" pitchFamily="34" charset="0"/>
-                <a:ea typeface="Calibri" pitchFamily="34" charset="-122"/>
-                <a:cs typeface="Calibri" pitchFamily="34" charset="-120"/>
-              </a:rPr>
-              <a:t>16</a:t>
-            </a:r>
-            <a:endParaRPr lang="en-US" sz="900" dirty="0"/>
+          <p:cNvPr id="8" name="cuinotes-footer-mark"/>
+          <p:cNvSpPr txBox="1"/>
+          <p:nvPr/>
+        </p:nvSpPr>
+        <p:spPr>
+          <a:xfrm>
+            <a:off x="9951720" y="6455664"/>
+            <a:ext cx="2011680" cy="292608"/>
+          </a:xfrm>
+          <a:prstGeom prst="rect">
+            <a:avLst/>
+          </a:prstGeom>
+          <a:noFill/>
+        </p:spPr>
+        <p:txBody>
+          <a:bodyPr wrap="none" lIns="0" rIns="0" tIns="0" bIns="0">
+            <a:spAutoFit/>
+          </a:bodyPr>
+          <a:lstStyle/>
+          <a:p>
+            <a:pPr algn="r"/>
+            <a:r>
+              <a:rPr sz="1000">
+                <a:solidFill>
+                  <a:srgbClr val="8A939B"/>
+                </a:solidFill>
+                <a:hlinkClick r:id="rId3"/>
+              </a:rPr>
+              <a:t>cuinotes.com</a:t>
+            </a:r>
+            <a:r>
+              <a:rPr sz="1000">
+                <a:solidFill>
+                  <a:srgbClr val="8A939B"/>
+                </a:solidFill>
+              </a:rPr>
+              <a:t>  ·  16</a:t>
+            </a:r>
           </a:p>
         </p:txBody>
       </p:sp>
@@ -6759,6 +6515,10 @@
             <a:prstDash val="solid"/>
           </a:ln>
         </p:spPr>
+        <p:txBody>
+          <a:bodyPr/>
+          <a:p/>
+        </p:txBody>
       </p:sp>
       <p:sp>
         <p:nvSpPr>
@@ -6840,79 +6600,44 @@
       </p:sp>
       <p:sp>
         <p:nvSpPr>
-          <p:cNvPr id="7" name="Text 5"/>
-          <p:cNvSpPr txBox="1"/>
-          <p:nvPr/>
-        </p:nvSpPr>
-        <p:spPr>
-          <a:xfrm>
-            <a:off x="640080" y="6446520"/>
-            <a:ext cx="8686800" cy="292608"/>
-          </a:xfrm>
-          <a:prstGeom prst="rect">
-            <a:avLst/>
-          </a:prstGeom>
-          <a:noFill/>
-          <a:ln/>
-        </p:spPr>
-        <p:txBody>
-          <a:bodyPr wrap="square" lIns="0" tIns="0" rIns="0" bIns="0" rtlCol="0" anchor="ctr"/>
-          <a:lstStyle/>
-          <a:p>
-            <a:pPr algn="l" indent="0" marL="0">
-              <a:buNone/>
-            </a:pPr>
-            <a:r>
-              <a:rPr lang="en-US" sz="900" dirty="0">
-                <a:solidFill>
-                  <a:srgbClr val="5D5D72"/>
-                </a:solidFill>
-                <a:latin typeface="Calibri" pitchFamily="34" charset="0"/>
-                <a:ea typeface="Calibri" pitchFamily="34" charset="-122"/>
-                <a:cs typeface="Calibri" pitchFamily="34" charset="-120"/>
-              </a:rPr>
-              <a:t>Usman Akram  •  COMSATS University Islamabad</a:t>
-            </a:r>
-            <a:endParaRPr lang="en-US" sz="900" dirty="0"/>
-          </a:p>
-        </p:txBody>
-      </p:sp>
-      <p:sp>
-        <p:nvSpPr>
-          <p:cNvPr id="8" name="Text 6"/>
-          <p:cNvSpPr txBox="1"/>
-          <p:nvPr/>
-        </p:nvSpPr>
-        <p:spPr>
-          <a:xfrm>
-            <a:off x="11155680" y="6446520"/>
-            <a:ext cx="457200" cy="292608"/>
-          </a:xfrm>
-          <a:prstGeom prst="rect">
-            <a:avLst/>
-          </a:prstGeom>
-          <a:noFill/>
-          <a:ln/>
-        </p:spPr>
-        <p:txBody>
-          <a:bodyPr wrap="square" lIns="0" tIns="0" rIns="0" bIns="0" rtlCol="0" anchor="ctr"/>
-          <a:lstStyle/>
-          <a:p>
-            <a:pPr algn="r" indent="0" marL="0">
-              <a:buNone/>
-            </a:pPr>
-            <a:r>
-              <a:rPr lang="en-US" sz="900" dirty="0">
-                <a:solidFill>
-                  <a:srgbClr val="5D5D72"/>
-                </a:solidFill>
-                <a:latin typeface="Calibri" pitchFamily="34" charset="0"/>
-                <a:ea typeface="Calibri" pitchFamily="34" charset="-122"/>
-                <a:cs typeface="Calibri" pitchFamily="34" charset="-120"/>
-              </a:rPr>
-              <a:t>17</a:t>
-            </a:r>
-            <a:endParaRPr lang="en-US" sz="900" dirty="0"/>
+          <p:cNvPr id="9" name="cuinotes-footer-mark"/>
+          <p:cNvSpPr txBox="1"/>
+          <p:nvPr/>
+        </p:nvSpPr>
+        <p:spPr>
+          <a:xfrm>
+            <a:off x="9951720" y="6455664"/>
+            <a:ext cx="2011680" cy="292608"/>
+          </a:xfrm>
+          <a:prstGeom prst="rect">
+            <a:avLst/>
+          </a:prstGeom>
+          <a:noFill/>
+        </p:spPr>
+        <p:txBody>
+          <a:bodyPr wrap="none" lIns="0" rIns="0" tIns="0" bIns="0">
+            <a:spAutoFit/>
+          </a:bodyPr>
+          <a:lstStyle/>
+          <a:p>
+            <a:pPr algn="r"/>
+            <a:r>
+              <a:rPr sz="1000">
+                <a:solidFill>
+                  <a:srgbClr val="8A939B"/>
+                </a:solidFill>
+                <a:hlinkClick r:id="rId3"/>
+              </a:rPr>
+              <a:t>cuinotes.com</a:t>
+            </a:r>
+            <a:r>
+              <a:rPr sz="1000">
+                <a:solidFill>
+                  <a:srgbClr val="8A939B"/>
+                </a:solidFill>
+              </a:rPr>
+              <a:t>  ·  17</a:t>
+            </a:r>
           </a:p>
         </p:txBody>
       </p:sp>
@@ -7045,6 +6770,10 @@
           </a:solidFill>
           <a:ln/>
         </p:spPr>
+        <p:txBody>
+          <a:bodyPr/>
+          <a:p/>
+        </p:txBody>
       </p:sp>
       <p:sp>
         <p:nvSpPr>
@@ -7143,6 +6872,10 @@
           </a:solidFill>
           <a:ln/>
         </p:spPr>
+        <p:txBody>
+          <a:bodyPr/>
+          <a:p/>
+        </p:txBody>
       </p:sp>
       <p:sp>
         <p:nvSpPr>
@@ -7241,6 +6974,10 @@
           </a:solidFill>
           <a:ln/>
         </p:spPr>
+        <p:txBody>
+          <a:bodyPr/>
+          <a:p/>
+        </p:txBody>
       </p:sp>
       <p:sp>
         <p:nvSpPr>
@@ -7339,6 +7076,10 @@
           </a:solidFill>
           <a:ln/>
         </p:spPr>
+        <p:txBody>
+          <a:bodyPr/>
+          <a:p/>
+        </p:txBody>
       </p:sp>
       <p:sp>
         <p:nvSpPr>
@@ -7420,79 +7161,44 @@
       </p:sp>
       <p:sp>
         <p:nvSpPr>
-          <p:cNvPr id="16" name="Text 14"/>
-          <p:cNvSpPr txBox="1"/>
-          <p:nvPr/>
-        </p:nvSpPr>
-        <p:spPr>
-          <a:xfrm>
-            <a:off x="640080" y="6446520"/>
-            <a:ext cx="8686800" cy="292608"/>
-          </a:xfrm>
-          <a:prstGeom prst="rect">
-            <a:avLst/>
-          </a:prstGeom>
-          <a:noFill/>
-          <a:ln/>
-        </p:spPr>
-        <p:txBody>
-          <a:bodyPr wrap="square" lIns="0" tIns="0" rIns="0" bIns="0" rtlCol="0" anchor="ctr"/>
-          <a:lstStyle/>
-          <a:p>
-            <a:pPr algn="l" indent="0" marL="0">
-              <a:buNone/>
-            </a:pPr>
-            <a:r>
-              <a:rPr lang="en-US" sz="900" dirty="0">
-                <a:solidFill>
-                  <a:srgbClr val="5D5D72"/>
-                </a:solidFill>
-                <a:latin typeface="Calibri" pitchFamily="34" charset="0"/>
-                <a:ea typeface="Calibri" pitchFamily="34" charset="-122"/>
-                <a:cs typeface="Calibri" pitchFamily="34" charset="-120"/>
-              </a:rPr>
-              <a:t>Usman Akram  •  COMSATS University Islamabad</a:t>
-            </a:r>
-            <a:endParaRPr lang="en-US" sz="900" dirty="0"/>
-          </a:p>
-        </p:txBody>
-      </p:sp>
-      <p:sp>
-        <p:nvSpPr>
-          <p:cNvPr id="17" name="Text 15"/>
-          <p:cNvSpPr txBox="1"/>
-          <p:nvPr/>
-        </p:nvSpPr>
-        <p:spPr>
-          <a:xfrm>
-            <a:off x="11155680" y="6446520"/>
-            <a:ext cx="457200" cy="292608"/>
-          </a:xfrm>
-          <a:prstGeom prst="rect">
-            <a:avLst/>
-          </a:prstGeom>
-          <a:noFill/>
-          <a:ln/>
-        </p:spPr>
-        <p:txBody>
-          <a:bodyPr wrap="square" lIns="0" tIns="0" rIns="0" bIns="0" rtlCol="0" anchor="ctr"/>
-          <a:lstStyle/>
-          <a:p>
-            <a:pPr algn="r" indent="0" marL="0">
-              <a:buNone/>
-            </a:pPr>
-            <a:r>
-              <a:rPr lang="en-US" sz="900" dirty="0">
-                <a:solidFill>
-                  <a:srgbClr val="5D5D72"/>
-                </a:solidFill>
-                <a:latin typeface="Calibri" pitchFamily="34" charset="0"/>
-                <a:ea typeface="Calibri" pitchFamily="34" charset="-122"/>
-                <a:cs typeface="Calibri" pitchFamily="34" charset="-120"/>
-              </a:rPr>
-              <a:t>18</a:t>
-            </a:r>
-            <a:endParaRPr lang="en-US" sz="900" dirty="0"/>
+          <p:cNvPr id="18" name="cuinotes-footer-mark"/>
+          <p:cNvSpPr txBox="1"/>
+          <p:nvPr/>
+        </p:nvSpPr>
+        <p:spPr>
+          <a:xfrm>
+            <a:off x="9951720" y="6455664"/>
+            <a:ext cx="2011680" cy="292608"/>
+          </a:xfrm>
+          <a:prstGeom prst="rect">
+            <a:avLst/>
+          </a:prstGeom>
+          <a:noFill/>
+        </p:spPr>
+        <p:txBody>
+          <a:bodyPr wrap="none" lIns="0" rIns="0" tIns="0" bIns="0">
+            <a:spAutoFit/>
+          </a:bodyPr>
+          <a:lstStyle/>
+          <a:p>
+            <a:pPr algn="r"/>
+            <a:r>
+              <a:rPr sz="1000">
+                <a:solidFill>
+                  <a:srgbClr val="8A939B"/>
+                </a:solidFill>
+                <a:hlinkClick r:id="rId3"/>
+              </a:rPr>
+              <a:t>cuinotes.com</a:t>
+            </a:r>
+            <a:r>
+              <a:rPr sz="1000">
+                <a:solidFill>
+                  <a:srgbClr val="8A939B"/>
+                </a:solidFill>
+              </a:rPr>
+              <a:t>  ·  18</a:t>
+            </a:r>
           </a:p>
         </p:txBody>
       </p:sp>
@@ -7632,6 +7338,10 @@
             <a:prstDash val="solid"/>
           </a:ln>
         </p:spPr>
+        <p:txBody>
+          <a:bodyPr/>
+          <a:p/>
+        </p:txBody>
       </p:sp>
       <p:sp>
         <p:nvSpPr>
@@ -7713,79 +7423,44 @@
       </p:sp>
       <p:sp>
         <p:nvSpPr>
-          <p:cNvPr id="7" name="Text 5"/>
-          <p:cNvSpPr txBox="1"/>
-          <p:nvPr/>
-        </p:nvSpPr>
-        <p:spPr>
-          <a:xfrm>
-            <a:off x="640080" y="6446520"/>
-            <a:ext cx="8686800" cy="292608"/>
-          </a:xfrm>
-          <a:prstGeom prst="rect">
-            <a:avLst/>
-          </a:prstGeom>
-          <a:noFill/>
-          <a:ln/>
-        </p:spPr>
-        <p:txBody>
-          <a:bodyPr wrap="square" lIns="0" tIns="0" rIns="0" bIns="0" rtlCol="0" anchor="ctr"/>
-          <a:lstStyle/>
-          <a:p>
-            <a:pPr algn="l" indent="0" marL="0">
-              <a:buNone/>
-            </a:pPr>
-            <a:r>
-              <a:rPr lang="en-US" sz="900" dirty="0">
-                <a:solidFill>
-                  <a:srgbClr val="5D5D72"/>
-                </a:solidFill>
-                <a:latin typeface="Calibri" pitchFamily="34" charset="0"/>
-                <a:ea typeface="Calibri" pitchFamily="34" charset="-122"/>
-                <a:cs typeface="Calibri" pitchFamily="34" charset="-120"/>
-              </a:rPr>
-              <a:t>Usman Akram  •  COMSATS University Islamabad</a:t>
-            </a:r>
-            <a:endParaRPr lang="en-US" sz="900" dirty="0"/>
-          </a:p>
-        </p:txBody>
-      </p:sp>
-      <p:sp>
-        <p:nvSpPr>
-          <p:cNvPr id="8" name="Text 6"/>
-          <p:cNvSpPr txBox="1"/>
-          <p:nvPr/>
-        </p:nvSpPr>
-        <p:spPr>
-          <a:xfrm>
-            <a:off x="11155680" y="6446520"/>
-            <a:ext cx="457200" cy="292608"/>
-          </a:xfrm>
-          <a:prstGeom prst="rect">
-            <a:avLst/>
-          </a:prstGeom>
-          <a:noFill/>
-          <a:ln/>
-        </p:spPr>
-        <p:txBody>
-          <a:bodyPr wrap="square" lIns="0" tIns="0" rIns="0" bIns="0" rtlCol="0" anchor="ctr"/>
-          <a:lstStyle/>
-          <a:p>
-            <a:pPr algn="r" indent="0" marL="0">
-              <a:buNone/>
-            </a:pPr>
-            <a:r>
-              <a:rPr lang="en-US" sz="900" dirty="0">
-                <a:solidFill>
-                  <a:srgbClr val="5D5D72"/>
-                </a:solidFill>
-                <a:latin typeface="Calibri" pitchFamily="34" charset="0"/>
-                <a:ea typeface="Calibri" pitchFamily="34" charset="-122"/>
-                <a:cs typeface="Calibri" pitchFamily="34" charset="-120"/>
-              </a:rPr>
-              <a:t>19</a:t>
-            </a:r>
-            <a:endParaRPr lang="en-US" sz="900" dirty="0"/>
+          <p:cNvPr id="9" name="cuinotes-footer-mark"/>
+          <p:cNvSpPr txBox="1"/>
+          <p:nvPr/>
+        </p:nvSpPr>
+        <p:spPr>
+          <a:xfrm>
+            <a:off x="9951720" y="6455664"/>
+            <a:ext cx="2011680" cy="292608"/>
+          </a:xfrm>
+          <a:prstGeom prst="rect">
+            <a:avLst/>
+          </a:prstGeom>
+          <a:noFill/>
+        </p:spPr>
+        <p:txBody>
+          <a:bodyPr wrap="none" lIns="0" rIns="0" tIns="0" bIns="0">
+            <a:spAutoFit/>
+          </a:bodyPr>
+          <a:lstStyle/>
+          <a:p>
+            <a:pPr algn="r"/>
+            <a:r>
+              <a:rPr sz="1000">
+                <a:solidFill>
+                  <a:srgbClr val="8A939B"/>
+                </a:solidFill>
+                <a:hlinkClick r:id="rId3"/>
+              </a:rPr>
+              <a:t>cuinotes.com</a:t>
+            </a:r>
+            <a:r>
+              <a:rPr sz="1000">
+                <a:solidFill>
+                  <a:srgbClr val="8A939B"/>
+                </a:solidFill>
+              </a:rPr>
+              <a:t>  ·  19</a:t>
+            </a:r>
           </a:p>
         </p:txBody>
       </p:sp>
@@ -7918,6 +7593,10 @@
           </a:solidFill>
           <a:ln/>
         </p:spPr>
+        <p:txBody>
+          <a:bodyPr/>
+          <a:p/>
+        </p:txBody>
       </p:sp>
       <p:sp>
         <p:nvSpPr>
@@ -8016,6 +7695,10 @@
           </a:solidFill>
           <a:ln/>
         </p:spPr>
+        <p:txBody>
+          <a:bodyPr/>
+          <a:p/>
+        </p:txBody>
       </p:sp>
       <p:sp>
         <p:nvSpPr>
@@ -8114,6 +7797,10 @@
           </a:solidFill>
           <a:ln/>
         </p:spPr>
+        <p:txBody>
+          <a:bodyPr/>
+          <a:p/>
+        </p:txBody>
       </p:sp>
       <p:sp>
         <p:nvSpPr>
@@ -8212,6 +7899,10 @@
           </a:solidFill>
           <a:ln/>
         </p:spPr>
+        <p:txBody>
+          <a:bodyPr/>
+          <a:p/>
+        </p:txBody>
       </p:sp>
       <p:sp>
         <p:nvSpPr>
@@ -8310,6 +8001,10 @@
           </a:solidFill>
           <a:ln/>
         </p:spPr>
+        <p:txBody>
+          <a:bodyPr/>
+          <a:p/>
+        </p:txBody>
       </p:sp>
       <p:sp>
         <p:nvSpPr>
@@ -8391,79 +8086,44 @@
       </p:sp>
       <p:sp>
         <p:nvSpPr>
-          <p:cNvPr id="19" name="Text 17"/>
-          <p:cNvSpPr txBox="1"/>
-          <p:nvPr/>
-        </p:nvSpPr>
-        <p:spPr>
-          <a:xfrm>
-            <a:off x="640080" y="6446520"/>
-            <a:ext cx="8686800" cy="292608"/>
-          </a:xfrm>
-          <a:prstGeom prst="rect">
-            <a:avLst/>
-          </a:prstGeom>
-          <a:noFill/>
-          <a:ln/>
-        </p:spPr>
-        <p:txBody>
-          <a:bodyPr wrap="square" lIns="0" tIns="0" rIns="0" bIns="0" rtlCol="0" anchor="ctr"/>
-          <a:lstStyle/>
-          <a:p>
-            <a:pPr algn="l" indent="0" marL="0">
-              <a:buNone/>
-            </a:pPr>
-            <a:r>
-              <a:rPr lang="en-US" sz="900" dirty="0">
-                <a:solidFill>
-                  <a:srgbClr val="5D5D72"/>
-                </a:solidFill>
-                <a:latin typeface="Calibri" pitchFamily="34" charset="0"/>
-                <a:ea typeface="Calibri" pitchFamily="34" charset="-122"/>
-                <a:cs typeface="Calibri" pitchFamily="34" charset="-120"/>
-              </a:rPr>
-              <a:t>Usman Akram  •  COMSATS University Islamabad</a:t>
-            </a:r>
-            <a:endParaRPr lang="en-US" sz="900" dirty="0"/>
-          </a:p>
-        </p:txBody>
-      </p:sp>
-      <p:sp>
-        <p:nvSpPr>
-          <p:cNvPr id="20" name="Text 18"/>
-          <p:cNvSpPr txBox="1"/>
-          <p:nvPr/>
-        </p:nvSpPr>
-        <p:spPr>
-          <a:xfrm>
-            <a:off x="11155680" y="6446520"/>
-            <a:ext cx="457200" cy="292608"/>
-          </a:xfrm>
-          <a:prstGeom prst="rect">
-            <a:avLst/>
-          </a:prstGeom>
-          <a:noFill/>
-          <a:ln/>
-        </p:spPr>
-        <p:txBody>
-          <a:bodyPr wrap="square" lIns="0" tIns="0" rIns="0" bIns="0" rtlCol="0" anchor="ctr"/>
-          <a:lstStyle/>
-          <a:p>
-            <a:pPr algn="r" indent="0" marL="0">
-              <a:buNone/>
-            </a:pPr>
-            <a:r>
-              <a:rPr lang="en-US" sz="900" dirty="0">
-                <a:solidFill>
-                  <a:srgbClr val="5D5D72"/>
-                </a:solidFill>
-                <a:latin typeface="Calibri" pitchFamily="34" charset="0"/>
-                <a:ea typeface="Calibri" pitchFamily="34" charset="-122"/>
-                <a:cs typeface="Calibri" pitchFamily="34" charset="-120"/>
-              </a:rPr>
-              <a:t>2</a:t>
-            </a:r>
-            <a:endParaRPr lang="en-US" sz="900" dirty="0"/>
+          <p:cNvPr id="21" name="cuinotes-footer-mark"/>
+          <p:cNvSpPr txBox="1"/>
+          <p:nvPr/>
+        </p:nvSpPr>
+        <p:spPr>
+          <a:xfrm>
+            <a:off x="9951720" y="6455664"/>
+            <a:ext cx="2011680" cy="292608"/>
+          </a:xfrm>
+          <a:prstGeom prst="rect">
+            <a:avLst/>
+          </a:prstGeom>
+          <a:noFill/>
+        </p:spPr>
+        <p:txBody>
+          <a:bodyPr wrap="none" lIns="0" rIns="0" tIns="0" bIns="0">
+            <a:spAutoFit/>
+          </a:bodyPr>
+          <a:lstStyle/>
+          <a:p>
+            <a:pPr algn="r"/>
+            <a:r>
+              <a:rPr sz="1000">
+                <a:solidFill>
+                  <a:srgbClr val="8A939B"/>
+                </a:solidFill>
+                <a:hlinkClick r:id="rId3"/>
+              </a:rPr>
+              <a:t>cuinotes.com</a:t>
+            </a:r>
+            <a:r>
+              <a:rPr sz="1000">
+                <a:solidFill>
+                  <a:srgbClr val="8A939B"/>
+                </a:solidFill>
+              </a:rPr>
+              <a:t>  ·  2</a:t>
+            </a:r>
           </a:p>
         </p:txBody>
       </p:sp>
@@ -8596,6 +8256,10 @@
           </a:solidFill>
           <a:ln/>
         </p:spPr>
+        <p:txBody>
+          <a:bodyPr/>
+          <a:p/>
+        </p:txBody>
       </p:sp>
       <p:sp>
         <p:nvSpPr>
@@ -8694,6 +8358,10 @@
           </a:solidFill>
           <a:ln/>
         </p:spPr>
+        <p:txBody>
+          <a:bodyPr/>
+          <a:p/>
+        </p:txBody>
       </p:sp>
       <p:sp>
         <p:nvSpPr>
@@ -8792,6 +8460,10 @@
           </a:solidFill>
           <a:ln/>
         </p:spPr>
+        <p:txBody>
+          <a:bodyPr/>
+          <a:p/>
+        </p:txBody>
       </p:sp>
       <p:sp>
         <p:nvSpPr>
@@ -8873,79 +8545,44 @@
       </p:sp>
       <p:sp>
         <p:nvSpPr>
-          <p:cNvPr id="13" name="Text 11"/>
-          <p:cNvSpPr txBox="1"/>
-          <p:nvPr/>
-        </p:nvSpPr>
-        <p:spPr>
-          <a:xfrm>
-            <a:off x="640080" y="6446520"/>
-            <a:ext cx="8686800" cy="292608"/>
-          </a:xfrm>
-          <a:prstGeom prst="rect">
-            <a:avLst/>
-          </a:prstGeom>
-          <a:noFill/>
-          <a:ln/>
-        </p:spPr>
-        <p:txBody>
-          <a:bodyPr wrap="square" lIns="0" tIns="0" rIns="0" bIns="0" rtlCol="0" anchor="ctr"/>
-          <a:lstStyle/>
-          <a:p>
-            <a:pPr algn="l" indent="0" marL="0">
-              <a:buNone/>
-            </a:pPr>
-            <a:r>
-              <a:rPr lang="en-US" sz="900" dirty="0">
-                <a:solidFill>
-                  <a:srgbClr val="5D5D72"/>
-                </a:solidFill>
-                <a:latin typeface="Calibri" pitchFamily="34" charset="0"/>
-                <a:ea typeface="Calibri" pitchFamily="34" charset="-122"/>
-                <a:cs typeface="Calibri" pitchFamily="34" charset="-120"/>
-              </a:rPr>
-              <a:t>Usman Akram  •  COMSATS University Islamabad</a:t>
-            </a:r>
-            <a:endParaRPr lang="en-US" sz="900" dirty="0"/>
-          </a:p>
-        </p:txBody>
-      </p:sp>
-      <p:sp>
-        <p:nvSpPr>
-          <p:cNvPr id="14" name="Text 12"/>
-          <p:cNvSpPr txBox="1"/>
-          <p:nvPr/>
-        </p:nvSpPr>
-        <p:spPr>
-          <a:xfrm>
-            <a:off x="11155680" y="6446520"/>
-            <a:ext cx="457200" cy="292608"/>
-          </a:xfrm>
-          <a:prstGeom prst="rect">
-            <a:avLst/>
-          </a:prstGeom>
-          <a:noFill/>
-          <a:ln/>
-        </p:spPr>
-        <p:txBody>
-          <a:bodyPr wrap="square" lIns="0" tIns="0" rIns="0" bIns="0" rtlCol="0" anchor="ctr"/>
-          <a:lstStyle/>
-          <a:p>
-            <a:pPr algn="r" indent="0" marL="0">
-              <a:buNone/>
-            </a:pPr>
-            <a:r>
-              <a:rPr lang="en-US" sz="900" dirty="0">
-                <a:solidFill>
-                  <a:srgbClr val="5D5D72"/>
-                </a:solidFill>
-                <a:latin typeface="Calibri" pitchFamily="34" charset="0"/>
-                <a:ea typeface="Calibri" pitchFamily="34" charset="-122"/>
-                <a:cs typeface="Calibri" pitchFamily="34" charset="-120"/>
-              </a:rPr>
-              <a:t>20</a:t>
-            </a:r>
-            <a:endParaRPr lang="en-US" sz="900" dirty="0"/>
+          <p:cNvPr id="15" name="cuinotes-footer-mark"/>
+          <p:cNvSpPr txBox="1"/>
+          <p:nvPr/>
+        </p:nvSpPr>
+        <p:spPr>
+          <a:xfrm>
+            <a:off x="9951720" y="6455664"/>
+            <a:ext cx="2011680" cy="292608"/>
+          </a:xfrm>
+          <a:prstGeom prst="rect">
+            <a:avLst/>
+          </a:prstGeom>
+          <a:noFill/>
+        </p:spPr>
+        <p:txBody>
+          <a:bodyPr wrap="none" lIns="0" rIns="0" tIns="0" bIns="0">
+            <a:spAutoFit/>
+          </a:bodyPr>
+          <a:lstStyle/>
+          <a:p>
+            <a:pPr algn="r"/>
+            <a:r>
+              <a:rPr sz="1000">
+                <a:solidFill>
+                  <a:srgbClr val="8A939B"/>
+                </a:solidFill>
+                <a:hlinkClick r:id="rId3"/>
+              </a:rPr>
+              <a:t>cuinotes.com</a:t>
+            </a:r>
+            <a:r>
+              <a:rPr sz="1000">
+                <a:solidFill>
+                  <a:srgbClr val="8A939B"/>
+                </a:solidFill>
+              </a:rPr>
+              <a:t>  ·  20</a:t>
+            </a:r>
           </a:p>
         </p:txBody>
       </p:sp>
@@ -9080,6 +8717,10 @@
           </a:solidFill>
           <a:ln/>
         </p:spPr>
+        <p:txBody>
+          <a:bodyPr/>
+          <a:p/>
+        </p:txBody>
       </p:sp>
       <p:sp>
         <p:nvSpPr>
@@ -9274,79 +8915,44 @@
       </p:sp>
       <p:sp>
         <p:nvSpPr>
-          <p:cNvPr id="6" name="Text 4"/>
-          <p:cNvSpPr txBox="1"/>
-          <p:nvPr/>
-        </p:nvSpPr>
-        <p:spPr>
-          <a:xfrm>
-            <a:off x="640080" y="6446520"/>
-            <a:ext cx="8686800" cy="292608"/>
-          </a:xfrm>
-          <a:prstGeom prst="rect">
-            <a:avLst/>
-          </a:prstGeom>
-          <a:noFill/>
-          <a:ln/>
-        </p:spPr>
-        <p:txBody>
-          <a:bodyPr wrap="square" lIns="0" tIns="0" rIns="0" bIns="0" rtlCol="0" anchor="ctr"/>
-          <a:lstStyle/>
-          <a:p>
-            <a:pPr algn="l" indent="0" marL="0">
-              <a:buNone/>
-            </a:pPr>
-            <a:r>
-              <a:rPr lang="en-US" sz="900" dirty="0">
-                <a:solidFill>
-                  <a:srgbClr val="5D5D72"/>
-                </a:solidFill>
-                <a:latin typeface="Calibri" pitchFamily="34" charset="0"/>
-                <a:ea typeface="Calibri" pitchFamily="34" charset="-122"/>
-                <a:cs typeface="Calibri" pitchFamily="34" charset="-120"/>
-              </a:rPr>
-              <a:t>Usman Akram  •  COMSATS University Islamabad</a:t>
-            </a:r>
-            <a:endParaRPr lang="en-US" sz="900" dirty="0"/>
-          </a:p>
-        </p:txBody>
-      </p:sp>
-      <p:sp>
-        <p:nvSpPr>
-          <p:cNvPr id="7" name="Text 5"/>
-          <p:cNvSpPr txBox="1"/>
-          <p:nvPr/>
-        </p:nvSpPr>
-        <p:spPr>
-          <a:xfrm>
-            <a:off x="11155680" y="6446520"/>
-            <a:ext cx="457200" cy="292608"/>
-          </a:xfrm>
-          <a:prstGeom prst="rect">
-            <a:avLst/>
-          </a:prstGeom>
-          <a:noFill/>
-          <a:ln/>
-        </p:spPr>
-        <p:txBody>
-          <a:bodyPr wrap="square" lIns="0" tIns="0" rIns="0" bIns="0" rtlCol="0" anchor="ctr"/>
-          <a:lstStyle/>
-          <a:p>
-            <a:pPr algn="r" indent="0" marL="0">
-              <a:buNone/>
-            </a:pPr>
-            <a:r>
-              <a:rPr lang="en-US" sz="900" dirty="0">
-                <a:solidFill>
-                  <a:srgbClr val="5D5D72"/>
-                </a:solidFill>
-                <a:latin typeface="Calibri" pitchFamily="34" charset="0"/>
-                <a:ea typeface="Calibri" pitchFamily="34" charset="-122"/>
-                <a:cs typeface="Calibri" pitchFamily="34" charset="-120"/>
-              </a:rPr>
-              <a:t>21</a:t>
-            </a:r>
-            <a:endParaRPr lang="en-US" sz="900" dirty="0"/>
+          <p:cNvPr id="8" name="cuinotes-footer-mark"/>
+          <p:cNvSpPr txBox="1"/>
+          <p:nvPr/>
+        </p:nvSpPr>
+        <p:spPr>
+          <a:xfrm>
+            <a:off x="9951720" y="6455664"/>
+            <a:ext cx="2011680" cy="292608"/>
+          </a:xfrm>
+          <a:prstGeom prst="rect">
+            <a:avLst/>
+          </a:prstGeom>
+          <a:noFill/>
+        </p:spPr>
+        <p:txBody>
+          <a:bodyPr wrap="none" lIns="0" rIns="0" tIns="0" bIns="0">
+            <a:spAutoFit/>
+          </a:bodyPr>
+          <a:lstStyle/>
+          <a:p>
+            <a:pPr algn="r"/>
+            <a:r>
+              <a:rPr sz="1000">
+                <a:solidFill>
+                  <a:srgbClr val="8A939B"/>
+                </a:solidFill>
+                <a:hlinkClick r:id="rId3"/>
+              </a:rPr>
+              <a:t>cuinotes.com</a:t>
+            </a:r>
+            <a:r>
+              <a:rPr sz="1000">
+                <a:solidFill>
+                  <a:srgbClr val="8A939B"/>
+                </a:solidFill>
+              </a:rPr>
+              <a:t>  ·  21</a:t>
+            </a:r>
           </a:p>
         </p:txBody>
       </p:sp>
@@ -9486,6 +9092,10 @@
             <a:prstDash val="solid"/>
           </a:ln>
         </p:spPr>
+        <p:txBody>
+          <a:bodyPr/>
+          <a:p/>
+        </p:txBody>
       </p:sp>
       <p:sp>
         <p:nvSpPr>
@@ -9567,79 +9177,44 @@
       </p:sp>
       <p:sp>
         <p:nvSpPr>
-          <p:cNvPr id="7" name="Text 5"/>
-          <p:cNvSpPr txBox="1"/>
-          <p:nvPr/>
-        </p:nvSpPr>
-        <p:spPr>
-          <a:xfrm>
-            <a:off x="640080" y="6446520"/>
-            <a:ext cx="8686800" cy="292608"/>
-          </a:xfrm>
-          <a:prstGeom prst="rect">
-            <a:avLst/>
-          </a:prstGeom>
-          <a:noFill/>
-          <a:ln/>
-        </p:spPr>
-        <p:txBody>
-          <a:bodyPr wrap="square" lIns="0" tIns="0" rIns="0" bIns="0" rtlCol="0" anchor="ctr"/>
-          <a:lstStyle/>
-          <a:p>
-            <a:pPr algn="l" indent="0" marL="0">
-              <a:buNone/>
-            </a:pPr>
-            <a:r>
-              <a:rPr lang="en-US" sz="900" dirty="0">
-                <a:solidFill>
-                  <a:srgbClr val="5D5D72"/>
-                </a:solidFill>
-                <a:latin typeface="Calibri" pitchFamily="34" charset="0"/>
-                <a:ea typeface="Calibri" pitchFamily="34" charset="-122"/>
-                <a:cs typeface="Calibri" pitchFamily="34" charset="-120"/>
-              </a:rPr>
-              <a:t>Usman Akram  •  COMSATS University Islamabad</a:t>
-            </a:r>
-            <a:endParaRPr lang="en-US" sz="900" dirty="0"/>
-          </a:p>
-        </p:txBody>
-      </p:sp>
-      <p:sp>
-        <p:nvSpPr>
-          <p:cNvPr id="8" name="Text 6"/>
-          <p:cNvSpPr txBox="1"/>
-          <p:nvPr/>
-        </p:nvSpPr>
-        <p:spPr>
-          <a:xfrm>
-            <a:off x="11155680" y="6446520"/>
-            <a:ext cx="457200" cy="292608"/>
-          </a:xfrm>
-          <a:prstGeom prst="rect">
-            <a:avLst/>
-          </a:prstGeom>
-          <a:noFill/>
-          <a:ln/>
-        </p:spPr>
-        <p:txBody>
-          <a:bodyPr wrap="square" lIns="0" tIns="0" rIns="0" bIns="0" rtlCol="0" anchor="ctr"/>
-          <a:lstStyle/>
-          <a:p>
-            <a:pPr algn="r" indent="0" marL="0">
-              <a:buNone/>
-            </a:pPr>
-            <a:r>
-              <a:rPr lang="en-US" sz="900" dirty="0">
-                <a:solidFill>
-                  <a:srgbClr val="5D5D72"/>
-                </a:solidFill>
-                <a:latin typeface="Calibri" pitchFamily="34" charset="0"/>
-                <a:ea typeface="Calibri" pitchFamily="34" charset="-122"/>
-                <a:cs typeface="Calibri" pitchFamily="34" charset="-120"/>
-              </a:rPr>
-              <a:t>22</a:t>
-            </a:r>
-            <a:endParaRPr lang="en-US" sz="900" dirty="0"/>
+          <p:cNvPr id="9" name="cuinotes-footer-mark"/>
+          <p:cNvSpPr txBox="1"/>
+          <p:nvPr/>
+        </p:nvSpPr>
+        <p:spPr>
+          <a:xfrm>
+            <a:off x="9951720" y="6455664"/>
+            <a:ext cx="2011680" cy="292608"/>
+          </a:xfrm>
+          <a:prstGeom prst="rect">
+            <a:avLst/>
+          </a:prstGeom>
+          <a:noFill/>
+        </p:spPr>
+        <p:txBody>
+          <a:bodyPr wrap="none" lIns="0" rIns="0" tIns="0" bIns="0">
+            <a:spAutoFit/>
+          </a:bodyPr>
+          <a:lstStyle/>
+          <a:p>
+            <a:pPr algn="r"/>
+            <a:r>
+              <a:rPr sz="1000">
+                <a:solidFill>
+                  <a:srgbClr val="8A939B"/>
+                </a:solidFill>
+                <a:hlinkClick r:id="rId3"/>
+              </a:rPr>
+              <a:t>cuinotes.com</a:t>
+            </a:r>
+            <a:r>
+              <a:rPr sz="1000">
+                <a:solidFill>
+                  <a:srgbClr val="8A939B"/>
+                </a:solidFill>
+              </a:rPr>
+              <a:t>  ·  22</a:t>
+            </a:r>
           </a:p>
         </p:txBody>
       </p:sp>
@@ -9774,6 +9349,10 @@
           </a:solidFill>
           <a:ln/>
         </p:spPr>
+        <p:txBody>
+          <a:bodyPr/>
+          <a:p/>
+        </p:txBody>
       </p:sp>
       <p:sp>
         <p:nvSpPr>
@@ -10119,79 +9698,44 @@
       </p:sp>
       <p:sp>
         <p:nvSpPr>
-          <p:cNvPr id="6" name="Text 4"/>
-          <p:cNvSpPr txBox="1"/>
-          <p:nvPr/>
-        </p:nvSpPr>
-        <p:spPr>
-          <a:xfrm>
-            <a:off x="640080" y="6446520"/>
-            <a:ext cx="8686800" cy="292608"/>
-          </a:xfrm>
-          <a:prstGeom prst="rect">
-            <a:avLst/>
-          </a:prstGeom>
-          <a:noFill/>
-          <a:ln/>
-        </p:spPr>
-        <p:txBody>
-          <a:bodyPr wrap="square" lIns="0" tIns="0" rIns="0" bIns="0" rtlCol="0" anchor="ctr"/>
-          <a:lstStyle/>
-          <a:p>
-            <a:pPr algn="l" indent="0" marL="0">
-              <a:buNone/>
-            </a:pPr>
-            <a:r>
-              <a:rPr lang="en-US" sz="900" dirty="0">
-                <a:solidFill>
-                  <a:srgbClr val="5D5D72"/>
-                </a:solidFill>
-                <a:latin typeface="Calibri" pitchFamily="34" charset="0"/>
-                <a:ea typeface="Calibri" pitchFamily="34" charset="-122"/>
-                <a:cs typeface="Calibri" pitchFamily="34" charset="-120"/>
-              </a:rPr>
-              <a:t>Usman Akram  •  COMSATS University Islamabad</a:t>
-            </a:r>
-            <a:endParaRPr lang="en-US" sz="900" dirty="0"/>
-          </a:p>
-        </p:txBody>
-      </p:sp>
-      <p:sp>
-        <p:nvSpPr>
-          <p:cNvPr id="7" name="Text 5"/>
-          <p:cNvSpPr txBox="1"/>
-          <p:nvPr/>
-        </p:nvSpPr>
-        <p:spPr>
-          <a:xfrm>
-            <a:off x="11155680" y="6446520"/>
-            <a:ext cx="457200" cy="292608"/>
-          </a:xfrm>
-          <a:prstGeom prst="rect">
-            <a:avLst/>
-          </a:prstGeom>
-          <a:noFill/>
-          <a:ln/>
-        </p:spPr>
-        <p:txBody>
-          <a:bodyPr wrap="square" lIns="0" tIns="0" rIns="0" bIns="0" rtlCol="0" anchor="ctr"/>
-          <a:lstStyle/>
-          <a:p>
-            <a:pPr algn="r" indent="0" marL="0">
-              <a:buNone/>
-            </a:pPr>
-            <a:r>
-              <a:rPr lang="en-US" sz="900" dirty="0">
-                <a:solidFill>
-                  <a:srgbClr val="5D5D72"/>
-                </a:solidFill>
-                <a:latin typeface="Calibri" pitchFamily="34" charset="0"/>
-                <a:ea typeface="Calibri" pitchFamily="34" charset="-122"/>
-                <a:cs typeface="Calibri" pitchFamily="34" charset="-120"/>
-              </a:rPr>
-              <a:t>23</a:t>
-            </a:r>
-            <a:endParaRPr lang="en-US" sz="900" dirty="0"/>
+          <p:cNvPr id="8" name="cuinotes-footer-mark"/>
+          <p:cNvSpPr txBox="1"/>
+          <p:nvPr/>
+        </p:nvSpPr>
+        <p:spPr>
+          <a:xfrm>
+            <a:off x="9951720" y="6455664"/>
+            <a:ext cx="2011680" cy="292608"/>
+          </a:xfrm>
+          <a:prstGeom prst="rect">
+            <a:avLst/>
+          </a:prstGeom>
+          <a:noFill/>
+        </p:spPr>
+        <p:txBody>
+          <a:bodyPr wrap="none" lIns="0" rIns="0" tIns="0" bIns="0">
+            <a:spAutoFit/>
+          </a:bodyPr>
+          <a:lstStyle/>
+          <a:p>
+            <a:pPr algn="r"/>
+            <a:r>
+              <a:rPr sz="1000">
+                <a:solidFill>
+                  <a:srgbClr val="8A939B"/>
+                </a:solidFill>
+                <a:hlinkClick r:id="rId3"/>
+              </a:rPr>
+              <a:t>cuinotes.com</a:t>
+            </a:r>
+            <a:r>
+              <a:rPr sz="1000">
+                <a:solidFill>
+                  <a:srgbClr val="8A939B"/>
+                </a:solidFill>
+              </a:rPr>
+              <a:t>  ·  23</a:t>
+            </a:r>
           </a:p>
         </p:txBody>
       </p:sp>
@@ -10324,6 +9868,10 @@
           </a:solidFill>
           <a:ln/>
         </p:spPr>
+        <p:txBody>
+          <a:bodyPr/>
+          <a:p/>
+        </p:txBody>
       </p:sp>
       <p:sp>
         <p:nvSpPr>
@@ -10422,6 +9970,10 @@
           </a:solidFill>
           <a:ln/>
         </p:spPr>
+        <p:txBody>
+          <a:bodyPr/>
+          <a:p/>
+        </p:txBody>
       </p:sp>
       <p:sp>
         <p:nvSpPr>
@@ -10520,6 +10072,10 @@
           </a:solidFill>
           <a:ln/>
         </p:spPr>
+        <p:txBody>
+          <a:bodyPr/>
+          <a:p/>
+        </p:txBody>
       </p:sp>
       <p:sp>
         <p:nvSpPr>
@@ -10618,6 +10174,10 @@
           </a:solidFill>
           <a:ln/>
         </p:spPr>
+        <p:txBody>
+          <a:bodyPr/>
+          <a:p/>
+        </p:txBody>
       </p:sp>
       <p:sp>
         <p:nvSpPr>
@@ -10699,79 +10259,44 @@
       </p:sp>
       <p:sp>
         <p:nvSpPr>
-          <p:cNvPr id="16" name="Text 14"/>
-          <p:cNvSpPr txBox="1"/>
-          <p:nvPr/>
-        </p:nvSpPr>
-        <p:spPr>
-          <a:xfrm>
-            <a:off x="640080" y="6446520"/>
-            <a:ext cx="8686800" cy="292608"/>
-          </a:xfrm>
-          <a:prstGeom prst="rect">
-            <a:avLst/>
-          </a:prstGeom>
-          <a:noFill/>
-          <a:ln/>
-        </p:spPr>
-        <p:txBody>
-          <a:bodyPr wrap="square" lIns="0" tIns="0" rIns="0" bIns="0" rtlCol="0" anchor="ctr"/>
-          <a:lstStyle/>
-          <a:p>
-            <a:pPr algn="l" indent="0" marL="0">
-              <a:buNone/>
-            </a:pPr>
-            <a:r>
-              <a:rPr lang="en-US" sz="900" dirty="0">
-                <a:solidFill>
-                  <a:srgbClr val="5D5D72"/>
-                </a:solidFill>
-                <a:latin typeface="Calibri" pitchFamily="34" charset="0"/>
-                <a:ea typeface="Calibri" pitchFamily="34" charset="-122"/>
-                <a:cs typeface="Calibri" pitchFamily="34" charset="-120"/>
-              </a:rPr>
-              <a:t>Usman Akram  •  COMSATS University Islamabad</a:t>
-            </a:r>
-            <a:endParaRPr lang="en-US" sz="900" dirty="0"/>
-          </a:p>
-        </p:txBody>
-      </p:sp>
-      <p:sp>
-        <p:nvSpPr>
-          <p:cNvPr id="17" name="Text 15"/>
-          <p:cNvSpPr txBox="1"/>
-          <p:nvPr/>
-        </p:nvSpPr>
-        <p:spPr>
-          <a:xfrm>
-            <a:off x="11155680" y="6446520"/>
-            <a:ext cx="457200" cy="292608"/>
-          </a:xfrm>
-          <a:prstGeom prst="rect">
-            <a:avLst/>
-          </a:prstGeom>
-          <a:noFill/>
-          <a:ln/>
-        </p:spPr>
-        <p:txBody>
-          <a:bodyPr wrap="square" lIns="0" tIns="0" rIns="0" bIns="0" rtlCol="0" anchor="ctr"/>
-          <a:lstStyle/>
-          <a:p>
-            <a:pPr algn="r" indent="0" marL="0">
-              <a:buNone/>
-            </a:pPr>
-            <a:r>
-              <a:rPr lang="en-US" sz="900" dirty="0">
-                <a:solidFill>
-                  <a:srgbClr val="5D5D72"/>
-                </a:solidFill>
-                <a:latin typeface="Calibri" pitchFamily="34" charset="0"/>
-                <a:ea typeface="Calibri" pitchFamily="34" charset="-122"/>
-                <a:cs typeface="Calibri" pitchFamily="34" charset="-120"/>
-              </a:rPr>
-              <a:t>24</a:t>
-            </a:r>
-            <a:endParaRPr lang="en-US" sz="900" dirty="0"/>
+          <p:cNvPr id="18" name="cuinotes-footer-mark"/>
+          <p:cNvSpPr txBox="1"/>
+          <p:nvPr/>
+        </p:nvSpPr>
+        <p:spPr>
+          <a:xfrm>
+            <a:off x="9951720" y="6455664"/>
+            <a:ext cx="2011680" cy="292608"/>
+          </a:xfrm>
+          <a:prstGeom prst="rect">
+            <a:avLst/>
+          </a:prstGeom>
+          <a:noFill/>
+        </p:spPr>
+        <p:txBody>
+          <a:bodyPr wrap="none" lIns="0" rIns="0" tIns="0" bIns="0">
+            <a:spAutoFit/>
+          </a:bodyPr>
+          <a:lstStyle/>
+          <a:p>
+            <a:pPr algn="r"/>
+            <a:r>
+              <a:rPr sz="1000">
+                <a:solidFill>
+                  <a:srgbClr val="8A939B"/>
+                </a:solidFill>
+                <a:hlinkClick r:id="rId3"/>
+              </a:rPr>
+              <a:t>cuinotes.com</a:t>
+            </a:r>
+            <a:r>
+              <a:rPr sz="1000">
+                <a:solidFill>
+                  <a:srgbClr val="8A939B"/>
+                </a:solidFill>
+              </a:rPr>
+              <a:t>  ·  24</a:t>
+            </a:r>
           </a:p>
         </p:txBody>
       </p:sp>
@@ -10906,6 +10431,10 @@
           </a:solidFill>
           <a:ln/>
         </p:spPr>
+        <p:txBody>
+          <a:bodyPr/>
+          <a:p/>
+        </p:txBody>
       </p:sp>
       <p:sp>
         <p:nvSpPr>
@@ -11160,79 +10689,44 @@
       </p:sp>
       <p:sp>
         <p:nvSpPr>
-          <p:cNvPr id="6" name="Text 4"/>
-          <p:cNvSpPr txBox="1"/>
-          <p:nvPr/>
-        </p:nvSpPr>
-        <p:spPr>
-          <a:xfrm>
-            <a:off x="640080" y="6446520"/>
-            <a:ext cx="8686800" cy="292608"/>
-          </a:xfrm>
-          <a:prstGeom prst="rect">
-            <a:avLst/>
-          </a:prstGeom>
-          <a:noFill/>
-          <a:ln/>
-        </p:spPr>
-        <p:txBody>
-          <a:bodyPr wrap="square" lIns="0" tIns="0" rIns="0" bIns="0" rtlCol="0" anchor="ctr"/>
-          <a:lstStyle/>
-          <a:p>
-            <a:pPr algn="l" indent="0" marL="0">
-              <a:buNone/>
-            </a:pPr>
-            <a:r>
-              <a:rPr lang="en-US" sz="900" dirty="0">
-                <a:solidFill>
-                  <a:srgbClr val="5D5D72"/>
-                </a:solidFill>
-                <a:latin typeface="Calibri" pitchFamily="34" charset="0"/>
-                <a:ea typeface="Calibri" pitchFamily="34" charset="-122"/>
-                <a:cs typeface="Calibri" pitchFamily="34" charset="-120"/>
-              </a:rPr>
-              <a:t>Usman Akram  •  COMSATS University Islamabad</a:t>
-            </a:r>
-            <a:endParaRPr lang="en-US" sz="900" dirty="0"/>
-          </a:p>
-        </p:txBody>
-      </p:sp>
-      <p:sp>
-        <p:nvSpPr>
-          <p:cNvPr id="7" name="Text 5"/>
-          <p:cNvSpPr txBox="1"/>
-          <p:nvPr/>
-        </p:nvSpPr>
-        <p:spPr>
-          <a:xfrm>
-            <a:off x="11155680" y="6446520"/>
-            <a:ext cx="457200" cy="292608"/>
-          </a:xfrm>
-          <a:prstGeom prst="rect">
-            <a:avLst/>
-          </a:prstGeom>
-          <a:noFill/>
-          <a:ln/>
-        </p:spPr>
-        <p:txBody>
-          <a:bodyPr wrap="square" lIns="0" tIns="0" rIns="0" bIns="0" rtlCol="0" anchor="ctr"/>
-          <a:lstStyle/>
-          <a:p>
-            <a:pPr algn="r" indent="0" marL="0">
-              <a:buNone/>
-            </a:pPr>
-            <a:r>
-              <a:rPr lang="en-US" sz="900" dirty="0">
-                <a:solidFill>
-                  <a:srgbClr val="5D5D72"/>
-                </a:solidFill>
-                <a:latin typeface="Calibri" pitchFamily="34" charset="0"/>
-                <a:ea typeface="Calibri" pitchFamily="34" charset="-122"/>
-                <a:cs typeface="Calibri" pitchFamily="34" charset="-120"/>
-              </a:rPr>
-              <a:t>25</a:t>
-            </a:r>
-            <a:endParaRPr lang="en-US" sz="900" dirty="0"/>
+          <p:cNvPr id="8" name="cuinotes-footer-mark"/>
+          <p:cNvSpPr txBox="1"/>
+          <p:nvPr/>
+        </p:nvSpPr>
+        <p:spPr>
+          <a:xfrm>
+            <a:off x="9951720" y="6455664"/>
+            <a:ext cx="2011680" cy="292608"/>
+          </a:xfrm>
+          <a:prstGeom prst="rect">
+            <a:avLst/>
+          </a:prstGeom>
+          <a:noFill/>
+        </p:spPr>
+        <p:txBody>
+          <a:bodyPr wrap="none" lIns="0" rIns="0" tIns="0" bIns="0">
+            <a:spAutoFit/>
+          </a:bodyPr>
+          <a:lstStyle/>
+          <a:p>
+            <a:pPr algn="r"/>
+            <a:r>
+              <a:rPr sz="1000">
+                <a:solidFill>
+                  <a:srgbClr val="8A939B"/>
+                </a:solidFill>
+                <a:hlinkClick r:id="rId3"/>
+              </a:rPr>
+              <a:t>cuinotes.com</a:t>
+            </a:r>
+            <a:r>
+              <a:rPr sz="1000">
+                <a:solidFill>
+                  <a:srgbClr val="8A939B"/>
+                </a:solidFill>
+              </a:rPr>
+              <a:t>  ·  25</a:t>
+            </a:r>
           </a:p>
         </p:txBody>
       </p:sp>
@@ -11367,6 +10861,10 @@
           </a:solidFill>
           <a:ln/>
         </p:spPr>
+        <p:txBody>
+          <a:bodyPr/>
+          <a:p/>
+        </p:txBody>
       </p:sp>
       <p:sp>
         <p:nvSpPr>
@@ -11763,6 +11261,10 @@
             </a:outerShdw>
           </a:effectLst>
         </p:spPr>
+        <p:txBody>
+          <a:bodyPr/>
+          <a:p/>
+        </p:txBody>
       </p:sp>
       <p:pic>
         <p:nvPicPr>
@@ -11790,79 +11292,44 @@
       </p:pic>
       <p:sp>
         <p:nvSpPr>
-          <p:cNvPr id="8" name="Text 5"/>
-          <p:cNvSpPr txBox="1"/>
-          <p:nvPr/>
-        </p:nvSpPr>
-        <p:spPr>
-          <a:xfrm>
-            <a:off x="640080" y="6446520"/>
-            <a:ext cx="8686800" cy="292608"/>
-          </a:xfrm>
-          <a:prstGeom prst="rect">
-            <a:avLst/>
-          </a:prstGeom>
-          <a:noFill/>
-          <a:ln/>
-        </p:spPr>
-        <p:txBody>
-          <a:bodyPr wrap="square" lIns="0" tIns="0" rIns="0" bIns="0" rtlCol="0" anchor="ctr"/>
-          <a:lstStyle/>
-          <a:p>
-            <a:pPr algn="l" indent="0" marL="0">
-              <a:buNone/>
-            </a:pPr>
-            <a:r>
-              <a:rPr lang="en-US" sz="900" dirty="0">
-                <a:solidFill>
-                  <a:srgbClr val="5D5D72"/>
-                </a:solidFill>
-                <a:latin typeface="Calibri" pitchFamily="34" charset="0"/>
-                <a:ea typeface="Calibri" pitchFamily="34" charset="-122"/>
-                <a:cs typeface="Calibri" pitchFamily="34" charset="-120"/>
-              </a:rPr>
-              <a:t>Usman Akram  •  COMSATS University Islamabad</a:t>
-            </a:r>
-            <a:endParaRPr lang="en-US" sz="900" dirty="0"/>
-          </a:p>
-        </p:txBody>
-      </p:sp>
-      <p:sp>
-        <p:nvSpPr>
-          <p:cNvPr id="9" name="Text 6"/>
-          <p:cNvSpPr txBox="1"/>
-          <p:nvPr/>
-        </p:nvSpPr>
-        <p:spPr>
-          <a:xfrm>
-            <a:off x="11155680" y="6446520"/>
-            <a:ext cx="457200" cy="292608"/>
-          </a:xfrm>
-          <a:prstGeom prst="rect">
-            <a:avLst/>
-          </a:prstGeom>
-          <a:noFill/>
-          <a:ln/>
-        </p:spPr>
-        <p:txBody>
-          <a:bodyPr wrap="square" lIns="0" tIns="0" rIns="0" bIns="0" rtlCol="0" anchor="ctr"/>
-          <a:lstStyle/>
-          <a:p>
-            <a:pPr algn="r" indent="0" marL="0">
-              <a:buNone/>
-            </a:pPr>
-            <a:r>
-              <a:rPr lang="en-US" sz="900" dirty="0">
-                <a:solidFill>
-                  <a:srgbClr val="5D5D72"/>
-                </a:solidFill>
-                <a:latin typeface="Calibri" pitchFamily="34" charset="0"/>
-                <a:ea typeface="Calibri" pitchFamily="34" charset="-122"/>
-                <a:cs typeface="Calibri" pitchFamily="34" charset="-120"/>
-              </a:rPr>
-              <a:t>26</a:t>
-            </a:r>
-            <a:endParaRPr lang="en-US" sz="900" dirty="0"/>
+          <p:cNvPr id="10" name="cuinotes-footer-mark"/>
+          <p:cNvSpPr txBox="1"/>
+          <p:nvPr/>
+        </p:nvSpPr>
+        <p:spPr>
+          <a:xfrm>
+            <a:off x="9951720" y="6455664"/>
+            <a:ext cx="2011680" cy="292608"/>
+          </a:xfrm>
+          <a:prstGeom prst="rect">
+            <a:avLst/>
+          </a:prstGeom>
+          <a:noFill/>
+        </p:spPr>
+        <p:txBody>
+          <a:bodyPr wrap="none" lIns="0" rIns="0" tIns="0" bIns="0">
+            <a:spAutoFit/>
+          </a:bodyPr>
+          <a:lstStyle/>
+          <a:p>
+            <a:pPr algn="r"/>
+            <a:r>
+              <a:rPr sz="1000">
+                <a:solidFill>
+                  <a:srgbClr val="8A939B"/>
+                </a:solidFill>
+                <a:hlinkClick r:id="rId4"/>
+              </a:rPr>
+              <a:t>cuinotes.com</a:t>
+            </a:r>
+            <a:r>
+              <a:rPr sz="1000">
+                <a:solidFill>
+                  <a:srgbClr val="8A939B"/>
+                </a:solidFill>
+              </a:rPr>
+              <a:t>  ·  26</a:t>
+            </a:r>
           </a:p>
         </p:txBody>
       </p:sp>
@@ -11995,6 +11462,10 @@
           </a:solidFill>
           <a:ln/>
         </p:spPr>
+        <p:txBody>
+          <a:bodyPr/>
+          <a:p/>
+        </p:txBody>
       </p:sp>
       <p:sp>
         <p:nvSpPr>
@@ -12093,6 +11564,10 @@
           </a:solidFill>
           <a:ln/>
         </p:spPr>
+        <p:txBody>
+          <a:bodyPr/>
+          <a:p/>
+        </p:txBody>
       </p:sp>
       <p:sp>
         <p:nvSpPr>
@@ -12191,6 +11666,10 @@
           </a:solidFill>
           <a:ln/>
         </p:spPr>
+        <p:txBody>
+          <a:bodyPr/>
+          <a:p/>
+        </p:txBody>
       </p:sp>
       <p:sp>
         <p:nvSpPr>
@@ -12272,79 +11751,44 @@
       </p:sp>
       <p:sp>
         <p:nvSpPr>
-          <p:cNvPr id="13" name="Text 11"/>
-          <p:cNvSpPr txBox="1"/>
-          <p:nvPr/>
-        </p:nvSpPr>
-        <p:spPr>
-          <a:xfrm>
-            <a:off x="640080" y="6446520"/>
-            <a:ext cx="8686800" cy="292608"/>
-          </a:xfrm>
-          <a:prstGeom prst="rect">
-            <a:avLst/>
-          </a:prstGeom>
-          <a:noFill/>
-          <a:ln/>
-        </p:spPr>
-        <p:txBody>
-          <a:bodyPr wrap="square" lIns="0" tIns="0" rIns="0" bIns="0" rtlCol="0" anchor="ctr"/>
-          <a:lstStyle/>
-          <a:p>
-            <a:pPr algn="l" indent="0" marL="0">
-              <a:buNone/>
-            </a:pPr>
-            <a:r>
-              <a:rPr lang="en-US" sz="900" dirty="0">
-                <a:solidFill>
-                  <a:srgbClr val="5D5D72"/>
-                </a:solidFill>
-                <a:latin typeface="Calibri" pitchFamily="34" charset="0"/>
-                <a:ea typeface="Calibri" pitchFamily="34" charset="-122"/>
-                <a:cs typeface="Calibri" pitchFamily="34" charset="-120"/>
-              </a:rPr>
-              <a:t>Usman Akram  •  COMSATS University Islamabad</a:t>
-            </a:r>
-            <a:endParaRPr lang="en-US" sz="900" dirty="0"/>
-          </a:p>
-        </p:txBody>
-      </p:sp>
-      <p:sp>
-        <p:nvSpPr>
-          <p:cNvPr id="14" name="Text 12"/>
-          <p:cNvSpPr txBox="1"/>
-          <p:nvPr/>
-        </p:nvSpPr>
-        <p:spPr>
-          <a:xfrm>
-            <a:off x="11155680" y="6446520"/>
-            <a:ext cx="457200" cy="292608"/>
-          </a:xfrm>
-          <a:prstGeom prst="rect">
-            <a:avLst/>
-          </a:prstGeom>
-          <a:noFill/>
-          <a:ln/>
-        </p:spPr>
-        <p:txBody>
-          <a:bodyPr wrap="square" lIns="0" tIns="0" rIns="0" bIns="0" rtlCol="0" anchor="ctr"/>
-          <a:lstStyle/>
-          <a:p>
-            <a:pPr algn="r" indent="0" marL="0">
-              <a:buNone/>
-            </a:pPr>
-            <a:r>
-              <a:rPr lang="en-US" sz="900" dirty="0">
-                <a:solidFill>
-                  <a:srgbClr val="5D5D72"/>
-                </a:solidFill>
-                <a:latin typeface="Calibri" pitchFamily="34" charset="0"/>
-                <a:ea typeface="Calibri" pitchFamily="34" charset="-122"/>
-                <a:cs typeface="Calibri" pitchFamily="34" charset="-120"/>
-              </a:rPr>
-              <a:t>27</a:t>
-            </a:r>
-            <a:endParaRPr lang="en-US" sz="900" dirty="0"/>
+          <p:cNvPr id="15" name="cuinotes-footer-mark"/>
+          <p:cNvSpPr txBox="1"/>
+          <p:nvPr/>
+        </p:nvSpPr>
+        <p:spPr>
+          <a:xfrm>
+            <a:off x="9951720" y="6455664"/>
+            <a:ext cx="2011680" cy="292608"/>
+          </a:xfrm>
+          <a:prstGeom prst="rect">
+            <a:avLst/>
+          </a:prstGeom>
+          <a:noFill/>
+        </p:spPr>
+        <p:txBody>
+          <a:bodyPr wrap="none" lIns="0" rIns="0" tIns="0" bIns="0">
+            <a:spAutoFit/>
+          </a:bodyPr>
+          <a:lstStyle/>
+          <a:p>
+            <a:pPr algn="r"/>
+            <a:r>
+              <a:rPr sz="1000">
+                <a:solidFill>
+                  <a:srgbClr val="8A939B"/>
+                </a:solidFill>
+                <a:hlinkClick r:id="rId3"/>
+              </a:rPr>
+              <a:t>cuinotes.com</a:t>
+            </a:r>
+            <a:r>
+              <a:rPr sz="1000">
+                <a:solidFill>
+                  <a:srgbClr val="8A939B"/>
+                </a:solidFill>
+              </a:rPr>
+              <a:t>  ·  27</a:t>
+            </a:r>
           </a:p>
         </p:txBody>
       </p:sp>
@@ -12479,6 +11923,10 @@
           </a:solidFill>
           <a:ln/>
         </p:spPr>
+        <p:txBody>
+          <a:bodyPr/>
+          <a:p/>
+        </p:txBody>
       </p:sp>
       <p:sp>
         <p:nvSpPr>
@@ -12559,6 +12007,10 @@
             <a:tailEnd type="triangle"/>
           </a:ln>
         </p:spPr>
+        <p:txBody>
+          <a:bodyPr/>
+          <a:p/>
+        </p:txBody>
       </p:sp>
       <p:sp>
         <p:nvSpPr>
@@ -12581,6 +12033,10 @@
           </a:solidFill>
           <a:ln/>
         </p:spPr>
+        <p:txBody>
+          <a:bodyPr/>
+          <a:p/>
+        </p:txBody>
       </p:sp>
       <p:sp>
         <p:nvSpPr>
@@ -12661,6 +12117,10 @@
             <a:tailEnd type="triangle"/>
           </a:ln>
         </p:spPr>
+        <p:txBody>
+          <a:bodyPr/>
+          <a:p/>
+        </p:txBody>
       </p:sp>
       <p:sp>
         <p:nvSpPr>
@@ -12683,6 +12143,10 @@
           </a:solidFill>
           <a:ln/>
         </p:spPr>
+        <p:txBody>
+          <a:bodyPr/>
+          <a:p/>
+        </p:txBody>
       </p:sp>
       <p:sp>
         <p:nvSpPr>
@@ -12763,6 +12227,10 @@
             <a:tailEnd type="triangle"/>
           </a:ln>
         </p:spPr>
+        <p:txBody>
+          <a:bodyPr/>
+          <a:p/>
+        </p:txBody>
       </p:sp>
       <p:sp>
         <p:nvSpPr>
@@ -12785,6 +12253,10 @@
           </a:solidFill>
           <a:ln/>
         </p:spPr>
+        <p:txBody>
+          <a:bodyPr/>
+          <a:p/>
+        </p:txBody>
       </p:sp>
       <p:sp>
         <p:nvSpPr>
@@ -12865,6 +12337,10 @@
             <a:tailEnd type="triangle"/>
           </a:ln>
         </p:spPr>
+        <p:txBody>
+          <a:bodyPr/>
+          <a:p/>
+        </p:txBody>
       </p:sp>
       <p:sp>
         <p:nvSpPr>
@@ -12887,6 +12363,10 @@
           </a:solidFill>
           <a:ln/>
         </p:spPr>
+        <p:txBody>
+          <a:bodyPr/>
+          <a:p/>
+        </p:txBody>
       </p:sp>
       <p:sp>
         <p:nvSpPr>
@@ -12985,79 +12465,44 @@
       </p:sp>
       <p:sp>
         <p:nvSpPr>
-          <p:cNvPr id="19" name="Text 17"/>
-          <p:cNvSpPr txBox="1"/>
-          <p:nvPr/>
-        </p:nvSpPr>
-        <p:spPr>
-          <a:xfrm>
-            <a:off x="640080" y="6446520"/>
-            <a:ext cx="8686800" cy="292608"/>
-          </a:xfrm>
-          <a:prstGeom prst="rect">
-            <a:avLst/>
-          </a:prstGeom>
-          <a:noFill/>
-          <a:ln/>
-        </p:spPr>
-        <p:txBody>
-          <a:bodyPr wrap="square" lIns="0" tIns="0" rIns="0" bIns="0" rtlCol="0" anchor="ctr"/>
-          <a:lstStyle/>
-          <a:p>
-            <a:pPr algn="l" indent="0" marL="0">
-              <a:buNone/>
-            </a:pPr>
-            <a:r>
-              <a:rPr lang="en-US" sz="900" dirty="0">
-                <a:solidFill>
-                  <a:srgbClr val="5D5D72"/>
-                </a:solidFill>
-                <a:latin typeface="Calibri" pitchFamily="34" charset="0"/>
-                <a:ea typeface="Calibri" pitchFamily="34" charset="-122"/>
-                <a:cs typeface="Calibri" pitchFamily="34" charset="-120"/>
-              </a:rPr>
-              <a:t>Usman Akram  •  COMSATS University Islamabad</a:t>
-            </a:r>
-            <a:endParaRPr lang="en-US" sz="900" dirty="0"/>
-          </a:p>
-        </p:txBody>
-      </p:sp>
-      <p:sp>
-        <p:nvSpPr>
-          <p:cNvPr id="20" name="Text 18"/>
-          <p:cNvSpPr txBox="1"/>
-          <p:nvPr/>
-        </p:nvSpPr>
-        <p:spPr>
-          <a:xfrm>
-            <a:off x="11155680" y="6446520"/>
-            <a:ext cx="457200" cy="292608"/>
-          </a:xfrm>
-          <a:prstGeom prst="rect">
-            <a:avLst/>
-          </a:prstGeom>
-          <a:noFill/>
-          <a:ln/>
-        </p:spPr>
-        <p:txBody>
-          <a:bodyPr wrap="square" lIns="0" tIns="0" rIns="0" bIns="0" rtlCol="0" anchor="ctr"/>
-          <a:lstStyle/>
-          <a:p>
-            <a:pPr algn="r" indent="0" marL="0">
-              <a:buNone/>
-            </a:pPr>
-            <a:r>
-              <a:rPr lang="en-US" sz="900" dirty="0">
-                <a:solidFill>
-                  <a:srgbClr val="5D5D72"/>
-                </a:solidFill>
-                <a:latin typeface="Calibri" pitchFamily="34" charset="0"/>
-                <a:ea typeface="Calibri" pitchFamily="34" charset="-122"/>
-                <a:cs typeface="Calibri" pitchFamily="34" charset="-120"/>
-              </a:rPr>
-              <a:t>28</a:t>
-            </a:r>
-            <a:endParaRPr lang="en-US" sz="900" dirty="0"/>
+          <p:cNvPr id="21" name="cuinotes-footer-mark"/>
+          <p:cNvSpPr txBox="1"/>
+          <p:nvPr/>
+        </p:nvSpPr>
+        <p:spPr>
+          <a:xfrm>
+            <a:off x="9951720" y="6455664"/>
+            <a:ext cx="2011680" cy="292608"/>
+          </a:xfrm>
+          <a:prstGeom prst="rect">
+            <a:avLst/>
+          </a:prstGeom>
+          <a:noFill/>
+        </p:spPr>
+        <p:txBody>
+          <a:bodyPr wrap="none" lIns="0" rIns="0" tIns="0" bIns="0">
+            <a:spAutoFit/>
+          </a:bodyPr>
+          <a:lstStyle/>
+          <a:p>
+            <a:pPr algn="r"/>
+            <a:r>
+              <a:rPr sz="1000">
+                <a:solidFill>
+                  <a:srgbClr val="8A939B"/>
+                </a:solidFill>
+                <a:hlinkClick r:id="rId3"/>
+              </a:rPr>
+              <a:t>cuinotes.com</a:t>
+            </a:r>
+            <a:r>
+              <a:rPr sz="1000">
+                <a:solidFill>
+                  <a:srgbClr val="8A939B"/>
+                </a:solidFill>
+              </a:rPr>
+              <a:t>  ·  28</a:t>
+            </a:r>
           </a:p>
         </p:txBody>
       </p:sp>
@@ -13197,6 +12642,10 @@
             <a:prstDash val="solid"/>
           </a:ln>
         </p:spPr>
+        <p:txBody>
+          <a:bodyPr/>
+          <a:p/>
+        </p:txBody>
       </p:sp>
       <p:sp>
         <p:nvSpPr>
@@ -13278,79 +12727,44 @@
       </p:sp>
       <p:sp>
         <p:nvSpPr>
-          <p:cNvPr id="7" name="Text 5"/>
-          <p:cNvSpPr txBox="1"/>
-          <p:nvPr/>
-        </p:nvSpPr>
-        <p:spPr>
-          <a:xfrm>
-            <a:off x="640080" y="6446520"/>
-            <a:ext cx="8686800" cy="292608"/>
-          </a:xfrm>
-          <a:prstGeom prst="rect">
-            <a:avLst/>
-          </a:prstGeom>
-          <a:noFill/>
-          <a:ln/>
-        </p:spPr>
-        <p:txBody>
-          <a:bodyPr wrap="square" lIns="0" tIns="0" rIns="0" bIns="0" rtlCol="0" anchor="ctr"/>
-          <a:lstStyle/>
-          <a:p>
-            <a:pPr algn="l" indent="0" marL="0">
-              <a:buNone/>
-            </a:pPr>
-            <a:r>
-              <a:rPr lang="en-US" sz="900" dirty="0">
-                <a:solidFill>
-                  <a:srgbClr val="5D5D72"/>
-                </a:solidFill>
-                <a:latin typeface="Calibri" pitchFamily="34" charset="0"/>
-                <a:ea typeface="Calibri" pitchFamily="34" charset="-122"/>
-                <a:cs typeface="Calibri" pitchFamily="34" charset="-120"/>
-              </a:rPr>
-              <a:t>Usman Akram  •  COMSATS University Islamabad</a:t>
-            </a:r>
-            <a:endParaRPr lang="en-US" sz="900" dirty="0"/>
-          </a:p>
-        </p:txBody>
-      </p:sp>
-      <p:sp>
-        <p:nvSpPr>
-          <p:cNvPr id="8" name="Text 6"/>
-          <p:cNvSpPr txBox="1"/>
-          <p:nvPr/>
-        </p:nvSpPr>
-        <p:spPr>
-          <a:xfrm>
-            <a:off x="11155680" y="6446520"/>
-            <a:ext cx="457200" cy="292608"/>
-          </a:xfrm>
-          <a:prstGeom prst="rect">
-            <a:avLst/>
-          </a:prstGeom>
-          <a:noFill/>
-          <a:ln/>
-        </p:spPr>
-        <p:txBody>
-          <a:bodyPr wrap="square" lIns="0" tIns="0" rIns="0" bIns="0" rtlCol="0" anchor="ctr"/>
-          <a:lstStyle/>
-          <a:p>
-            <a:pPr algn="r" indent="0" marL="0">
-              <a:buNone/>
-            </a:pPr>
-            <a:r>
-              <a:rPr lang="en-US" sz="900" dirty="0">
-                <a:solidFill>
-                  <a:srgbClr val="5D5D72"/>
-                </a:solidFill>
-                <a:latin typeface="Calibri" pitchFamily="34" charset="0"/>
-                <a:ea typeface="Calibri" pitchFamily="34" charset="-122"/>
-                <a:cs typeface="Calibri" pitchFamily="34" charset="-120"/>
-              </a:rPr>
-              <a:t>29</a:t>
-            </a:r>
-            <a:endParaRPr lang="en-US" sz="900" dirty="0"/>
+          <p:cNvPr id="9" name="cuinotes-footer-mark"/>
+          <p:cNvSpPr txBox="1"/>
+          <p:nvPr/>
+        </p:nvSpPr>
+        <p:spPr>
+          <a:xfrm>
+            <a:off x="9951720" y="6455664"/>
+            <a:ext cx="2011680" cy="292608"/>
+          </a:xfrm>
+          <a:prstGeom prst="rect">
+            <a:avLst/>
+          </a:prstGeom>
+          <a:noFill/>
+        </p:spPr>
+        <p:txBody>
+          <a:bodyPr wrap="none" lIns="0" rIns="0" tIns="0" bIns="0">
+            <a:spAutoFit/>
+          </a:bodyPr>
+          <a:lstStyle/>
+          <a:p>
+            <a:pPr algn="r"/>
+            <a:r>
+              <a:rPr sz="1000">
+                <a:solidFill>
+                  <a:srgbClr val="8A939B"/>
+                </a:solidFill>
+                <a:hlinkClick r:id="rId3"/>
+              </a:rPr>
+              <a:t>cuinotes.com</a:t>
+            </a:r>
+            <a:r>
+              <a:rPr sz="1000">
+                <a:solidFill>
+                  <a:srgbClr val="8A939B"/>
+                </a:solidFill>
+              </a:rPr>
+              <a:t>  ·  29</a:t>
+            </a:r>
           </a:p>
         </p:txBody>
       </p:sp>
@@ -13483,6 +12897,10 @@
           </a:solidFill>
           <a:ln/>
         </p:spPr>
+        <p:txBody>
+          <a:bodyPr/>
+          <a:p/>
+        </p:txBody>
       </p:sp>
       <p:sp>
         <p:nvSpPr>
@@ -13581,6 +12999,10 @@
           </a:solidFill>
           <a:ln/>
         </p:spPr>
+        <p:txBody>
+          <a:bodyPr/>
+          <a:p/>
+        </p:txBody>
       </p:sp>
       <p:sp>
         <p:nvSpPr>
@@ -13679,6 +13101,10 @@
           </a:solidFill>
           <a:ln/>
         </p:spPr>
+        <p:txBody>
+          <a:bodyPr/>
+          <a:p/>
+        </p:txBody>
       </p:sp>
       <p:sp>
         <p:nvSpPr>
@@ -13760,79 +13186,44 @@
       </p:sp>
       <p:sp>
         <p:nvSpPr>
-          <p:cNvPr id="13" name="Text 11"/>
-          <p:cNvSpPr txBox="1"/>
-          <p:nvPr/>
-        </p:nvSpPr>
-        <p:spPr>
-          <a:xfrm>
-            <a:off x="640080" y="6446520"/>
-            <a:ext cx="8686800" cy="292608"/>
-          </a:xfrm>
-          <a:prstGeom prst="rect">
-            <a:avLst/>
-          </a:prstGeom>
-          <a:noFill/>
-          <a:ln/>
-        </p:spPr>
-        <p:txBody>
-          <a:bodyPr wrap="square" lIns="0" tIns="0" rIns="0" bIns="0" rtlCol="0" anchor="ctr"/>
-          <a:lstStyle/>
-          <a:p>
-            <a:pPr algn="l" indent="0" marL="0">
-              <a:buNone/>
-            </a:pPr>
-            <a:r>
-              <a:rPr lang="en-US" sz="900" dirty="0">
-                <a:solidFill>
-                  <a:srgbClr val="5D5D72"/>
-                </a:solidFill>
-                <a:latin typeface="Calibri" pitchFamily="34" charset="0"/>
-                <a:ea typeface="Calibri" pitchFamily="34" charset="-122"/>
-                <a:cs typeface="Calibri" pitchFamily="34" charset="-120"/>
-              </a:rPr>
-              <a:t>Usman Akram  •  COMSATS University Islamabad</a:t>
-            </a:r>
-            <a:endParaRPr lang="en-US" sz="900" dirty="0"/>
-          </a:p>
-        </p:txBody>
-      </p:sp>
-      <p:sp>
-        <p:nvSpPr>
-          <p:cNvPr id="14" name="Text 12"/>
-          <p:cNvSpPr txBox="1"/>
-          <p:nvPr/>
-        </p:nvSpPr>
-        <p:spPr>
-          <a:xfrm>
-            <a:off x="11155680" y="6446520"/>
-            <a:ext cx="457200" cy="292608"/>
-          </a:xfrm>
-          <a:prstGeom prst="rect">
-            <a:avLst/>
-          </a:prstGeom>
-          <a:noFill/>
-          <a:ln/>
-        </p:spPr>
-        <p:txBody>
-          <a:bodyPr wrap="square" lIns="0" tIns="0" rIns="0" bIns="0" rtlCol="0" anchor="ctr"/>
-          <a:lstStyle/>
-          <a:p>
-            <a:pPr algn="r" indent="0" marL="0">
-              <a:buNone/>
-            </a:pPr>
-            <a:r>
-              <a:rPr lang="en-US" sz="900" dirty="0">
-                <a:solidFill>
-                  <a:srgbClr val="5D5D72"/>
-                </a:solidFill>
-                <a:latin typeface="Calibri" pitchFamily="34" charset="0"/>
-                <a:ea typeface="Calibri" pitchFamily="34" charset="-122"/>
-                <a:cs typeface="Calibri" pitchFamily="34" charset="-120"/>
-              </a:rPr>
-              <a:t>3</a:t>
-            </a:r>
-            <a:endParaRPr lang="en-US" sz="900" dirty="0"/>
+          <p:cNvPr id="15" name="cuinotes-footer-mark"/>
+          <p:cNvSpPr txBox="1"/>
+          <p:nvPr/>
+        </p:nvSpPr>
+        <p:spPr>
+          <a:xfrm>
+            <a:off x="9951720" y="6455664"/>
+            <a:ext cx="2011680" cy="292608"/>
+          </a:xfrm>
+          <a:prstGeom prst="rect">
+            <a:avLst/>
+          </a:prstGeom>
+          <a:noFill/>
+        </p:spPr>
+        <p:txBody>
+          <a:bodyPr wrap="none" lIns="0" rIns="0" tIns="0" bIns="0">
+            <a:spAutoFit/>
+          </a:bodyPr>
+          <a:lstStyle/>
+          <a:p>
+            <a:pPr algn="r"/>
+            <a:r>
+              <a:rPr sz="1000">
+                <a:solidFill>
+                  <a:srgbClr val="8A939B"/>
+                </a:solidFill>
+                <a:hlinkClick r:id="rId3"/>
+              </a:rPr>
+              <a:t>cuinotes.com</a:t>
+            </a:r>
+            <a:r>
+              <a:rPr sz="1000">
+                <a:solidFill>
+                  <a:srgbClr val="8A939B"/>
+                </a:solidFill>
+              </a:rPr>
+              <a:t>  ·  3</a:t>
+            </a:r>
           </a:p>
         </p:txBody>
       </p:sp>
@@ -13967,6 +13358,10 @@
           </a:solidFill>
           <a:ln/>
         </p:spPr>
+        <p:txBody>
+          <a:bodyPr/>
+          <a:p/>
+        </p:txBody>
       </p:sp>
       <p:sp>
         <p:nvSpPr>
@@ -14363,6 +13758,10 @@
             </a:outerShdw>
           </a:effectLst>
         </p:spPr>
+        <p:txBody>
+          <a:bodyPr/>
+          <a:p/>
+        </p:txBody>
       </p:sp>
       <p:pic>
         <p:nvPicPr>
@@ -14390,79 +13789,44 @@
       </p:pic>
       <p:sp>
         <p:nvSpPr>
-          <p:cNvPr id="8" name="Text 5"/>
-          <p:cNvSpPr txBox="1"/>
-          <p:nvPr/>
-        </p:nvSpPr>
-        <p:spPr>
-          <a:xfrm>
-            <a:off x="640080" y="6446520"/>
-            <a:ext cx="8686800" cy="292608"/>
-          </a:xfrm>
-          <a:prstGeom prst="rect">
-            <a:avLst/>
-          </a:prstGeom>
-          <a:noFill/>
-          <a:ln/>
-        </p:spPr>
-        <p:txBody>
-          <a:bodyPr wrap="square" lIns="0" tIns="0" rIns="0" bIns="0" rtlCol="0" anchor="ctr"/>
-          <a:lstStyle/>
-          <a:p>
-            <a:pPr algn="l" indent="0" marL="0">
-              <a:buNone/>
-            </a:pPr>
-            <a:r>
-              <a:rPr lang="en-US" sz="900" dirty="0">
-                <a:solidFill>
-                  <a:srgbClr val="5D5D72"/>
-                </a:solidFill>
-                <a:latin typeface="Calibri" pitchFamily="34" charset="0"/>
-                <a:ea typeface="Calibri" pitchFamily="34" charset="-122"/>
-                <a:cs typeface="Calibri" pitchFamily="34" charset="-120"/>
-              </a:rPr>
-              <a:t>Usman Akram  •  COMSATS University Islamabad</a:t>
-            </a:r>
-            <a:endParaRPr lang="en-US" sz="900" dirty="0"/>
-          </a:p>
-        </p:txBody>
-      </p:sp>
-      <p:sp>
-        <p:nvSpPr>
-          <p:cNvPr id="9" name="Text 6"/>
-          <p:cNvSpPr txBox="1"/>
-          <p:nvPr/>
-        </p:nvSpPr>
-        <p:spPr>
-          <a:xfrm>
-            <a:off x="11155680" y="6446520"/>
-            <a:ext cx="457200" cy="292608"/>
-          </a:xfrm>
-          <a:prstGeom prst="rect">
-            <a:avLst/>
-          </a:prstGeom>
-          <a:noFill/>
-          <a:ln/>
-        </p:spPr>
-        <p:txBody>
-          <a:bodyPr wrap="square" lIns="0" tIns="0" rIns="0" bIns="0" rtlCol="0" anchor="ctr"/>
-          <a:lstStyle/>
-          <a:p>
-            <a:pPr algn="r" indent="0" marL="0">
-              <a:buNone/>
-            </a:pPr>
-            <a:r>
-              <a:rPr lang="en-US" sz="900" dirty="0">
-                <a:solidFill>
-                  <a:srgbClr val="5D5D72"/>
-                </a:solidFill>
-                <a:latin typeface="Calibri" pitchFamily="34" charset="0"/>
-                <a:ea typeface="Calibri" pitchFamily="34" charset="-122"/>
-                <a:cs typeface="Calibri" pitchFamily="34" charset="-120"/>
-              </a:rPr>
-              <a:t>30</a:t>
-            </a:r>
-            <a:endParaRPr lang="en-US" sz="900" dirty="0"/>
+          <p:cNvPr id="10" name="cuinotes-footer-mark"/>
+          <p:cNvSpPr txBox="1"/>
+          <p:nvPr/>
+        </p:nvSpPr>
+        <p:spPr>
+          <a:xfrm>
+            <a:off x="9951720" y="6455664"/>
+            <a:ext cx="2011680" cy="292608"/>
+          </a:xfrm>
+          <a:prstGeom prst="rect">
+            <a:avLst/>
+          </a:prstGeom>
+          <a:noFill/>
+        </p:spPr>
+        <p:txBody>
+          <a:bodyPr wrap="none" lIns="0" rIns="0" tIns="0" bIns="0">
+            <a:spAutoFit/>
+          </a:bodyPr>
+          <a:lstStyle/>
+          <a:p>
+            <a:pPr algn="r"/>
+            <a:r>
+              <a:rPr sz="1000">
+                <a:solidFill>
+                  <a:srgbClr val="8A939B"/>
+                </a:solidFill>
+                <a:hlinkClick r:id="rId4"/>
+              </a:rPr>
+              <a:t>cuinotes.com</a:t>
+            </a:r>
+            <a:r>
+              <a:rPr sz="1000">
+                <a:solidFill>
+                  <a:srgbClr val="8A939B"/>
+                </a:solidFill>
+              </a:rPr>
+              <a:t>  ·  30</a:t>
+            </a:r>
           </a:p>
         </p:txBody>
       </p:sp>
@@ -14595,6 +13959,10 @@
           </a:solidFill>
           <a:ln/>
         </p:spPr>
+        <p:txBody>
+          <a:bodyPr/>
+          <a:p/>
+        </p:txBody>
       </p:sp>
       <p:sp>
         <p:nvSpPr>
@@ -14693,6 +14061,10 @@
           </a:solidFill>
           <a:ln/>
         </p:spPr>
+        <p:txBody>
+          <a:bodyPr/>
+          <a:p/>
+        </p:txBody>
       </p:sp>
       <p:sp>
         <p:nvSpPr>
@@ -14791,6 +14163,10 @@
           </a:solidFill>
           <a:ln/>
         </p:spPr>
+        <p:txBody>
+          <a:bodyPr/>
+          <a:p/>
+        </p:txBody>
       </p:sp>
       <p:sp>
         <p:nvSpPr>
@@ -14889,6 +14265,10 @@
           </a:solidFill>
           <a:ln/>
         </p:spPr>
+        <p:txBody>
+          <a:bodyPr/>
+          <a:p/>
+        </p:txBody>
       </p:sp>
       <p:sp>
         <p:nvSpPr>
@@ -14987,6 +14367,10 @@
           </a:solidFill>
           <a:ln/>
         </p:spPr>
+        <p:txBody>
+          <a:bodyPr/>
+          <a:p/>
+        </p:txBody>
       </p:sp>
       <p:sp>
         <p:nvSpPr>
@@ -15085,6 +14469,10 @@
           </a:solidFill>
           <a:ln/>
         </p:spPr>
+        <p:txBody>
+          <a:bodyPr/>
+          <a:p/>
+        </p:txBody>
       </p:sp>
       <p:sp>
         <p:nvSpPr>
@@ -15166,79 +14554,44 @@
       </p:sp>
       <p:sp>
         <p:nvSpPr>
-          <p:cNvPr id="22" name="Text 20"/>
-          <p:cNvSpPr txBox="1"/>
-          <p:nvPr/>
-        </p:nvSpPr>
-        <p:spPr>
-          <a:xfrm>
-            <a:off x="640080" y="6446520"/>
-            <a:ext cx="8686800" cy="292608"/>
-          </a:xfrm>
-          <a:prstGeom prst="rect">
-            <a:avLst/>
-          </a:prstGeom>
-          <a:noFill/>
-          <a:ln/>
-        </p:spPr>
-        <p:txBody>
-          <a:bodyPr wrap="square" lIns="0" tIns="0" rIns="0" bIns="0" rtlCol="0" anchor="ctr"/>
-          <a:lstStyle/>
-          <a:p>
-            <a:pPr algn="l" indent="0" marL="0">
-              <a:buNone/>
-            </a:pPr>
-            <a:r>
-              <a:rPr lang="en-US" sz="900" dirty="0">
-                <a:solidFill>
-                  <a:srgbClr val="9AA3D8"/>
-                </a:solidFill>
-                <a:latin typeface="Calibri" pitchFamily="34" charset="0"/>
-                <a:ea typeface="Calibri" pitchFamily="34" charset="-122"/>
-                <a:cs typeface="Calibri" pitchFamily="34" charset="-120"/>
-              </a:rPr>
-              <a:t>Usman Akram  •  COMSATS University Islamabad</a:t>
-            </a:r>
-            <a:endParaRPr lang="en-US" sz="900" dirty="0"/>
-          </a:p>
-        </p:txBody>
-      </p:sp>
-      <p:sp>
-        <p:nvSpPr>
-          <p:cNvPr id="23" name="Text 21"/>
-          <p:cNvSpPr txBox="1"/>
-          <p:nvPr/>
-        </p:nvSpPr>
-        <p:spPr>
-          <a:xfrm>
-            <a:off x="11155680" y="6446520"/>
-            <a:ext cx="457200" cy="292608"/>
-          </a:xfrm>
-          <a:prstGeom prst="rect">
-            <a:avLst/>
-          </a:prstGeom>
-          <a:noFill/>
-          <a:ln/>
-        </p:spPr>
-        <p:txBody>
-          <a:bodyPr wrap="square" lIns="0" tIns="0" rIns="0" bIns="0" rtlCol="0" anchor="ctr"/>
-          <a:lstStyle/>
-          <a:p>
-            <a:pPr algn="r" indent="0" marL="0">
-              <a:buNone/>
-            </a:pPr>
-            <a:r>
-              <a:rPr lang="en-US" sz="900" dirty="0">
-                <a:solidFill>
-                  <a:srgbClr val="9AA3D8"/>
-                </a:solidFill>
-                <a:latin typeface="Calibri" pitchFamily="34" charset="0"/>
-                <a:ea typeface="Calibri" pitchFamily="34" charset="-122"/>
-                <a:cs typeface="Calibri" pitchFamily="34" charset="-120"/>
-              </a:rPr>
-              <a:t>31</a:t>
-            </a:r>
-            <a:endParaRPr lang="en-US" sz="900" dirty="0"/>
+          <p:cNvPr id="24" name="cuinotes-footer-mark"/>
+          <p:cNvSpPr txBox="1"/>
+          <p:nvPr/>
+        </p:nvSpPr>
+        <p:spPr>
+          <a:xfrm>
+            <a:off x="9951720" y="6455664"/>
+            <a:ext cx="2011680" cy="292608"/>
+          </a:xfrm>
+          <a:prstGeom prst="rect">
+            <a:avLst/>
+          </a:prstGeom>
+          <a:noFill/>
+        </p:spPr>
+        <p:txBody>
+          <a:bodyPr wrap="none" lIns="0" rIns="0" tIns="0" bIns="0">
+            <a:spAutoFit/>
+          </a:bodyPr>
+          <a:lstStyle/>
+          <a:p>
+            <a:pPr algn="r"/>
+            <a:r>
+              <a:rPr sz="1000">
+                <a:solidFill>
+                  <a:srgbClr val="8A939B"/>
+                </a:solidFill>
+                <a:hlinkClick r:id="rId3"/>
+              </a:rPr>
+              <a:t>cuinotes.com</a:t>
+            </a:r>
+            <a:r>
+              <a:rPr sz="1000">
+                <a:solidFill>
+                  <a:srgbClr val="8A939B"/>
+                </a:solidFill>
+              </a:rPr>
+              <a:t>  ·  31</a:t>
+            </a:r>
           </a:p>
         </p:txBody>
       </p:sp>
@@ -15373,6 +14726,10 @@
           </a:solidFill>
           <a:ln/>
         </p:spPr>
+        <p:txBody>
+          <a:bodyPr/>
+          <a:p/>
+        </p:txBody>
       </p:sp>
       <p:sp>
         <p:nvSpPr>
@@ -15627,79 +14984,44 @@
       </p:sp>
       <p:sp>
         <p:nvSpPr>
-          <p:cNvPr id="6" name="Text 4"/>
-          <p:cNvSpPr txBox="1"/>
-          <p:nvPr/>
-        </p:nvSpPr>
-        <p:spPr>
-          <a:xfrm>
-            <a:off x="640080" y="6446520"/>
-            <a:ext cx="8686800" cy="292608"/>
-          </a:xfrm>
-          <a:prstGeom prst="rect">
-            <a:avLst/>
-          </a:prstGeom>
-          <a:noFill/>
-          <a:ln/>
-        </p:spPr>
-        <p:txBody>
-          <a:bodyPr wrap="square" lIns="0" tIns="0" rIns="0" bIns="0" rtlCol="0" anchor="ctr"/>
-          <a:lstStyle/>
-          <a:p>
-            <a:pPr algn="l" indent="0" marL="0">
-              <a:buNone/>
-            </a:pPr>
-            <a:r>
-              <a:rPr lang="en-US" sz="900" dirty="0">
-                <a:solidFill>
-                  <a:srgbClr val="5D5D72"/>
-                </a:solidFill>
-                <a:latin typeface="Calibri" pitchFamily="34" charset="0"/>
-                <a:ea typeface="Calibri" pitchFamily="34" charset="-122"/>
-                <a:cs typeface="Calibri" pitchFamily="34" charset="-120"/>
-              </a:rPr>
-              <a:t>Usman Akram  •  COMSATS University Islamabad</a:t>
-            </a:r>
-            <a:endParaRPr lang="en-US" sz="900" dirty="0"/>
-          </a:p>
-        </p:txBody>
-      </p:sp>
-      <p:sp>
-        <p:nvSpPr>
-          <p:cNvPr id="7" name="Text 5"/>
-          <p:cNvSpPr txBox="1"/>
-          <p:nvPr/>
-        </p:nvSpPr>
-        <p:spPr>
-          <a:xfrm>
-            <a:off x="11155680" y="6446520"/>
-            <a:ext cx="457200" cy="292608"/>
-          </a:xfrm>
-          <a:prstGeom prst="rect">
-            <a:avLst/>
-          </a:prstGeom>
-          <a:noFill/>
-          <a:ln/>
-        </p:spPr>
-        <p:txBody>
-          <a:bodyPr wrap="square" lIns="0" tIns="0" rIns="0" bIns="0" rtlCol="0" anchor="ctr"/>
-          <a:lstStyle/>
-          <a:p>
-            <a:pPr algn="r" indent="0" marL="0">
-              <a:buNone/>
-            </a:pPr>
-            <a:r>
-              <a:rPr lang="en-US" sz="900" dirty="0">
-                <a:solidFill>
-                  <a:srgbClr val="5D5D72"/>
-                </a:solidFill>
-                <a:latin typeface="Calibri" pitchFamily="34" charset="0"/>
-                <a:ea typeface="Calibri" pitchFamily="34" charset="-122"/>
-                <a:cs typeface="Calibri" pitchFamily="34" charset="-120"/>
-              </a:rPr>
-              <a:t>4</a:t>
-            </a:r>
-            <a:endParaRPr lang="en-US" sz="900" dirty="0"/>
+          <p:cNvPr id="8" name="cuinotes-footer-mark"/>
+          <p:cNvSpPr txBox="1"/>
+          <p:nvPr/>
+        </p:nvSpPr>
+        <p:spPr>
+          <a:xfrm>
+            <a:off x="9951720" y="6455664"/>
+            <a:ext cx="2011680" cy="292608"/>
+          </a:xfrm>
+          <a:prstGeom prst="rect">
+            <a:avLst/>
+          </a:prstGeom>
+          <a:noFill/>
+        </p:spPr>
+        <p:txBody>
+          <a:bodyPr wrap="none" lIns="0" rIns="0" tIns="0" bIns="0">
+            <a:spAutoFit/>
+          </a:bodyPr>
+          <a:lstStyle/>
+          <a:p>
+            <a:pPr algn="r"/>
+            <a:r>
+              <a:rPr sz="1000">
+                <a:solidFill>
+                  <a:srgbClr val="8A939B"/>
+                </a:solidFill>
+                <a:hlinkClick r:id="rId3"/>
+              </a:rPr>
+              <a:t>cuinotes.com</a:t>
+            </a:r>
+            <a:r>
+              <a:rPr sz="1000">
+                <a:solidFill>
+                  <a:srgbClr val="8A939B"/>
+                </a:solidFill>
+              </a:rPr>
+              <a:t>  ·  4</a:t>
+            </a:r>
           </a:p>
         </p:txBody>
       </p:sp>
@@ -15832,6 +15154,10 @@
           </a:solidFill>
           <a:ln/>
         </p:spPr>
+        <p:txBody>
+          <a:bodyPr/>
+          <a:p/>
+        </p:txBody>
       </p:sp>
       <p:sp>
         <p:nvSpPr>
@@ -15930,6 +15256,10 @@
           </a:solidFill>
           <a:ln/>
         </p:spPr>
+        <p:txBody>
+          <a:bodyPr/>
+          <a:p/>
+        </p:txBody>
       </p:sp>
       <p:sp>
         <p:nvSpPr>
@@ -16028,6 +15358,10 @@
           </a:solidFill>
           <a:ln/>
         </p:spPr>
+        <p:txBody>
+          <a:bodyPr/>
+          <a:p/>
+        </p:txBody>
       </p:sp>
       <p:sp>
         <p:nvSpPr>
@@ -16109,79 +15443,44 @@
       </p:sp>
       <p:sp>
         <p:nvSpPr>
-          <p:cNvPr id="13" name="Text 11"/>
-          <p:cNvSpPr txBox="1"/>
-          <p:nvPr/>
-        </p:nvSpPr>
-        <p:spPr>
-          <a:xfrm>
-            <a:off x="640080" y="6446520"/>
-            <a:ext cx="8686800" cy="292608"/>
-          </a:xfrm>
-          <a:prstGeom prst="rect">
-            <a:avLst/>
-          </a:prstGeom>
-          <a:noFill/>
-          <a:ln/>
-        </p:spPr>
-        <p:txBody>
-          <a:bodyPr wrap="square" lIns="0" tIns="0" rIns="0" bIns="0" rtlCol="0" anchor="ctr"/>
-          <a:lstStyle/>
-          <a:p>
-            <a:pPr algn="l" indent="0" marL="0">
-              <a:buNone/>
-            </a:pPr>
-            <a:r>
-              <a:rPr lang="en-US" sz="900" dirty="0">
-                <a:solidFill>
-                  <a:srgbClr val="5D5D72"/>
-                </a:solidFill>
-                <a:latin typeface="Calibri" pitchFamily="34" charset="0"/>
-                <a:ea typeface="Calibri" pitchFamily="34" charset="-122"/>
-                <a:cs typeface="Calibri" pitchFamily="34" charset="-120"/>
-              </a:rPr>
-              <a:t>Usman Akram  •  COMSATS University Islamabad</a:t>
-            </a:r>
-            <a:endParaRPr lang="en-US" sz="900" dirty="0"/>
-          </a:p>
-        </p:txBody>
-      </p:sp>
-      <p:sp>
-        <p:nvSpPr>
-          <p:cNvPr id="14" name="Text 12"/>
-          <p:cNvSpPr txBox="1"/>
-          <p:nvPr/>
-        </p:nvSpPr>
-        <p:spPr>
-          <a:xfrm>
-            <a:off x="11155680" y="6446520"/>
-            <a:ext cx="457200" cy="292608"/>
-          </a:xfrm>
-          <a:prstGeom prst="rect">
-            <a:avLst/>
-          </a:prstGeom>
-          <a:noFill/>
-          <a:ln/>
-        </p:spPr>
-        <p:txBody>
-          <a:bodyPr wrap="square" lIns="0" tIns="0" rIns="0" bIns="0" rtlCol="0" anchor="ctr"/>
-          <a:lstStyle/>
-          <a:p>
-            <a:pPr algn="r" indent="0" marL="0">
-              <a:buNone/>
-            </a:pPr>
-            <a:r>
-              <a:rPr lang="en-US" sz="900" dirty="0">
-                <a:solidFill>
-                  <a:srgbClr val="5D5D72"/>
-                </a:solidFill>
-                <a:latin typeface="Calibri" pitchFamily="34" charset="0"/>
-                <a:ea typeface="Calibri" pitchFamily="34" charset="-122"/>
-                <a:cs typeface="Calibri" pitchFamily="34" charset="-120"/>
-              </a:rPr>
-              <a:t>5</a:t>
-            </a:r>
-            <a:endParaRPr lang="en-US" sz="900" dirty="0"/>
+          <p:cNvPr id="15" name="cuinotes-footer-mark"/>
+          <p:cNvSpPr txBox="1"/>
+          <p:nvPr/>
+        </p:nvSpPr>
+        <p:spPr>
+          <a:xfrm>
+            <a:off x="9951720" y="6455664"/>
+            <a:ext cx="2011680" cy="292608"/>
+          </a:xfrm>
+          <a:prstGeom prst="rect">
+            <a:avLst/>
+          </a:prstGeom>
+          <a:noFill/>
+        </p:spPr>
+        <p:txBody>
+          <a:bodyPr wrap="none" lIns="0" rIns="0" tIns="0" bIns="0">
+            <a:spAutoFit/>
+          </a:bodyPr>
+          <a:lstStyle/>
+          <a:p>
+            <a:pPr algn="r"/>
+            <a:r>
+              <a:rPr sz="1000">
+                <a:solidFill>
+                  <a:srgbClr val="8A939B"/>
+                </a:solidFill>
+                <a:hlinkClick r:id="rId3"/>
+              </a:rPr>
+              <a:t>cuinotes.com</a:t>
+            </a:r>
+            <a:r>
+              <a:rPr sz="1000">
+                <a:solidFill>
+                  <a:srgbClr val="8A939B"/>
+                </a:solidFill>
+              </a:rPr>
+              <a:t>  ·  5</a:t>
+            </a:r>
           </a:p>
         </p:txBody>
       </p:sp>
@@ -16316,6 +15615,10 @@
           </a:solidFill>
           <a:ln/>
         </p:spPr>
+        <p:txBody>
+          <a:bodyPr/>
+          <a:p/>
+        </p:txBody>
       </p:sp>
       <p:sp>
         <p:nvSpPr>
@@ -16701,79 +16004,44 @@
       </p:sp>
       <p:sp>
         <p:nvSpPr>
-          <p:cNvPr id="6" name="Text 4"/>
-          <p:cNvSpPr txBox="1"/>
-          <p:nvPr/>
-        </p:nvSpPr>
-        <p:spPr>
-          <a:xfrm>
-            <a:off x="640080" y="6446520"/>
-            <a:ext cx="8686800" cy="292608"/>
-          </a:xfrm>
-          <a:prstGeom prst="rect">
-            <a:avLst/>
-          </a:prstGeom>
-          <a:noFill/>
-          <a:ln/>
-        </p:spPr>
-        <p:txBody>
-          <a:bodyPr wrap="square" lIns="0" tIns="0" rIns="0" bIns="0" rtlCol="0" anchor="ctr"/>
-          <a:lstStyle/>
-          <a:p>
-            <a:pPr algn="l" indent="0" marL="0">
-              <a:buNone/>
-            </a:pPr>
-            <a:r>
-              <a:rPr lang="en-US" sz="900" dirty="0">
-                <a:solidFill>
-                  <a:srgbClr val="5D5D72"/>
-                </a:solidFill>
-                <a:latin typeface="Calibri" pitchFamily="34" charset="0"/>
-                <a:ea typeface="Calibri" pitchFamily="34" charset="-122"/>
-                <a:cs typeface="Calibri" pitchFamily="34" charset="-120"/>
-              </a:rPr>
-              <a:t>Usman Akram  •  COMSATS University Islamabad</a:t>
-            </a:r>
-            <a:endParaRPr lang="en-US" sz="900" dirty="0"/>
-          </a:p>
-        </p:txBody>
-      </p:sp>
-      <p:sp>
-        <p:nvSpPr>
-          <p:cNvPr id="7" name="Text 5"/>
-          <p:cNvSpPr txBox="1"/>
-          <p:nvPr/>
-        </p:nvSpPr>
-        <p:spPr>
-          <a:xfrm>
-            <a:off x="11155680" y="6446520"/>
-            <a:ext cx="457200" cy="292608"/>
-          </a:xfrm>
-          <a:prstGeom prst="rect">
-            <a:avLst/>
-          </a:prstGeom>
-          <a:noFill/>
-          <a:ln/>
-        </p:spPr>
-        <p:txBody>
-          <a:bodyPr wrap="square" lIns="0" tIns="0" rIns="0" bIns="0" rtlCol="0" anchor="ctr"/>
-          <a:lstStyle/>
-          <a:p>
-            <a:pPr algn="r" indent="0" marL="0">
-              <a:buNone/>
-            </a:pPr>
-            <a:r>
-              <a:rPr lang="en-US" sz="900" dirty="0">
-                <a:solidFill>
-                  <a:srgbClr val="5D5D72"/>
-                </a:solidFill>
-                <a:latin typeface="Calibri" pitchFamily="34" charset="0"/>
-                <a:ea typeface="Calibri" pitchFamily="34" charset="-122"/>
-                <a:cs typeface="Calibri" pitchFamily="34" charset="-120"/>
-              </a:rPr>
-              <a:t>6</a:t>
-            </a:r>
-            <a:endParaRPr lang="en-US" sz="900" dirty="0"/>
+          <p:cNvPr id="8" name="cuinotes-footer-mark"/>
+          <p:cNvSpPr txBox="1"/>
+          <p:nvPr/>
+        </p:nvSpPr>
+        <p:spPr>
+          <a:xfrm>
+            <a:off x="9951720" y="6455664"/>
+            <a:ext cx="2011680" cy="292608"/>
+          </a:xfrm>
+          <a:prstGeom prst="rect">
+            <a:avLst/>
+          </a:prstGeom>
+          <a:noFill/>
+        </p:spPr>
+        <p:txBody>
+          <a:bodyPr wrap="none" lIns="0" rIns="0" tIns="0" bIns="0">
+            <a:spAutoFit/>
+          </a:bodyPr>
+          <a:lstStyle/>
+          <a:p>
+            <a:pPr algn="r"/>
+            <a:r>
+              <a:rPr sz="1000">
+                <a:solidFill>
+                  <a:srgbClr val="8A939B"/>
+                </a:solidFill>
+                <a:hlinkClick r:id="rId3"/>
+              </a:rPr>
+              <a:t>cuinotes.com</a:t>
+            </a:r>
+            <a:r>
+              <a:rPr sz="1000">
+                <a:solidFill>
+                  <a:srgbClr val="8A939B"/>
+                </a:solidFill>
+              </a:rPr>
+              <a:t>  ·  6</a:t>
+            </a:r>
           </a:p>
         </p:txBody>
       </p:sp>
@@ -16959,6 +16227,10 @@
             </a:outerShdw>
           </a:effectLst>
         </p:spPr>
+        <p:txBody>
+          <a:bodyPr/>
+          <a:p/>
+        </p:txBody>
       </p:sp>
       <p:pic>
         <p:nvPicPr>
@@ -16986,79 +16258,44 @@
       </p:pic>
       <p:sp>
         <p:nvSpPr>
-          <p:cNvPr id="7" name="Text 4"/>
-          <p:cNvSpPr txBox="1"/>
-          <p:nvPr/>
-        </p:nvSpPr>
-        <p:spPr>
-          <a:xfrm>
-            <a:off x="640080" y="6446520"/>
-            <a:ext cx="8686800" cy="292608"/>
-          </a:xfrm>
-          <a:prstGeom prst="rect">
-            <a:avLst/>
-          </a:prstGeom>
-          <a:noFill/>
-          <a:ln/>
-        </p:spPr>
-        <p:txBody>
-          <a:bodyPr wrap="square" lIns="0" tIns="0" rIns="0" bIns="0" rtlCol="0" anchor="ctr"/>
-          <a:lstStyle/>
-          <a:p>
-            <a:pPr algn="l" indent="0" marL="0">
-              <a:buNone/>
-            </a:pPr>
-            <a:r>
-              <a:rPr lang="en-US" sz="900" dirty="0">
-                <a:solidFill>
-                  <a:srgbClr val="5D5D72"/>
-                </a:solidFill>
-                <a:latin typeface="Calibri" pitchFamily="34" charset="0"/>
-                <a:ea typeface="Calibri" pitchFamily="34" charset="-122"/>
-                <a:cs typeface="Calibri" pitchFamily="34" charset="-120"/>
-              </a:rPr>
-              <a:t>Usman Akram  •  COMSATS University Islamabad</a:t>
-            </a:r>
-            <a:endParaRPr lang="en-US" sz="900" dirty="0"/>
-          </a:p>
-        </p:txBody>
-      </p:sp>
-      <p:sp>
-        <p:nvSpPr>
-          <p:cNvPr id="8" name="Text 5"/>
-          <p:cNvSpPr txBox="1"/>
-          <p:nvPr/>
-        </p:nvSpPr>
-        <p:spPr>
-          <a:xfrm>
-            <a:off x="11155680" y="6446520"/>
-            <a:ext cx="457200" cy="292608"/>
-          </a:xfrm>
-          <a:prstGeom prst="rect">
-            <a:avLst/>
-          </a:prstGeom>
-          <a:noFill/>
-          <a:ln/>
-        </p:spPr>
-        <p:txBody>
-          <a:bodyPr wrap="square" lIns="0" tIns="0" rIns="0" bIns="0" rtlCol="0" anchor="ctr"/>
-          <a:lstStyle/>
-          <a:p>
-            <a:pPr algn="r" indent="0" marL="0">
-              <a:buNone/>
-            </a:pPr>
-            <a:r>
-              <a:rPr lang="en-US" sz="900" dirty="0">
-                <a:solidFill>
-                  <a:srgbClr val="5D5D72"/>
-                </a:solidFill>
-                <a:latin typeface="Calibri" pitchFamily="34" charset="0"/>
-                <a:ea typeface="Calibri" pitchFamily="34" charset="-122"/>
-                <a:cs typeface="Calibri" pitchFamily="34" charset="-120"/>
-              </a:rPr>
-              <a:t>7</a:t>
-            </a:r>
-            <a:endParaRPr lang="en-US" sz="900" dirty="0"/>
+          <p:cNvPr id="9" name="cuinotes-footer-mark"/>
+          <p:cNvSpPr txBox="1"/>
+          <p:nvPr/>
+        </p:nvSpPr>
+        <p:spPr>
+          <a:xfrm>
+            <a:off x="9951720" y="6455664"/>
+            <a:ext cx="2011680" cy="292608"/>
+          </a:xfrm>
+          <a:prstGeom prst="rect">
+            <a:avLst/>
+          </a:prstGeom>
+          <a:noFill/>
+        </p:spPr>
+        <p:txBody>
+          <a:bodyPr wrap="none" lIns="0" rIns="0" tIns="0" bIns="0">
+            <a:spAutoFit/>
+          </a:bodyPr>
+          <a:lstStyle/>
+          <a:p>
+            <a:pPr algn="r"/>
+            <a:r>
+              <a:rPr sz="1000">
+                <a:solidFill>
+                  <a:srgbClr val="8A939B"/>
+                </a:solidFill>
+                <a:hlinkClick r:id="rId4"/>
+              </a:rPr>
+              <a:t>cuinotes.com</a:t>
+            </a:r>
+            <a:r>
+              <a:rPr sz="1000">
+                <a:solidFill>
+                  <a:srgbClr val="8A939B"/>
+                </a:solidFill>
+              </a:rPr>
+              <a:t>  ·  7</a:t>
+            </a:r>
           </a:p>
         </p:txBody>
       </p:sp>
@@ -17195,6 +16432,10 @@
             <a:tailEnd type="triangle"/>
           </a:ln>
         </p:spPr>
+        <p:txBody>
+          <a:bodyPr/>
+          <a:p/>
+        </p:txBody>
       </p:sp>
       <p:sp>
         <p:nvSpPr>
@@ -17219,6 +16460,10 @@
             <a:tailEnd type="triangle"/>
           </a:ln>
         </p:spPr>
+        <p:txBody>
+          <a:bodyPr/>
+          <a:p/>
+        </p:txBody>
       </p:sp>
       <p:sp>
         <p:nvSpPr>
@@ -17243,6 +16488,10 @@
             <a:tailEnd type="triangle"/>
           </a:ln>
         </p:spPr>
+        <p:txBody>
+          <a:bodyPr/>
+          <a:p/>
+        </p:txBody>
       </p:sp>
       <p:sp>
         <p:nvSpPr>
@@ -17267,6 +16516,10 @@
             <a:tailEnd type="triangle"/>
           </a:ln>
         </p:spPr>
+        <p:txBody>
+          <a:bodyPr/>
+          <a:p/>
+        </p:txBody>
       </p:sp>
       <p:sp>
         <p:nvSpPr>
@@ -17287,6 +16540,10 @@
           </a:solidFill>
           <a:ln/>
         </p:spPr>
+        <p:txBody>
+          <a:bodyPr/>
+          <a:p/>
+        </p:txBody>
       </p:sp>
       <p:sp>
         <p:nvSpPr>
@@ -17349,6 +16606,10 @@
           </a:solidFill>
           <a:ln/>
         </p:spPr>
+        <p:txBody>
+          <a:bodyPr/>
+          <a:p/>
+        </p:txBody>
       </p:sp>
       <p:sp>
         <p:nvSpPr>
@@ -17411,6 +16672,10 @@
           </a:solidFill>
           <a:ln/>
         </p:spPr>
+        <p:txBody>
+          <a:bodyPr/>
+          <a:p/>
+        </p:txBody>
       </p:sp>
       <p:sp>
         <p:nvSpPr>
@@ -17493,6 +16758,10 @@
           </a:solidFill>
           <a:ln/>
         </p:spPr>
+        <p:txBody>
+          <a:bodyPr/>
+          <a:p/>
+        </p:txBody>
       </p:sp>
       <p:sp>
         <p:nvSpPr>
@@ -17575,6 +16844,10 @@
           </a:solidFill>
           <a:ln/>
         </p:spPr>
+        <p:txBody>
+          <a:bodyPr/>
+          <a:p/>
+        </p:txBody>
       </p:sp>
       <p:sp>
         <p:nvSpPr>
@@ -17659,79 +16932,44 @@
       </p:sp>
       <p:sp>
         <p:nvSpPr>
-          <p:cNvPr id="19" name="Text 17"/>
-          <p:cNvSpPr txBox="1"/>
-          <p:nvPr/>
-        </p:nvSpPr>
-        <p:spPr>
-          <a:xfrm>
-            <a:off x="640080" y="6446520"/>
-            <a:ext cx="8686800" cy="292608"/>
-          </a:xfrm>
-          <a:prstGeom prst="rect">
-            <a:avLst/>
-          </a:prstGeom>
-          <a:noFill/>
-          <a:ln/>
-        </p:spPr>
-        <p:txBody>
-          <a:bodyPr wrap="square" lIns="0" tIns="0" rIns="0" bIns="0" rtlCol="0" anchor="ctr"/>
-          <a:lstStyle/>
-          <a:p>
-            <a:pPr algn="l" indent="0" marL="0">
-              <a:buNone/>
-            </a:pPr>
-            <a:r>
-              <a:rPr lang="en-US" sz="900" dirty="0">
-                <a:solidFill>
-                  <a:srgbClr val="5D5D72"/>
-                </a:solidFill>
-                <a:latin typeface="Calibri" pitchFamily="34" charset="0"/>
-                <a:ea typeface="Calibri" pitchFamily="34" charset="-122"/>
-                <a:cs typeface="Calibri" pitchFamily="34" charset="-120"/>
-              </a:rPr>
-              <a:t>Usman Akram  •  COMSATS University Islamabad</a:t>
-            </a:r>
-            <a:endParaRPr lang="en-US" sz="900" dirty="0"/>
-          </a:p>
-        </p:txBody>
-      </p:sp>
-      <p:sp>
-        <p:nvSpPr>
-          <p:cNvPr id="20" name="Text 18"/>
-          <p:cNvSpPr txBox="1"/>
-          <p:nvPr/>
-        </p:nvSpPr>
-        <p:spPr>
-          <a:xfrm>
-            <a:off x="11155680" y="6446520"/>
-            <a:ext cx="457200" cy="292608"/>
-          </a:xfrm>
-          <a:prstGeom prst="rect">
-            <a:avLst/>
-          </a:prstGeom>
-          <a:noFill/>
-          <a:ln/>
-        </p:spPr>
-        <p:txBody>
-          <a:bodyPr wrap="square" lIns="0" tIns="0" rIns="0" bIns="0" rtlCol="0" anchor="ctr"/>
-          <a:lstStyle/>
-          <a:p>
-            <a:pPr algn="r" indent="0" marL="0">
-              <a:buNone/>
-            </a:pPr>
-            <a:r>
-              <a:rPr lang="en-US" sz="900" dirty="0">
-                <a:solidFill>
-                  <a:srgbClr val="5D5D72"/>
-                </a:solidFill>
-                <a:latin typeface="Calibri" pitchFamily="34" charset="0"/>
-                <a:ea typeface="Calibri" pitchFamily="34" charset="-122"/>
-                <a:cs typeface="Calibri" pitchFamily="34" charset="-120"/>
-              </a:rPr>
-              <a:t>8</a:t>
-            </a:r>
-            <a:endParaRPr lang="en-US" sz="900" dirty="0"/>
+          <p:cNvPr id="21" name="cuinotes-footer-mark"/>
+          <p:cNvSpPr txBox="1"/>
+          <p:nvPr/>
+        </p:nvSpPr>
+        <p:spPr>
+          <a:xfrm>
+            <a:off x="9951720" y="6455664"/>
+            <a:ext cx="2011680" cy="292608"/>
+          </a:xfrm>
+          <a:prstGeom prst="rect">
+            <a:avLst/>
+          </a:prstGeom>
+          <a:noFill/>
+        </p:spPr>
+        <p:txBody>
+          <a:bodyPr wrap="none" lIns="0" rIns="0" tIns="0" bIns="0">
+            <a:spAutoFit/>
+          </a:bodyPr>
+          <a:lstStyle/>
+          <a:p>
+            <a:pPr algn="r"/>
+            <a:r>
+              <a:rPr sz="1000">
+                <a:solidFill>
+                  <a:srgbClr val="8A939B"/>
+                </a:solidFill>
+                <a:hlinkClick r:id="rId3"/>
+              </a:rPr>
+              <a:t>cuinotes.com</a:t>
+            </a:r>
+            <a:r>
+              <a:rPr sz="1000">
+                <a:solidFill>
+                  <a:srgbClr val="8A939B"/>
+                </a:solidFill>
+              </a:rPr>
+              <a:t>  ·  8</a:t>
+            </a:r>
           </a:p>
         </p:txBody>
       </p:sp>
@@ -17864,6 +17102,10 @@
           </a:solidFill>
           <a:ln/>
         </p:spPr>
+        <p:txBody>
+          <a:bodyPr/>
+          <a:p/>
+        </p:txBody>
       </p:sp>
       <p:sp>
         <p:nvSpPr>
@@ -17962,6 +17204,10 @@
           </a:solidFill>
           <a:ln/>
         </p:spPr>
+        <p:txBody>
+          <a:bodyPr/>
+          <a:p/>
+        </p:txBody>
       </p:sp>
       <p:sp>
         <p:nvSpPr>
@@ -18060,6 +17306,10 @@
           </a:solidFill>
           <a:ln/>
         </p:spPr>
+        <p:txBody>
+          <a:bodyPr/>
+          <a:p/>
+        </p:txBody>
       </p:sp>
       <p:sp>
         <p:nvSpPr>
@@ -18141,79 +17391,44 @@
       </p:sp>
       <p:sp>
         <p:nvSpPr>
-          <p:cNvPr id="13" name="Text 11"/>
-          <p:cNvSpPr txBox="1"/>
-          <p:nvPr/>
-        </p:nvSpPr>
-        <p:spPr>
-          <a:xfrm>
-            <a:off x="640080" y="6446520"/>
-            <a:ext cx="8686800" cy="292608"/>
-          </a:xfrm>
-          <a:prstGeom prst="rect">
-            <a:avLst/>
-          </a:prstGeom>
-          <a:noFill/>
-          <a:ln/>
-        </p:spPr>
-        <p:txBody>
-          <a:bodyPr wrap="square" lIns="0" tIns="0" rIns="0" bIns="0" rtlCol="0" anchor="ctr"/>
-          <a:lstStyle/>
-          <a:p>
-            <a:pPr algn="l" indent="0" marL="0">
-              <a:buNone/>
-            </a:pPr>
-            <a:r>
-              <a:rPr lang="en-US" sz="900" dirty="0">
-                <a:solidFill>
-                  <a:srgbClr val="5D5D72"/>
-                </a:solidFill>
-                <a:latin typeface="Calibri" pitchFamily="34" charset="0"/>
-                <a:ea typeface="Calibri" pitchFamily="34" charset="-122"/>
-                <a:cs typeface="Calibri" pitchFamily="34" charset="-120"/>
-              </a:rPr>
-              <a:t>Usman Akram  •  COMSATS University Islamabad</a:t>
-            </a:r>
-            <a:endParaRPr lang="en-US" sz="900" dirty="0"/>
-          </a:p>
-        </p:txBody>
-      </p:sp>
-      <p:sp>
-        <p:nvSpPr>
-          <p:cNvPr id="14" name="Text 12"/>
-          <p:cNvSpPr txBox="1"/>
-          <p:nvPr/>
-        </p:nvSpPr>
-        <p:spPr>
-          <a:xfrm>
-            <a:off x="11155680" y="6446520"/>
-            <a:ext cx="457200" cy="292608"/>
-          </a:xfrm>
-          <a:prstGeom prst="rect">
-            <a:avLst/>
-          </a:prstGeom>
-          <a:noFill/>
-          <a:ln/>
-        </p:spPr>
-        <p:txBody>
-          <a:bodyPr wrap="square" lIns="0" tIns="0" rIns="0" bIns="0" rtlCol="0" anchor="ctr"/>
-          <a:lstStyle/>
-          <a:p>
-            <a:pPr algn="r" indent="0" marL="0">
-              <a:buNone/>
-            </a:pPr>
-            <a:r>
-              <a:rPr lang="en-US" sz="900" dirty="0">
-                <a:solidFill>
-                  <a:srgbClr val="5D5D72"/>
-                </a:solidFill>
-                <a:latin typeface="Calibri" pitchFamily="34" charset="0"/>
-                <a:ea typeface="Calibri" pitchFamily="34" charset="-122"/>
-                <a:cs typeface="Calibri" pitchFamily="34" charset="-120"/>
-              </a:rPr>
-              <a:t>9</a:t>
-            </a:r>
-            <a:endParaRPr lang="en-US" sz="900" dirty="0"/>
+          <p:cNvPr id="15" name="cuinotes-footer-mark"/>
+          <p:cNvSpPr txBox="1"/>
+          <p:nvPr/>
+        </p:nvSpPr>
+        <p:spPr>
+          <a:xfrm>
+            <a:off x="9951720" y="6455664"/>
+            <a:ext cx="2011680" cy="292608"/>
+          </a:xfrm>
+          <a:prstGeom prst="rect">
+            <a:avLst/>
+          </a:prstGeom>
+          <a:noFill/>
+        </p:spPr>
+        <p:txBody>
+          <a:bodyPr wrap="none" lIns="0" rIns="0" tIns="0" bIns="0">
+            <a:spAutoFit/>
+          </a:bodyPr>
+          <a:lstStyle/>
+          <a:p>
+            <a:pPr algn="r"/>
+            <a:r>
+              <a:rPr sz="1000">
+                <a:solidFill>
+                  <a:srgbClr val="8A939B"/>
+                </a:solidFill>
+                <a:hlinkClick r:id="rId3"/>
+              </a:rPr>
+              <a:t>cuinotes.com</a:t>
+            </a:r>
+            <a:r>
+              <a:rPr sz="1000">
+                <a:solidFill>
+                  <a:srgbClr val="8A939B"/>
+                </a:solidFill>
+              </a:rPr>
+              <a:t>  ·  9</a:t>
+            </a:r>
           </a:p>
         </p:txBody>
       </p:sp>

--- a/slides/CSC336-Lecture-27-Components-Props-and-Events.pptx
+++ b/slides/CSC336-Lecture-27-Components-Props-and-Events.pptx
@@ -3894,9 +3894,13 @@
             </a:avLst>
           </a:prstGeom>
           <a:solidFill>
-            <a:srgbClr val="1E1E4C"/>
+            <a:srgbClr val="F7F8F9"/>
           </a:solidFill>
-          <a:ln/>
+          <a:ln w="9525">
+            <a:solidFill>
+              <a:srgbClr val="D0D5DD"/>
+            </a:solidFill>
+          </a:ln>
         </p:spPr>
         <p:txBody>
           <a:bodyPr/>
@@ -3933,7 +3937,7 @@
             <a:r>
               <a:rPr lang="en-US" sz="1400" dirty="0">
                 <a:solidFill>
-                  <a:srgbClr val="C9D3F5"/>
+                  <a:srgbClr val="1F2429"/>
                 </a:solidFill>
                 <a:latin typeface="Courier New" pitchFamily="34" charset="0"/>
                 <a:ea typeface="Courier New" pitchFamily="34" charset="-122"/>
@@ -3953,7 +3957,7 @@
             <a:r>
               <a:rPr lang="en-US" sz="1400" dirty="0">
                 <a:solidFill>
-                  <a:srgbClr val="C9D3F5"/>
+                  <a:srgbClr val="1F2429"/>
                 </a:solidFill>
                 <a:latin typeface="Courier New" pitchFamily="34" charset="0"/>
                 <a:ea typeface="Courier New" pitchFamily="34" charset="-122"/>
@@ -3973,7 +3977,7 @@
             <a:r>
               <a:rPr lang="en-US" sz="1400" dirty="0">
                 <a:solidFill>
-                  <a:srgbClr val="C9D3F5"/>
+                  <a:srgbClr val="1F2429"/>
                 </a:solidFill>
                 <a:latin typeface="Courier New" pitchFamily="34" charset="0"/>
                 <a:ea typeface="Courier New" pitchFamily="34" charset="-122"/>
@@ -3993,7 +3997,7 @@
             <a:r>
               <a:rPr lang="en-US" sz="1400" dirty="0">
                 <a:solidFill>
-                  <a:srgbClr val="C9D3F5"/>
+                  <a:srgbClr val="1F2429"/>
                 </a:solidFill>
                 <a:latin typeface="Courier New" pitchFamily="34" charset="0"/>
                 <a:ea typeface="Courier New" pitchFamily="34" charset="-122"/>
@@ -4022,7 +4026,7 @@
             <a:r>
               <a:rPr lang="en-US" sz="1400" dirty="0">
                 <a:solidFill>
-                  <a:srgbClr val="C9D3F5"/>
+                  <a:srgbClr val="1F2429"/>
                 </a:solidFill>
                 <a:latin typeface="Courier New" pitchFamily="34" charset="0"/>
                 <a:ea typeface="Courier New" pitchFamily="34" charset="-122"/>
@@ -4042,7 +4046,7 @@
             <a:r>
               <a:rPr lang="en-US" sz="1400" dirty="0">
                 <a:solidFill>
-                  <a:srgbClr val="C9D3F5"/>
+                  <a:srgbClr val="1F2429"/>
                 </a:solidFill>
                 <a:latin typeface="Courier New" pitchFamily="34" charset="0"/>
                 <a:ea typeface="Courier New" pitchFamily="34" charset="-122"/>
@@ -4062,7 +4066,7 @@
             <a:r>
               <a:rPr lang="en-US" sz="1400" dirty="0">
                 <a:solidFill>
-                  <a:srgbClr val="C9D3F5"/>
+                  <a:srgbClr val="1F2429"/>
                 </a:solidFill>
                 <a:latin typeface="Courier New" pitchFamily="34" charset="0"/>
                 <a:ea typeface="Courier New" pitchFamily="34" charset="-122"/>
@@ -4082,7 +4086,7 @@
             <a:r>
               <a:rPr lang="en-US" sz="1400" dirty="0">
                 <a:solidFill>
-                  <a:srgbClr val="C9D3F5"/>
+                  <a:srgbClr val="1F2429"/>
                 </a:solidFill>
                 <a:latin typeface="Courier New" pitchFamily="34" charset="0"/>
                 <a:ea typeface="Courier New" pitchFamily="34" charset="-122"/>
@@ -4111,7 +4115,7 @@
             <a:r>
               <a:rPr lang="en-US" sz="1400" dirty="0">
                 <a:solidFill>
-                  <a:srgbClr val="C9D3F5"/>
+                  <a:srgbClr val="1F2429"/>
                 </a:solidFill>
                 <a:latin typeface="Courier New" pitchFamily="34" charset="0"/>
                 <a:ea typeface="Courier New" pitchFamily="34" charset="-122"/>
@@ -4131,7 +4135,7 @@
             <a:r>
               <a:rPr lang="en-US" sz="1400" dirty="0">
                 <a:solidFill>
-                  <a:srgbClr val="C9D3F5"/>
+                  <a:srgbClr val="1F2429"/>
                 </a:solidFill>
                 <a:latin typeface="Courier New" pitchFamily="34" charset="0"/>
                 <a:ea typeface="Courier New" pitchFamily="34" charset="-122"/>
@@ -4305,7 +4309,7 @@
         <p:spPr>
           <a:xfrm>
             <a:off x="640080" y="1965960"/>
-            <a:ext cx="10911535" cy="1737360"/>
+            <a:ext cx="10911535" cy="3657600"/>
           </a:xfrm>
           <a:prstGeom prst="roundRect">
             <a:avLst>
@@ -4336,7 +4340,7 @@
         <p:spPr>
           <a:xfrm>
             <a:off x="868680" y="2103120"/>
-            <a:ext cx="10454335" cy="274320"/>
+            <a:ext cx="10454335" cy="400000"/>
           </a:xfrm>
           <a:prstGeom prst="rect">
             <a:avLst/>
@@ -4352,7 +4356,7 @@
               <a:buNone/>
             </a:pPr>
             <a:r>
-              <a:rPr lang="en-US" sz="1000" b="1" spc="200" kern="0" dirty="0">
+              <a:rPr lang="en-US" sz="1800" b="1" spc="200" kern="0" dirty="0">
                 <a:solidFill>
                   <a:srgbClr val="8A3A12"/>
                 </a:solidFill>
@@ -4362,7 +4366,7 @@
               </a:rPr>
               <a:t>WARNING</a:t>
             </a:r>
-            <a:endParaRPr lang="en-US" sz="1000" dirty="0"/>
+            <a:endParaRPr lang="en-US" sz="1800" dirty="0"/>
           </a:p>
         </p:txBody>
       </p:sp>
@@ -4374,24 +4378,24 @@
         </p:nvSpPr>
         <p:spPr>
           <a:xfrm>
-            <a:off x="868680" y="2404872"/>
-            <a:ext cx="10454335" cy="1143000"/>
-          </a:xfrm>
-          <a:prstGeom prst="rect">
-            <a:avLst/>
-          </a:prstGeom>
-          <a:noFill/>
-          <a:ln/>
-        </p:spPr>
-        <p:txBody>
-          <a:bodyPr wrap="square" lIns="0" tIns="0" rIns="0" bIns="0" rtlCol="0" anchor="t"/>
-          <a:lstStyle/>
-          <a:p>
-            <a:pPr indent="0" marL="0">
-              <a:buNone/>
-            </a:pPr>
-            <a:r>
-              <a:rPr lang="en-US" sz="1250" dirty="0">
+            <a:off x="868680" y="2795960"/>
+            <a:ext cx="10454335" cy="2500000"/>
+          </a:xfrm>
+          <a:prstGeom prst="rect">
+            <a:avLst/>
+          </a:prstGeom>
+          <a:noFill/>
+          <a:ln/>
+        </p:spPr>
+        <p:txBody>
+          <a:bodyPr wrap="square" lIns="0" tIns="0" rIns="0" bIns="0" rtlCol="0" anchor="ctr"/>
+          <a:lstStyle/>
+          <a:p>
+            <a:pPr indent="0" marL="0">
+              <a:buNone/>
+            </a:pPr>
+            <a:r>
+              <a:rPr lang="en-US" sz="2800" dirty="0">
                 <a:solidFill>
                   <a:srgbClr val="26262F"/>
                 </a:solidFill>
@@ -4401,7 +4405,7 @@
               </a:rPr>
               <a:t>A component must never modify the props it receives. Props flow one way: parent to child. If a child needs to trigger a change, the parent must pass down a FUNCTION as a prop that the child calls.</a:t>
             </a:r>
-            <a:endParaRPr lang="en-US" sz="1250" dirty="0"/>
+            <a:endParaRPr lang="en-US" sz="2800" dirty="0"/>
           </a:p>
         </p:txBody>
       </p:sp>
@@ -4575,9 +4579,13 @@
             </a:avLst>
           </a:prstGeom>
           <a:solidFill>
-            <a:srgbClr val="1E1E4C"/>
+            <a:srgbClr val="F7F8F9"/>
           </a:solidFill>
-          <a:ln/>
+          <a:ln w="9525">
+            <a:solidFill>
+              <a:srgbClr val="D0D5DD"/>
+            </a:solidFill>
+          </a:ln>
         </p:spPr>
         <p:txBody>
           <a:bodyPr/>
@@ -4614,7 +4622,7 @@
             <a:r>
               <a:rPr lang="en-US" sz="1400" dirty="0">
                 <a:solidFill>
-                  <a:srgbClr val="C9D3F5"/>
+                  <a:srgbClr val="1F2429"/>
                 </a:solidFill>
                 <a:latin typeface="Courier New" pitchFamily="34" charset="0"/>
                 <a:ea typeface="Courier New" pitchFamily="34" charset="-122"/>
@@ -4634,7 +4642,7 @@
             <a:r>
               <a:rPr lang="en-US" sz="1400" dirty="0">
                 <a:solidFill>
-                  <a:srgbClr val="C9D3F5"/>
+                  <a:srgbClr val="1F2429"/>
                 </a:solidFill>
                 <a:latin typeface="Courier New" pitchFamily="34" charset="0"/>
                 <a:ea typeface="Courier New" pitchFamily="34" charset="-122"/>
@@ -4654,7 +4662,7 @@
             <a:r>
               <a:rPr lang="en-US" sz="1400" dirty="0">
                 <a:solidFill>
-                  <a:srgbClr val="C9D3F5"/>
+                  <a:srgbClr val="1F2429"/>
                 </a:solidFill>
                 <a:latin typeface="Courier New" pitchFamily="34" charset="0"/>
                 <a:ea typeface="Courier New" pitchFamily="34" charset="-122"/>
@@ -4683,7 +4691,7 @@
             <a:r>
               <a:rPr lang="en-US" sz="1400" dirty="0">
                 <a:solidFill>
-                  <a:srgbClr val="C9D3F5"/>
+                  <a:srgbClr val="1F2429"/>
                 </a:solidFill>
                 <a:latin typeface="Courier New" pitchFamily="34" charset="0"/>
                 <a:ea typeface="Courier New" pitchFamily="34" charset="-122"/>
@@ -4703,7 +4711,7 @@
             <a:r>
               <a:rPr lang="en-US" sz="1400" dirty="0">
                 <a:solidFill>
-                  <a:srgbClr val="C9D3F5"/>
+                  <a:srgbClr val="1F2429"/>
                 </a:solidFill>
                 <a:latin typeface="Courier New" pitchFamily="34" charset="0"/>
                 <a:ea typeface="Courier New" pitchFamily="34" charset="-122"/>
@@ -4723,7 +4731,7 @@
             <a:r>
               <a:rPr lang="en-US" sz="1400" dirty="0">
                 <a:solidFill>
-                  <a:srgbClr val="C9D3F5"/>
+                  <a:srgbClr val="1F2429"/>
                 </a:solidFill>
                 <a:latin typeface="Courier New" pitchFamily="34" charset="0"/>
                 <a:ea typeface="Courier New" pitchFamily="34" charset="-122"/>
@@ -4743,7 +4751,7 @@
             <a:r>
               <a:rPr lang="en-US" sz="1400" dirty="0">
                 <a:solidFill>
-                  <a:srgbClr val="C9D3F5"/>
+                  <a:srgbClr val="1F2429"/>
                 </a:solidFill>
                 <a:latin typeface="Courier New" pitchFamily="34" charset="0"/>
                 <a:ea typeface="Courier New" pitchFamily="34" charset="-122"/>
@@ -4763,7 +4771,7 @@
             <a:r>
               <a:rPr lang="en-US" sz="1400" dirty="0">
                 <a:solidFill>
-                  <a:srgbClr val="C9D3F5"/>
+                  <a:srgbClr val="1F2429"/>
                 </a:solidFill>
                 <a:latin typeface="Courier New" pitchFamily="34" charset="0"/>
                 <a:ea typeface="Courier New" pitchFamily="34" charset="-122"/>
@@ -4783,7 +4791,7 @@
             <a:r>
               <a:rPr lang="en-US" sz="1400" dirty="0">
                 <a:solidFill>
-                  <a:srgbClr val="C9D3F5"/>
+                  <a:srgbClr val="1F2429"/>
                 </a:solidFill>
                 <a:latin typeface="Courier New" pitchFamily="34" charset="0"/>
                 <a:ea typeface="Courier New" pitchFamily="34" charset="-122"/>
@@ -4803,7 +4811,7 @@
             <a:r>
               <a:rPr lang="en-US" sz="1400" dirty="0">
                 <a:solidFill>
-                  <a:srgbClr val="C9D3F5"/>
+                  <a:srgbClr val="1F2429"/>
                 </a:solidFill>
                 <a:latin typeface="Courier New" pitchFamily="34" charset="0"/>
                 <a:ea typeface="Courier New" pitchFamily="34" charset="-122"/>
@@ -4823,7 +4831,7 @@
             <a:r>
               <a:rPr lang="en-US" sz="1400" dirty="0">
                 <a:solidFill>
-                  <a:srgbClr val="C9D3F5"/>
+                  <a:srgbClr val="1F2429"/>
                 </a:solidFill>
                 <a:latin typeface="Courier New" pitchFamily="34" charset="0"/>
                 <a:ea typeface="Courier New" pitchFamily="34" charset="-122"/>
@@ -5259,9 +5267,13 @@
             </a:avLst>
           </a:prstGeom>
           <a:solidFill>
-            <a:srgbClr val="1E1E4C"/>
+            <a:srgbClr val="F7F8F9"/>
           </a:solidFill>
-          <a:ln/>
+          <a:ln w="9525">
+            <a:solidFill>
+              <a:srgbClr val="D0D5DD"/>
+            </a:solidFill>
+          </a:ln>
         </p:spPr>
         <p:txBody>
           <a:bodyPr/>
@@ -5298,7 +5310,7 @@
             <a:r>
               <a:rPr lang="en-US" sz="1400" dirty="0">
                 <a:solidFill>
-                  <a:srgbClr val="C9D3F5"/>
+                  <a:srgbClr val="1F2429"/>
                 </a:solidFill>
                 <a:latin typeface="Courier New" pitchFamily="34" charset="0"/>
                 <a:ea typeface="Courier New" pitchFamily="34" charset="-122"/>
@@ -5318,7 +5330,7 @@
             <a:r>
               <a:rPr lang="en-US" sz="1400" dirty="0">
                 <a:solidFill>
-                  <a:srgbClr val="C9D3F5"/>
+                  <a:srgbClr val="1F2429"/>
                 </a:solidFill>
                 <a:latin typeface="Courier New" pitchFamily="34" charset="0"/>
                 <a:ea typeface="Courier New" pitchFamily="34" charset="-122"/>
@@ -5338,7 +5350,7 @@
             <a:r>
               <a:rPr lang="en-US" sz="1400" dirty="0">
                 <a:solidFill>
-                  <a:srgbClr val="C9D3F5"/>
+                  <a:srgbClr val="1F2429"/>
                 </a:solidFill>
                 <a:latin typeface="Courier New" pitchFamily="34" charset="0"/>
                 <a:ea typeface="Courier New" pitchFamily="34" charset="-122"/>
@@ -5358,7 +5370,7 @@
             <a:r>
               <a:rPr lang="en-US" sz="1400" dirty="0">
                 <a:solidFill>
-                  <a:srgbClr val="C9D3F5"/>
+                  <a:srgbClr val="1F2429"/>
                 </a:solidFill>
                 <a:latin typeface="Courier New" pitchFamily="34" charset="0"/>
                 <a:ea typeface="Courier New" pitchFamily="34" charset="-122"/>
@@ -5387,7 +5399,7 @@
             <a:r>
               <a:rPr lang="en-US" sz="1400" dirty="0">
                 <a:solidFill>
-                  <a:srgbClr val="C9D3F5"/>
+                  <a:srgbClr val="1F2429"/>
                 </a:solidFill>
                 <a:latin typeface="Courier New" pitchFamily="34" charset="0"/>
                 <a:ea typeface="Courier New" pitchFamily="34" charset="-122"/>
@@ -6067,9 +6079,13 @@
             </a:avLst>
           </a:prstGeom>
           <a:solidFill>
-            <a:srgbClr val="1E1E4C"/>
+            <a:srgbClr val="F7F8F9"/>
           </a:solidFill>
-          <a:ln/>
+          <a:ln w="9525">
+            <a:solidFill>
+              <a:srgbClr val="D0D5DD"/>
+            </a:solidFill>
+          </a:ln>
         </p:spPr>
         <p:txBody>
           <a:bodyPr/>
@@ -6106,7 +6122,7 @@
             <a:r>
               <a:rPr lang="en-US" sz="1366" dirty="0">
                 <a:solidFill>
-                  <a:srgbClr val="C9D3F5"/>
+                  <a:srgbClr val="1F2429"/>
                 </a:solidFill>
                 <a:latin typeface="Courier New" pitchFamily="34" charset="0"/>
                 <a:ea typeface="Courier New" pitchFamily="34" charset="-122"/>
@@ -6126,7 +6142,7 @@
             <a:r>
               <a:rPr lang="en-US" sz="1366" dirty="0">
                 <a:solidFill>
-                  <a:srgbClr val="C9D3F5"/>
+                  <a:srgbClr val="1F2429"/>
                 </a:solidFill>
                 <a:latin typeface="Courier New" pitchFamily="34" charset="0"/>
                 <a:ea typeface="Courier New" pitchFamily="34" charset="-122"/>
@@ -6146,7 +6162,7 @@
             <a:r>
               <a:rPr lang="en-US" sz="1366" dirty="0">
                 <a:solidFill>
-                  <a:srgbClr val="C9D3F5"/>
+                  <a:srgbClr val="1F2429"/>
                 </a:solidFill>
                 <a:latin typeface="Courier New" pitchFamily="34" charset="0"/>
                 <a:ea typeface="Courier New" pitchFamily="34" charset="-122"/>
@@ -6166,7 +6182,7 @@
             <a:r>
               <a:rPr lang="en-US" sz="1366" dirty="0">
                 <a:solidFill>
-                  <a:srgbClr val="C9D3F5"/>
+                  <a:srgbClr val="1F2429"/>
                 </a:solidFill>
                 <a:latin typeface="Courier New" pitchFamily="34" charset="0"/>
                 <a:ea typeface="Courier New" pitchFamily="34" charset="-122"/>
@@ -6195,7 +6211,7 @@
             <a:r>
               <a:rPr lang="en-US" sz="1366" dirty="0">
                 <a:solidFill>
-                  <a:srgbClr val="C9D3F5"/>
+                  <a:srgbClr val="1F2429"/>
                 </a:solidFill>
                 <a:latin typeface="Courier New" pitchFamily="34" charset="0"/>
                 <a:ea typeface="Courier New" pitchFamily="34" charset="-122"/>
@@ -6215,7 +6231,7 @@
             <a:r>
               <a:rPr lang="en-US" sz="1366" dirty="0">
                 <a:solidFill>
-                  <a:srgbClr val="C9D3F5"/>
+                  <a:srgbClr val="1F2429"/>
                 </a:solidFill>
                 <a:latin typeface="Courier New" pitchFamily="34" charset="0"/>
                 <a:ea typeface="Courier New" pitchFamily="34" charset="-122"/>
@@ -6235,7 +6251,7 @@
             <a:r>
               <a:rPr lang="en-US" sz="1366" dirty="0">
                 <a:solidFill>
-                  <a:srgbClr val="C9D3F5"/>
+                  <a:srgbClr val="1F2429"/>
                 </a:solidFill>
                 <a:latin typeface="Courier New" pitchFamily="34" charset="0"/>
                 <a:ea typeface="Courier New" pitchFamily="34" charset="-122"/>
@@ -6255,7 +6271,7 @@
             <a:r>
               <a:rPr lang="en-US" sz="1366" dirty="0">
                 <a:solidFill>
-                  <a:srgbClr val="C9D3F5"/>
+                  <a:srgbClr val="1F2429"/>
                 </a:solidFill>
                 <a:latin typeface="Courier New" pitchFamily="34" charset="0"/>
                 <a:ea typeface="Courier New" pitchFamily="34" charset="-122"/>
@@ -6284,7 +6300,7 @@
             <a:r>
               <a:rPr lang="en-US" sz="1366" dirty="0">
                 <a:solidFill>
-                  <a:srgbClr val="C9D3F5"/>
+                  <a:srgbClr val="1F2429"/>
                 </a:solidFill>
                 <a:latin typeface="Courier New" pitchFamily="34" charset="0"/>
                 <a:ea typeface="Courier New" pitchFamily="34" charset="-122"/>
@@ -6304,7 +6320,7 @@
             <a:r>
               <a:rPr lang="en-US" sz="1366" dirty="0">
                 <a:solidFill>
-                  <a:srgbClr val="C9D3F5"/>
+                  <a:srgbClr val="1F2429"/>
                 </a:solidFill>
                 <a:latin typeface="Courier New" pitchFamily="34" charset="0"/>
                 <a:ea typeface="Courier New" pitchFamily="34" charset="-122"/>
@@ -6324,7 +6340,7 @@
             <a:r>
               <a:rPr lang="en-US" sz="1366" dirty="0">
                 <a:solidFill>
-                  <a:srgbClr val="C9D3F5"/>
+                  <a:srgbClr val="1F2429"/>
                 </a:solidFill>
                 <a:latin typeface="Courier New" pitchFamily="34" charset="0"/>
                 <a:ea typeface="Courier New" pitchFamily="34" charset="-122"/>
@@ -6498,7 +6514,7 @@
         <p:spPr>
           <a:xfrm>
             <a:off x="640080" y="1965960"/>
-            <a:ext cx="10911535" cy="1737360"/>
+            <a:ext cx="10911535" cy="3657600"/>
           </a:xfrm>
           <a:prstGeom prst="roundRect">
             <a:avLst>
@@ -6529,7 +6545,7 @@
         <p:spPr>
           <a:xfrm>
             <a:off x="868680" y="2103120"/>
-            <a:ext cx="10454335" cy="274320"/>
+            <a:ext cx="10454335" cy="400000"/>
           </a:xfrm>
           <a:prstGeom prst="rect">
             <a:avLst/>
@@ -6545,7 +6561,7 @@
               <a:buNone/>
             </a:pPr>
             <a:r>
-              <a:rPr lang="en-US" sz="1000" b="1" spc="200" kern="0" dirty="0">
+              <a:rPr lang="en-US" sz="1800" b="1" spc="200" kern="0" dirty="0">
                 <a:solidFill>
                   <a:srgbClr val="33459E"/>
                 </a:solidFill>
@@ -6555,7 +6571,7 @@
               </a:rPr>
               <a:t>NOTE</a:t>
             </a:r>
-            <a:endParaRPr lang="en-US" sz="1000" dirty="0"/>
+            <a:endParaRPr lang="en-US" sz="1800" dirty="0"/>
           </a:p>
         </p:txBody>
       </p:sp>
@@ -6567,24 +6583,24 @@
         </p:nvSpPr>
         <p:spPr>
           <a:xfrm>
-            <a:off x="868680" y="2404872"/>
-            <a:ext cx="10454335" cy="1143000"/>
-          </a:xfrm>
-          <a:prstGeom prst="rect">
-            <a:avLst/>
-          </a:prstGeom>
-          <a:noFill/>
-          <a:ln/>
-        </p:spPr>
-        <p:txBody>
-          <a:bodyPr wrap="square" lIns="0" tIns="0" rIns="0" bIns="0" rtlCol="0" anchor="t"/>
-          <a:lstStyle/>
-          <a:p>
-            <a:pPr indent="0" marL="0">
-              <a:buNone/>
-            </a:pPr>
-            <a:r>
-              <a:rPr lang="en-US" sz="1250" dirty="0">
+            <a:off x="868680" y="2795960"/>
+            <a:ext cx="10454335" cy="2500000"/>
+          </a:xfrm>
+          <a:prstGeom prst="rect">
+            <a:avLst/>
+          </a:prstGeom>
+          <a:noFill/>
+          <a:ln/>
+        </p:spPr>
+        <p:txBody>
+          <a:bodyPr wrap="square" lIns="0" tIns="0" rIns="0" bIns="0" rtlCol="0" anchor="ctr"/>
+          <a:lstStyle/>
+          <a:p>
+            <a:pPr indent="0" marL="0">
+              <a:buNone/>
+            </a:pPr>
+            <a:r>
+              <a:rPr lang="en-US" sz="2800" dirty="0">
                 <a:solidFill>
                   <a:srgbClr val="26262F"/>
                 </a:solidFill>
@@ -6594,7 +6610,7 @@
               </a:rPr>
               <a:t>Prop drilling is exactly the problem the Context API (Lecture 28) is designed to solve -- it makes data available to a whole subtree without passing it through every level manually.</a:t>
             </a:r>
-            <a:endParaRPr lang="en-US" sz="1250" dirty="0"/>
+            <a:endParaRPr lang="en-US" sz="2800" dirty="0"/>
           </a:p>
         </p:txBody>
       </p:sp>
@@ -7321,7 +7337,7 @@
         <p:spPr>
           <a:xfrm>
             <a:off x="640080" y="1965960"/>
-            <a:ext cx="10911535" cy="1737360"/>
+            <a:ext cx="10911535" cy="3657600"/>
           </a:xfrm>
           <a:prstGeom prst="roundRect">
             <a:avLst>
@@ -7352,7 +7368,7 @@
         <p:spPr>
           <a:xfrm>
             <a:off x="868680" y="2103120"/>
-            <a:ext cx="10454335" cy="274320"/>
+            <a:ext cx="10454335" cy="400000"/>
           </a:xfrm>
           <a:prstGeom prst="rect">
             <a:avLst/>
@@ -7368,7 +7384,7 @@
               <a:buNone/>
             </a:pPr>
             <a:r>
-              <a:rPr lang="en-US" sz="1000" b="1" spc="200" kern="0" dirty="0">
+              <a:rPr lang="en-US" sz="1800" b="1" spc="200" kern="0" dirty="0">
                 <a:solidFill>
                   <a:srgbClr val="33459E"/>
                 </a:solidFill>
@@ -7378,7 +7394,7 @@
               </a:rPr>
               <a:t>NOTE</a:t>
             </a:r>
-            <a:endParaRPr lang="en-US" sz="1000" dirty="0"/>
+            <a:endParaRPr lang="en-US" sz="1800" dirty="0"/>
           </a:p>
         </p:txBody>
       </p:sp>
@@ -7390,24 +7406,24 @@
         </p:nvSpPr>
         <p:spPr>
           <a:xfrm>
-            <a:off x="868680" y="2404872"/>
-            <a:ext cx="10454335" cy="1143000"/>
-          </a:xfrm>
-          <a:prstGeom prst="rect">
-            <a:avLst/>
-          </a:prstGeom>
-          <a:noFill/>
-          <a:ln/>
-        </p:spPr>
-        <p:txBody>
-          <a:bodyPr wrap="square" lIns="0" tIns="0" rIns="0" bIns="0" rtlCol="0" anchor="t"/>
-          <a:lstStyle/>
-          <a:p>
-            <a:pPr indent="0" marL="0">
-              <a:buNone/>
-            </a:pPr>
-            <a:r>
-              <a:rPr lang="en-US" sz="1250" dirty="0">
+            <a:off x="868680" y="2795960"/>
+            <a:ext cx="10454335" cy="2500000"/>
+          </a:xfrm>
+          <a:prstGeom prst="rect">
+            <a:avLst/>
+          </a:prstGeom>
+          <a:noFill/>
+          <a:ln/>
+        </p:spPr>
+        <p:txBody>
+          <a:bodyPr wrap="square" lIns="0" tIns="0" rIns="0" bIns="0" rtlCol="0" anchor="ctr"/>
+          <a:lstStyle/>
+          <a:p>
+            <a:pPr indent="0" marL="0">
+              <a:buNone/>
+            </a:pPr>
+            <a:r>
+              <a:rPr lang="en-US" sz="2800" dirty="0">
                 <a:solidFill>
                   <a:srgbClr val="26262F"/>
                 </a:solidFill>
@@ -7417,7 +7433,7 @@
               </a:rPr>
               <a:t>React first computes a new Virtual DOM tree and only updates the real DOM where the diff shows an actual difference (Lecture 26). Re-rendering only means React re-ran the function to see what it should currently render.</a:t>
             </a:r>
-            <a:endParaRPr lang="en-US" sz="1250" dirty="0"/>
+            <a:endParaRPr lang="en-US" sz="2800" dirty="0"/>
           </a:p>
         </p:txBody>
       </p:sp>
@@ -8713,9 +8729,13 @@
             </a:avLst>
           </a:prstGeom>
           <a:solidFill>
-            <a:srgbClr val="1E1E4C"/>
+            <a:srgbClr val="F7F8F9"/>
           </a:solidFill>
-          <a:ln/>
+          <a:ln w="9525">
+            <a:solidFill>
+              <a:srgbClr val="D0D5DD"/>
+            </a:solidFill>
+          </a:ln>
         </p:spPr>
         <p:txBody>
           <a:bodyPr/>
@@ -8752,7 +8772,7 @@
             <a:r>
               <a:rPr lang="en-US" sz="1400" dirty="0">
                 <a:solidFill>
-                  <a:srgbClr val="C9D3F5"/>
+                  <a:srgbClr val="1F2429"/>
                 </a:solidFill>
                 <a:latin typeface="Courier New" pitchFamily="34" charset="0"/>
                 <a:ea typeface="Courier New" pitchFamily="34" charset="-122"/>
@@ -8772,7 +8792,7 @@
             <a:r>
               <a:rPr lang="en-US" sz="1400" dirty="0">
                 <a:solidFill>
-                  <a:srgbClr val="C9D3F5"/>
+                  <a:srgbClr val="1F2429"/>
                 </a:solidFill>
                 <a:latin typeface="Courier New" pitchFamily="34" charset="0"/>
                 <a:ea typeface="Courier New" pitchFamily="34" charset="-122"/>
@@ -8792,7 +8812,7 @@
             <a:r>
               <a:rPr lang="en-US" sz="1400" dirty="0">
                 <a:solidFill>
-                  <a:srgbClr val="C9D3F5"/>
+                  <a:srgbClr val="1F2429"/>
                 </a:solidFill>
                 <a:latin typeface="Courier New" pitchFamily="34" charset="0"/>
                 <a:ea typeface="Courier New" pitchFamily="34" charset="-122"/>
@@ -8812,7 +8832,7 @@
             <a:r>
               <a:rPr lang="en-US" sz="1400" dirty="0">
                 <a:solidFill>
-                  <a:srgbClr val="C9D3F5"/>
+                  <a:srgbClr val="1F2429"/>
                 </a:solidFill>
                 <a:latin typeface="Courier New" pitchFamily="34" charset="0"/>
                 <a:ea typeface="Courier New" pitchFamily="34" charset="-122"/>
@@ -8841,7 +8861,7 @@
             <a:r>
               <a:rPr lang="en-US" sz="1400" dirty="0">
                 <a:solidFill>
-                  <a:srgbClr val="C9D3F5"/>
+                  <a:srgbClr val="1F2429"/>
                 </a:solidFill>
                 <a:latin typeface="Courier New" pitchFamily="34" charset="0"/>
                 <a:ea typeface="Courier New" pitchFamily="34" charset="-122"/>
@@ -8861,7 +8881,7 @@
             <a:r>
               <a:rPr lang="en-US" sz="1400" dirty="0">
                 <a:solidFill>
-                  <a:srgbClr val="C9D3F5"/>
+                  <a:srgbClr val="1F2429"/>
                 </a:solidFill>
                 <a:latin typeface="Courier New" pitchFamily="34" charset="0"/>
                 <a:ea typeface="Courier New" pitchFamily="34" charset="-122"/>
@@ -8881,7 +8901,7 @@
             <a:r>
               <a:rPr lang="en-US" sz="1400" dirty="0">
                 <a:solidFill>
-                  <a:srgbClr val="C9D3F5"/>
+                  <a:srgbClr val="1F2429"/>
                 </a:solidFill>
                 <a:latin typeface="Courier New" pitchFamily="34" charset="0"/>
                 <a:ea typeface="Courier New" pitchFamily="34" charset="-122"/>
@@ -8901,7 +8921,7 @@
             <a:r>
               <a:rPr lang="en-US" sz="1400" dirty="0">
                 <a:solidFill>
-                  <a:srgbClr val="C9D3F5"/>
+                  <a:srgbClr val="1F2429"/>
                 </a:solidFill>
                 <a:latin typeface="Courier New" pitchFamily="34" charset="0"/>
                 <a:ea typeface="Courier New" pitchFamily="34" charset="-122"/>
@@ -9075,7 +9095,7 @@
         <p:spPr>
           <a:xfrm>
             <a:off x="640080" y="1965960"/>
-            <a:ext cx="10911535" cy="1737360"/>
+            <a:ext cx="10911535" cy="3657600"/>
           </a:xfrm>
           <a:prstGeom prst="roundRect">
             <a:avLst>
@@ -9106,7 +9126,7 @@
         <p:spPr>
           <a:xfrm>
             <a:off x="868680" y="2103120"/>
-            <a:ext cx="10454335" cy="274320"/>
+            <a:ext cx="10454335" cy="400000"/>
           </a:xfrm>
           <a:prstGeom prst="rect">
             <a:avLst/>
@@ -9122,7 +9142,7 @@
               <a:buNone/>
             </a:pPr>
             <a:r>
-              <a:rPr lang="en-US" sz="1000" b="1" spc="200" kern="0" dirty="0">
+              <a:rPr lang="en-US" sz="1800" b="1" spc="200" kern="0" dirty="0">
                 <a:solidFill>
                   <a:srgbClr val="8A3A12"/>
                 </a:solidFill>
@@ -9132,7 +9152,7 @@
               </a:rPr>
               <a:t>WARNING</a:t>
             </a:r>
-            <a:endParaRPr lang="en-US" sz="1000" dirty="0"/>
+            <a:endParaRPr lang="en-US" sz="1800" dirty="0"/>
           </a:p>
         </p:txBody>
       </p:sp>
@@ -9144,24 +9164,24 @@
         </p:nvSpPr>
         <p:spPr>
           <a:xfrm>
-            <a:off x="868680" y="2404872"/>
-            <a:ext cx="10454335" cy="1143000"/>
-          </a:xfrm>
-          <a:prstGeom prst="rect">
-            <a:avLst/>
-          </a:prstGeom>
-          <a:noFill/>
-          <a:ln/>
-        </p:spPr>
-        <p:txBody>
-          <a:bodyPr wrap="square" lIns="0" tIns="0" rIns="0" bIns="0" rtlCol="0" anchor="t"/>
-          <a:lstStyle/>
-          <a:p>
-            <a:pPr indent="0" marL="0">
-              <a:buNone/>
-            </a:pPr>
-            <a:r>
-              <a:rPr lang="en-US" sz="1250" dirty="0">
+            <a:off x="868680" y="2795960"/>
+            <a:ext cx="10454335" cy="2500000"/>
+          </a:xfrm>
+          <a:prstGeom prst="rect">
+            <a:avLst/>
+          </a:prstGeom>
+          <a:noFill/>
+          <a:ln/>
+        </p:spPr>
+        <p:txBody>
+          <a:bodyPr wrap="square" lIns="0" tIns="0" rIns="0" bIns="0" rtlCol="0" anchor="ctr"/>
+          <a:lstStyle/>
+          <a:p>
+            <a:pPr indent="0" marL="0">
+              <a:buNone/>
+            </a:pPr>
+            <a:r>
+              <a:rPr lang="en-US" sz="2800" dirty="0">
                 <a:solidFill>
                   <a:srgbClr val="26262F"/>
                 </a:solidFill>
@@ -9171,7 +9191,7 @@
               </a:rPr>
               <a:t>Write onClick={handleClick}, NOT onClick={handleClick()}. The second form calls handleClick immediately while rendering, and passes whatever it RETURNS as the handler -- usually undefined, which does nothing on click.</a:t>
             </a:r>
-            <a:endParaRPr lang="en-US" sz="1250" dirty="0"/>
+            <a:endParaRPr lang="en-US" sz="2800" dirty="0"/>
           </a:p>
         </p:txBody>
       </p:sp>
@@ -9345,9 +9365,13 @@
             </a:avLst>
           </a:prstGeom>
           <a:solidFill>
-            <a:srgbClr val="1E1E4C"/>
+            <a:srgbClr val="F7F8F9"/>
           </a:solidFill>
-          <a:ln/>
+          <a:ln w="9525">
+            <a:solidFill>
+              <a:srgbClr val="D0D5DD"/>
+            </a:solidFill>
+          </a:ln>
         </p:spPr>
         <p:txBody>
           <a:bodyPr/>
@@ -9384,7 +9408,7 @@
             <a:r>
               <a:rPr lang="en-US" sz="1110" dirty="0">
                 <a:solidFill>
-                  <a:srgbClr val="C9D3F5"/>
+                  <a:srgbClr val="1F2429"/>
                 </a:solidFill>
                 <a:latin typeface="Courier New" pitchFamily="34" charset="0"/>
                 <a:ea typeface="Courier New" pitchFamily="34" charset="-122"/>
@@ -9404,7 +9428,7 @@
             <a:r>
               <a:rPr lang="en-US" sz="1110" dirty="0">
                 <a:solidFill>
-                  <a:srgbClr val="C9D3F5"/>
+                  <a:srgbClr val="1F2429"/>
                 </a:solidFill>
                 <a:latin typeface="Courier New" pitchFamily="34" charset="0"/>
                 <a:ea typeface="Courier New" pitchFamily="34" charset="-122"/>
@@ -9424,7 +9448,7 @@
             <a:r>
               <a:rPr lang="en-US" sz="1110" dirty="0">
                 <a:solidFill>
-                  <a:srgbClr val="C9D3F5"/>
+                  <a:srgbClr val="1F2429"/>
                 </a:solidFill>
                 <a:latin typeface="Courier New" pitchFamily="34" charset="0"/>
                 <a:ea typeface="Courier New" pitchFamily="34" charset="-122"/>
@@ -9444,7 +9468,7 @@
             <a:r>
               <a:rPr lang="en-US" sz="1110" dirty="0">
                 <a:solidFill>
-                  <a:srgbClr val="C9D3F5"/>
+                  <a:srgbClr val="1F2429"/>
                 </a:solidFill>
                 <a:latin typeface="Courier New" pitchFamily="34" charset="0"/>
                 <a:ea typeface="Courier New" pitchFamily="34" charset="-122"/>
@@ -9464,7 +9488,7 @@
             <a:r>
               <a:rPr lang="en-US" sz="1110" dirty="0">
                 <a:solidFill>
-                  <a:srgbClr val="C9D3F5"/>
+                  <a:srgbClr val="1F2429"/>
                 </a:solidFill>
                 <a:latin typeface="Courier New" pitchFamily="34" charset="0"/>
                 <a:ea typeface="Courier New" pitchFamily="34" charset="-122"/>
@@ -9484,7 +9508,7 @@
             <a:r>
               <a:rPr lang="en-US" sz="1110" dirty="0">
                 <a:solidFill>
-                  <a:srgbClr val="C9D3F5"/>
+                  <a:srgbClr val="1F2429"/>
                 </a:solidFill>
                 <a:latin typeface="Courier New" pitchFamily="34" charset="0"/>
                 <a:ea typeface="Courier New" pitchFamily="34" charset="-122"/>
@@ -9504,7 +9528,7 @@
             <a:r>
               <a:rPr lang="en-US" sz="1110" dirty="0">
                 <a:solidFill>
-                  <a:srgbClr val="C9D3F5"/>
+                  <a:srgbClr val="1F2429"/>
                 </a:solidFill>
                 <a:latin typeface="Courier New" pitchFamily="34" charset="0"/>
                 <a:ea typeface="Courier New" pitchFamily="34" charset="-122"/>
@@ -9524,7 +9548,7 @@
             <a:r>
               <a:rPr lang="en-US" sz="1110" dirty="0">
                 <a:solidFill>
-                  <a:srgbClr val="C9D3F5"/>
+                  <a:srgbClr val="1F2429"/>
                 </a:solidFill>
                 <a:latin typeface="Courier New" pitchFamily="34" charset="0"/>
                 <a:ea typeface="Courier New" pitchFamily="34" charset="-122"/>
@@ -9544,7 +9568,7 @@
             <a:r>
               <a:rPr lang="en-US" sz="1110" dirty="0">
                 <a:solidFill>
-                  <a:srgbClr val="C9D3F5"/>
+                  <a:srgbClr val="1F2429"/>
                 </a:solidFill>
                 <a:latin typeface="Courier New" pitchFamily="34" charset="0"/>
                 <a:ea typeface="Courier New" pitchFamily="34" charset="-122"/>
@@ -9564,7 +9588,7 @@
             <a:r>
               <a:rPr lang="en-US" sz="1110" dirty="0">
                 <a:solidFill>
-                  <a:srgbClr val="C9D3F5"/>
+                  <a:srgbClr val="1F2429"/>
                 </a:solidFill>
                 <a:latin typeface="Courier New" pitchFamily="34" charset="0"/>
                 <a:ea typeface="Courier New" pitchFamily="34" charset="-122"/>
@@ -9584,7 +9608,7 @@
             <a:r>
               <a:rPr lang="en-US" sz="1110" dirty="0">
                 <a:solidFill>
-                  <a:srgbClr val="C9D3F5"/>
+                  <a:srgbClr val="1F2429"/>
                 </a:solidFill>
                 <a:latin typeface="Courier New" pitchFamily="34" charset="0"/>
                 <a:ea typeface="Courier New" pitchFamily="34" charset="-122"/>
@@ -9604,7 +9628,7 @@
             <a:r>
               <a:rPr lang="en-US" sz="1110" dirty="0">
                 <a:solidFill>
-                  <a:srgbClr val="C9D3F5"/>
+                  <a:srgbClr val="1F2429"/>
                 </a:solidFill>
                 <a:latin typeface="Courier New" pitchFamily="34" charset="0"/>
                 <a:ea typeface="Courier New" pitchFamily="34" charset="-122"/>
@@ -9624,7 +9648,7 @@
             <a:r>
               <a:rPr lang="en-US" sz="1110" dirty="0">
                 <a:solidFill>
-                  <a:srgbClr val="C9D3F5"/>
+                  <a:srgbClr val="1F2429"/>
                 </a:solidFill>
                 <a:latin typeface="Courier New" pitchFamily="34" charset="0"/>
                 <a:ea typeface="Courier New" pitchFamily="34" charset="-122"/>
@@ -9644,7 +9668,7 @@
             <a:r>
               <a:rPr lang="en-US" sz="1110" dirty="0">
                 <a:solidFill>
-                  <a:srgbClr val="C9D3F5"/>
+                  <a:srgbClr val="1F2429"/>
                 </a:solidFill>
                 <a:latin typeface="Courier New" pitchFamily="34" charset="0"/>
                 <a:ea typeface="Courier New" pitchFamily="34" charset="-122"/>
@@ -9664,7 +9688,7 @@
             <a:r>
               <a:rPr lang="en-US" sz="1110" dirty="0">
                 <a:solidFill>
-                  <a:srgbClr val="C9D3F5"/>
+                  <a:srgbClr val="1F2429"/>
                 </a:solidFill>
                 <a:latin typeface="Courier New" pitchFamily="34" charset="0"/>
                 <a:ea typeface="Courier New" pitchFamily="34" charset="-122"/>
@@ -9684,7 +9708,7 @@
             <a:r>
               <a:rPr lang="en-US" sz="1110" dirty="0">
                 <a:solidFill>
-                  <a:srgbClr val="C9D3F5"/>
+                  <a:srgbClr val="1F2429"/>
                 </a:solidFill>
                 <a:latin typeface="Courier New" pitchFamily="34" charset="0"/>
                 <a:ea typeface="Courier New" pitchFamily="34" charset="-122"/>
@@ -10427,9 +10451,13 @@
             </a:avLst>
           </a:prstGeom>
           <a:solidFill>
-            <a:srgbClr val="1E1E4C"/>
+            <a:srgbClr val="F7F8F9"/>
           </a:solidFill>
-          <a:ln/>
+          <a:ln w="9525">
+            <a:solidFill>
+              <a:srgbClr val="D0D5DD"/>
+            </a:solidFill>
+          </a:ln>
         </p:spPr>
         <p:txBody>
           <a:bodyPr/>
@@ -10466,7 +10494,7 @@
             <a:r>
               <a:rPr lang="en-US" sz="1400" dirty="0">
                 <a:solidFill>
-                  <a:srgbClr val="C9D3F5"/>
+                  <a:srgbClr val="1F2429"/>
                 </a:solidFill>
                 <a:latin typeface="Courier New" pitchFamily="34" charset="0"/>
                 <a:ea typeface="Courier New" pitchFamily="34" charset="-122"/>
@@ -10486,7 +10514,7 @@
             <a:r>
               <a:rPr lang="en-US" sz="1400" dirty="0">
                 <a:solidFill>
-                  <a:srgbClr val="C9D3F5"/>
+                  <a:srgbClr val="1F2429"/>
                 </a:solidFill>
                 <a:latin typeface="Courier New" pitchFamily="34" charset="0"/>
                 <a:ea typeface="Courier New" pitchFamily="34" charset="-122"/>
@@ -10506,7 +10534,7 @@
             <a:r>
               <a:rPr lang="en-US" sz="1400" dirty="0">
                 <a:solidFill>
-                  <a:srgbClr val="C9D3F5"/>
+                  <a:srgbClr val="1F2429"/>
                 </a:solidFill>
                 <a:latin typeface="Courier New" pitchFamily="34" charset="0"/>
                 <a:ea typeface="Courier New" pitchFamily="34" charset="-122"/>
@@ -10526,7 +10554,7 @@
             <a:r>
               <a:rPr lang="en-US" sz="1400" dirty="0">
                 <a:solidFill>
-                  <a:srgbClr val="C9D3F5"/>
+                  <a:srgbClr val="1F2429"/>
                 </a:solidFill>
                 <a:latin typeface="Courier New" pitchFamily="34" charset="0"/>
                 <a:ea typeface="Courier New" pitchFamily="34" charset="-122"/>
@@ -10546,7 +10574,7 @@
             <a:r>
               <a:rPr lang="en-US" sz="1400" dirty="0">
                 <a:solidFill>
-                  <a:srgbClr val="C9D3F5"/>
+                  <a:srgbClr val="1F2429"/>
                 </a:solidFill>
                 <a:latin typeface="Courier New" pitchFamily="34" charset="0"/>
                 <a:ea typeface="Courier New" pitchFamily="34" charset="-122"/>
@@ -10575,7 +10603,7 @@
             <a:r>
               <a:rPr lang="en-US" sz="1400" dirty="0">
                 <a:solidFill>
-                  <a:srgbClr val="C9D3F5"/>
+                  <a:srgbClr val="1F2429"/>
                 </a:solidFill>
                 <a:latin typeface="Courier New" pitchFamily="34" charset="0"/>
                 <a:ea typeface="Courier New" pitchFamily="34" charset="-122"/>
@@ -10595,7 +10623,7 @@
             <a:r>
               <a:rPr lang="en-US" sz="1400" dirty="0">
                 <a:solidFill>
-                  <a:srgbClr val="C9D3F5"/>
+                  <a:srgbClr val="1F2429"/>
                 </a:solidFill>
                 <a:latin typeface="Courier New" pitchFamily="34" charset="0"/>
                 <a:ea typeface="Courier New" pitchFamily="34" charset="-122"/>
@@ -10615,7 +10643,7 @@
             <a:r>
               <a:rPr lang="en-US" sz="1400" dirty="0">
                 <a:solidFill>
-                  <a:srgbClr val="C9D3F5"/>
+                  <a:srgbClr val="1F2429"/>
                 </a:solidFill>
                 <a:latin typeface="Courier New" pitchFamily="34" charset="0"/>
                 <a:ea typeface="Courier New" pitchFamily="34" charset="-122"/>
@@ -10635,7 +10663,7 @@
             <a:r>
               <a:rPr lang="en-US" sz="1400" dirty="0">
                 <a:solidFill>
-                  <a:srgbClr val="C9D3F5"/>
+                  <a:srgbClr val="1F2429"/>
                 </a:solidFill>
                 <a:latin typeface="Courier New" pitchFamily="34" charset="0"/>
                 <a:ea typeface="Courier New" pitchFamily="34" charset="-122"/>
@@ -10655,7 +10683,7 @@
             <a:r>
               <a:rPr lang="en-US" sz="1400" dirty="0">
                 <a:solidFill>
-                  <a:srgbClr val="C9D3F5"/>
+                  <a:srgbClr val="1F2429"/>
                 </a:solidFill>
                 <a:latin typeface="Courier New" pitchFamily="34" charset="0"/>
                 <a:ea typeface="Courier New" pitchFamily="34" charset="-122"/>
@@ -10675,7 +10703,7 @@
             <a:r>
               <a:rPr lang="en-US" sz="1400" dirty="0">
                 <a:solidFill>
-                  <a:srgbClr val="C9D3F5"/>
+                  <a:srgbClr val="1F2429"/>
                 </a:solidFill>
                 <a:latin typeface="Courier New" pitchFamily="34" charset="0"/>
                 <a:ea typeface="Courier New" pitchFamily="34" charset="-122"/>
@@ -10857,9 +10885,13 @@
             </a:avLst>
           </a:prstGeom>
           <a:solidFill>
-            <a:srgbClr val="1E1E4C"/>
+            <a:srgbClr val="F7F8F9"/>
           </a:solidFill>
-          <a:ln/>
+          <a:ln w="9525">
+            <a:solidFill>
+              <a:srgbClr val="D0D5DD"/>
+            </a:solidFill>
+          </a:ln>
         </p:spPr>
         <p:txBody>
           <a:bodyPr/>
@@ -10896,7 +10928,7 @@
             <a:r>
               <a:rPr lang="en-US" sz="1115" dirty="0">
                 <a:solidFill>
-                  <a:srgbClr val="C9D3F5"/>
+                  <a:srgbClr val="1F2429"/>
                 </a:solidFill>
                 <a:latin typeface="Courier New" pitchFamily="34" charset="0"/>
                 <a:ea typeface="Courier New" pitchFamily="34" charset="-122"/>
@@ -10916,7 +10948,7 @@
             <a:r>
               <a:rPr lang="en-US" sz="1115" dirty="0">
                 <a:solidFill>
-                  <a:srgbClr val="C9D3F5"/>
+                  <a:srgbClr val="1F2429"/>
                 </a:solidFill>
                 <a:latin typeface="Courier New" pitchFamily="34" charset="0"/>
                 <a:ea typeface="Courier New" pitchFamily="34" charset="-122"/>
@@ -10936,7 +10968,7 @@
             <a:r>
               <a:rPr lang="en-US" sz="1115" dirty="0">
                 <a:solidFill>
-                  <a:srgbClr val="C9D3F5"/>
+                  <a:srgbClr val="1F2429"/>
                 </a:solidFill>
                 <a:latin typeface="Courier New" pitchFamily="34" charset="0"/>
                 <a:ea typeface="Courier New" pitchFamily="34" charset="-122"/>
@@ -10956,7 +10988,7 @@
             <a:r>
               <a:rPr lang="en-US" sz="1115" dirty="0">
                 <a:solidFill>
-                  <a:srgbClr val="C9D3F5"/>
+                  <a:srgbClr val="1F2429"/>
                 </a:solidFill>
                 <a:latin typeface="Courier New" pitchFamily="34" charset="0"/>
                 <a:ea typeface="Courier New" pitchFamily="34" charset="-122"/>
@@ -10976,7 +11008,7 @@
             <a:r>
               <a:rPr lang="en-US" sz="1115" dirty="0">
                 <a:solidFill>
-                  <a:srgbClr val="C9D3F5"/>
+                  <a:srgbClr val="1F2429"/>
                 </a:solidFill>
                 <a:latin typeface="Courier New" pitchFamily="34" charset="0"/>
                 <a:ea typeface="Courier New" pitchFamily="34" charset="-122"/>
@@ -10996,7 +11028,7 @@
             <a:r>
               <a:rPr lang="en-US" sz="1115" dirty="0">
                 <a:solidFill>
-                  <a:srgbClr val="C9D3F5"/>
+                  <a:srgbClr val="1F2429"/>
                 </a:solidFill>
                 <a:latin typeface="Courier New" pitchFamily="34" charset="0"/>
                 <a:ea typeface="Courier New" pitchFamily="34" charset="-122"/>
@@ -11016,7 +11048,7 @@
             <a:r>
               <a:rPr lang="en-US" sz="1115" dirty="0">
                 <a:solidFill>
-                  <a:srgbClr val="C9D3F5"/>
+                  <a:srgbClr val="1F2429"/>
                 </a:solidFill>
                 <a:latin typeface="Courier New" pitchFamily="34" charset="0"/>
                 <a:ea typeface="Courier New" pitchFamily="34" charset="-122"/>
@@ -11036,7 +11068,7 @@
             <a:r>
               <a:rPr lang="en-US" sz="1115" dirty="0">
                 <a:solidFill>
-                  <a:srgbClr val="C9D3F5"/>
+                  <a:srgbClr val="1F2429"/>
                 </a:solidFill>
                 <a:latin typeface="Courier New" pitchFamily="34" charset="0"/>
                 <a:ea typeface="Courier New" pitchFamily="34" charset="-122"/>
@@ -11056,7 +11088,7 @@
             <a:r>
               <a:rPr lang="en-US" sz="1115" dirty="0">
                 <a:solidFill>
-                  <a:srgbClr val="C9D3F5"/>
+                  <a:srgbClr val="1F2429"/>
                 </a:solidFill>
                 <a:latin typeface="Courier New" pitchFamily="34" charset="0"/>
                 <a:ea typeface="Courier New" pitchFamily="34" charset="-122"/>
@@ -11076,7 +11108,7 @@
             <a:r>
               <a:rPr lang="en-US" sz="1115" dirty="0">
                 <a:solidFill>
-                  <a:srgbClr val="C9D3F5"/>
+                  <a:srgbClr val="1F2429"/>
                 </a:solidFill>
                 <a:latin typeface="Courier New" pitchFamily="34" charset="0"/>
                 <a:ea typeface="Courier New" pitchFamily="34" charset="-122"/>
@@ -11096,7 +11128,7 @@
             <a:r>
               <a:rPr lang="en-US" sz="1115" dirty="0">
                 <a:solidFill>
-                  <a:srgbClr val="C9D3F5"/>
+                  <a:srgbClr val="1F2429"/>
                 </a:solidFill>
                 <a:latin typeface="Courier New" pitchFamily="34" charset="0"/>
                 <a:ea typeface="Courier New" pitchFamily="34" charset="-122"/>
@@ -11116,7 +11148,7 @@
             <a:r>
               <a:rPr lang="en-US" sz="1115" dirty="0">
                 <a:solidFill>
-                  <a:srgbClr val="C9D3F5"/>
+                  <a:srgbClr val="1F2429"/>
                 </a:solidFill>
                 <a:latin typeface="Courier New" pitchFamily="34" charset="0"/>
                 <a:ea typeface="Courier New" pitchFamily="34" charset="-122"/>
@@ -11136,7 +11168,7 @@
             <a:r>
               <a:rPr lang="en-US" sz="1115" dirty="0">
                 <a:solidFill>
-                  <a:srgbClr val="C9D3F5"/>
+                  <a:srgbClr val="1F2429"/>
                 </a:solidFill>
                 <a:latin typeface="Courier New" pitchFamily="34" charset="0"/>
                 <a:ea typeface="Courier New" pitchFamily="34" charset="-122"/>
@@ -11156,7 +11188,7 @@
             <a:r>
               <a:rPr lang="en-US" sz="1115" dirty="0">
                 <a:solidFill>
-                  <a:srgbClr val="C9D3F5"/>
+                  <a:srgbClr val="1F2429"/>
                 </a:solidFill>
                 <a:latin typeface="Courier New" pitchFamily="34" charset="0"/>
                 <a:ea typeface="Courier New" pitchFamily="34" charset="-122"/>
@@ -11176,7 +11208,7 @@
             <a:r>
               <a:rPr lang="en-US" sz="1115" dirty="0">
                 <a:solidFill>
-                  <a:srgbClr val="C9D3F5"/>
+                  <a:srgbClr val="1F2429"/>
                 </a:solidFill>
                 <a:latin typeface="Courier New" pitchFamily="34" charset="0"/>
                 <a:ea typeface="Courier New" pitchFamily="34" charset="-122"/>
@@ -11196,7 +11228,7 @@
             <a:r>
               <a:rPr lang="en-US" sz="1115" dirty="0">
                 <a:solidFill>
-                  <a:srgbClr val="C9D3F5"/>
+                  <a:srgbClr val="1F2429"/>
                 </a:solidFill>
                 <a:latin typeface="Courier New" pitchFamily="34" charset="0"/>
                 <a:ea typeface="Courier New" pitchFamily="34" charset="-122"/>
@@ -11216,7 +11248,7 @@
             <a:r>
               <a:rPr lang="en-US" sz="1115" dirty="0">
                 <a:solidFill>
-                  <a:srgbClr val="C9D3F5"/>
+                  <a:srgbClr val="1F2429"/>
                 </a:solidFill>
                 <a:latin typeface="Courier New" pitchFamily="34" charset="0"/>
                 <a:ea typeface="Courier New" pitchFamily="34" charset="-122"/>
@@ -12625,7 +12657,7 @@
         <p:spPr>
           <a:xfrm>
             <a:off x="640080" y="1965960"/>
-            <a:ext cx="10911535" cy="1920240"/>
+            <a:ext cx="10911535" cy="3657600"/>
           </a:xfrm>
           <a:prstGeom prst="roundRect">
             <a:avLst>
@@ -12656,7 +12688,7 @@
         <p:spPr>
           <a:xfrm>
             <a:off x="868680" y="2103120"/>
-            <a:ext cx="10454335" cy="274320"/>
+            <a:ext cx="10454335" cy="400000"/>
           </a:xfrm>
           <a:prstGeom prst="rect">
             <a:avLst/>
@@ -12672,7 +12704,7 @@
               <a:buNone/>
             </a:pPr>
             <a:r>
-              <a:rPr lang="en-US" sz="1000" b="1" spc="200" kern="0" dirty="0">
+              <a:rPr lang="en-US" sz="1800" b="1" spc="200" kern="0" dirty="0">
                 <a:solidFill>
                   <a:srgbClr val="1F7A46"/>
                 </a:solidFill>
@@ -12682,7 +12714,7 @@
               </a:rPr>
               <a:t>TIP</a:t>
             </a:r>
-            <a:endParaRPr lang="en-US" sz="1000" dirty="0"/>
+            <a:endParaRPr lang="en-US" sz="1800" dirty="0"/>
           </a:p>
         </p:txBody>
       </p:sp>
@@ -12694,24 +12726,24 @@
         </p:nvSpPr>
         <p:spPr>
           <a:xfrm>
-            <a:off x="868680" y="2404872"/>
-            <a:ext cx="10454335" cy="1325880"/>
-          </a:xfrm>
-          <a:prstGeom prst="rect">
-            <a:avLst/>
-          </a:prstGeom>
-          <a:noFill/>
-          <a:ln/>
-        </p:spPr>
-        <p:txBody>
-          <a:bodyPr wrap="square" lIns="0" tIns="0" rIns="0" bIns="0" rtlCol="0" anchor="t"/>
-          <a:lstStyle/>
-          <a:p>
-            <a:pPr indent="0" marL="0">
-              <a:buNone/>
-            </a:pPr>
-            <a:r>
-              <a:rPr lang="en-US" sz="1250" dirty="0">
+            <a:off x="868680" y="2795960"/>
+            <a:ext cx="10454335" cy="2500000"/>
+          </a:xfrm>
+          <a:prstGeom prst="rect">
+            <a:avLst/>
+          </a:prstGeom>
+          <a:noFill/>
+          <a:ln/>
+        </p:spPr>
+        <p:txBody>
+          <a:bodyPr wrap="square" lIns="0" tIns="0" rIns="0" bIns="0" rtlCol="0" anchor="ctr"/>
+          <a:lstStyle/>
+          <a:p>
+            <a:pPr indent="0" marL="0">
+              <a:buNone/>
+            </a:pPr>
+            <a:r>
+              <a:rPr lang="en-US" sz="2800" dirty="0">
                 <a:solidFill>
                   <a:srgbClr val="26262F"/>
                 </a:solidFill>
@@ -12721,7 +12753,7 @@
               </a:rPr>
               <a:t>React also supports uncontrolled components, where the DOM itself tracks an input's value and you read it with a ref only when needed. Controlled components are usually preferred: React state always reflects what's on screen, which simplifies validation and syncing multiple fields.</a:t>
             </a:r>
-            <a:endParaRPr lang="en-US" sz="1250" dirty="0"/>
+            <a:endParaRPr lang="en-US" sz="2800" dirty="0"/>
           </a:p>
         </p:txBody>
       </p:sp>
@@ -13354,9 +13386,13 @@
             </a:avLst>
           </a:prstGeom>
           <a:solidFill>
-            <a:srgbClr val="1E1E4C"/>
+            <a:srgbClr val="F7F8F9"/>
           </a:solidFill>
-          <a:ln/>
+          <a:ln w="9525">
+            <a:solidFill>
+              <a:srgbClr val="D0D5DD"/>
+            </a:solidFill>
+          </a:ln>
         </p:spPr>
         <p:txBody>
           <a:bodyPr/>
@@ -13393,7 +13429,7 @@
             <a:r>
               <a:rPr lang="en-US" sz="1115" dirty="0">
                 <a:solidFill>
-                  <a:srgbClr val="C9D3F5"/>
+                  <a:srgbClr val="1F2429"/>
                 </a:solidFill>
                 <a:latin typeface="Courier New" pitchFamily="34" charset="0"/>
                 <a:ea typeface="Courier New" pitchFamily="34" charset="-122"/>
@@ -13413,7 +13449,7 @@
             <a:r>
               <a:rPr lang="en-US" sz="1115" dirty="0">
                 <a:solidFill>
-                  <a:srgbClr val="C9D3F5"/>
+                  <a:srgbClr val="1F2429"/>
                 </a:solidFill>
                 <a:latin typeface="Courier New" pitchFamily="34" charset="0"/>
                 <a:ea typeface="Courier New" pitchFamily="34" charset="-122"/>
@@ -13433,7 +13469,7 @@
             <a:r>
               <a:rPr lang="en-US" sz="1115" dirty="0">
                 <a:solidFill>
-                  <a:srgbClr val="C9D3F5"/>
+                  <a:srgbClr val="1F2429"/>
                 </a:solidFill>
                 <a:latin typeface="Courier New" pitchFamily="34" charset="0"/>
                 <a:ea typeface="Courier New" pitchFamily="34" charset="-122"/>
@@ -13453,7 +13489,7 @@
             <a:r>
               <a:rPr lang="en-US" sz="1115" dirty="0">
                 <a:solidFill>
-                  <a:srgbClr val="C9D3F5"/>
+                  <a:srgbClr val="1F2429"/>
                 </a:solidFill>
                 <a:latin typeface="Courier New" pitchFamily="34" charset="0"/>
                 <a:ea typeface="Courier New" pitchFamily="34" charset="-122"/>
@@ -13473,7 +13509,7 @@
             <a:r>
               <a:rPr lang="en-US" sz="1115" dirty="0">
                 <a:solidFill>
-                  <a:srgbClr val="C9D3F5"/>
+                  <a:srgbClr val="1F2429"/>
                 </a:solidFill>
                 <a:latin typeface="Courier New" pitchFamily="34" charset="0"/>
                 <a:ea typeface="Courier New" pitchFamily="34" charset="-122"/>
@@ -13493,7 +13529,7 @@
             <a:r>
               <a:rPr lang="en-US" sz="1115" dirty="0">
                 <a:solidFill>
-                  <a:srgbClr val="C9D3F5"/>
+                  <a:srgbClr val="1F2429"/>
                 </a:solidFill>
                 <a:latin typeface="Courier New" pitchFamily="34" charset="0"/>
                 <a:ea typeface="Courier New" pitchFamily="34" charset="-122"/>
@@ -13513,7 +13549,7 @@
             <a:r>
               <a:rPr lang="en-US" sz="1115" dirty="0">
                 <a:solidFill>
-                  <a:srgbClr val="C9D3F5"/>
+                  <a:srgbClr val="1F2429"/>
                 </a:solidFill>
                 <a:latin typeface="Courier New" pitchFamily="34" charset="0"/>
                 <a:ea typeface="Courier New" pitchFamily="34" charset="-122"/>
@@ -13533,7 +13569,7 @@
             <a:r>
               <a:rPr lang="en-US" sz="1115" dirty="0">
                 <a:solidFill>
-                  <a:srgbClr val="C9D3F5"/>
+                  <a:srgbClr val="1F2429"/>
                 </a:solidFill>
                 <a:latin typeface="Courier New" pitchFamily="34" charset="0"/>
                 <a:ea typeface="Courier New" pitchFamily="34" charset="-122"/>
@@ -13553,7 +13589,7 @@
             <a:r>
               <a:rPr lang="en-US" sz="1115" dirty="0">
                 <a:solidFill>
-                  <a:srgbClr val="C9D3F5"/>
+                  <a:srgbClr val="1F2429"/>
                 </a:solidFill>
                 <a:latin typeface="Courier New" pitchFamily="34" charset="0"/>
                 <a:ea typeface="Courier New" pitchFamily="34" charset="-122"/>
@@ -13573,7 +13609,7 @@
             <a:r>
               <a:rPr lang="en-US" sz="1115" dirty="0">
                 <a:solidFill>
-                  <a:srgbClr val="C9D3F5"/>
+                  <a:srgbClr val="1F2429"/>
                 </a:solidFill>
                 <a:latin typeface="Courier New" pitchFamily="34" charset="0"/>
                 <a:ea typeface="Courier New" pitchFamily="34" charset="-122"/>
@@ -13593,7 +13629,7 @@
             <a:r>
               <a:rPr lang="en-US" sz="1115" dirty="0">
                 <a:solidFill>
-                  <a:srgbClr val="C9D3F5"/>
+                  <a:srgbClr val="1F2429"/>
                 </a:solidFill>
                 <a:latin typeface="Courier New" pitchFamily="34" charset="0"/>
                 <a:ea typeface="Courier New" pitchFamily="34" charset="-122"/>
@@ -13613,7 +13649,7 @@
             <a:r>
               <a:rPr lang="en-US" sz="1115" dirty="0">
                 <a:solidFill>
-                  <a:srgbClr val="C9D3F5"/>
+                  <a:srgbClr val="1F2429"/>
                 </a:solidFill>
                 <a:latin typeface="Courier New" pitchFamily="34" charset="0"/>
                 <a:ea typeface="Courier New" pitchFamily="34" charset="-122"/>
@@ -13633,7 +13669,7 @@
             <a:r>
               <a:rPr lang="en-US" sz="1115" dirty="0">
                 <a:solidFill>
-                  <a:srgbClr val="C9D3F5"/>
+                  <a:srgbClr val="1F2429"/>
                 </a:solidFill>
                 <a:latin typeface="Courier New" pitchFamily="34" charset="0"/>
                 <a:ea typeface="Courier New" pitchFamily="34" charset="-122"/>
@@ -13653,7 +13689,7 @@
             <a:r>
               <a:rPr lang="en-US" sz="1115" dirty="0">
                 <a:solidFill>
-                  <a:srgbClr val="C9D3F5"/>
+                  <a:srgbClr val="1F2429"/>
                 </a:solidFill>
                 <a:latin typeface="Courier New" pitchFamily="34" charset="0"/>
                 <a:ea typeface="Courier New" pitchFamily="34" charset="-122"/>
@@ -13673,7 +13709,7 @@
             <a:r>
               <a:rPr lang="en-US" sz="1115" dirty="0">
                 <a:solidFill>
-                  <a:srgbClr val="C9D3F5"/>
+                  <a:srgbClr val="1F2429"/>
                 </a:solidFill>
                 <a:latin typeface="Courier New" pitchFamily="34" charset="0"/>
                 <a:ea typeface="Courier New" pitchFamily="34" charset="-122"/>
@@ -13693,7 +13729,7 @@
             <a:r>
               <a:rPr lang="en-US" sz="1115" dirty="0">
                 <a:solidFill>
-                  <a:srgbClr val="C9D3F5"/>
+                  <a:srgbClr val="1F2429"/>
                 </a:solidFill>
                 <a:latin typeface="Courier New" pitchFamily="34" charset="0"/>
                 <a:ea typeface="Courier New" pitchFamily="34" charset="-122"/>
@@ -13713,7 +13749,7 @@
             <a:r>
               <a:rPr lang="en-US" sz="1115" dirty="0">
                 <a:solidFill>
-                  <a:srgbClr val="C9D3F5"/>
+                  <a:srgbClr val="1F2429"/>
                 </a:solidFill>
                 <a:latin typeface="Courier New" pitchFamily="34" charset="0"/>
                 <a:ea typeface="Courier New" pitchFamily="34" charset="-122"/>
@@ -14722,9 +14758,13 @@
             </a:avLst>
           </a:prstGeom>
           <a:solidFill>
-            <a:srgbClr val="1E1E4C"/>
+            <a:srgbClr val="F7F8F9"/>
           </a:solidFill>
-          <a:ln/>
+          <a:ln w="9525">
+            <a:solidFill>
+              <a:srgbClr val="D0D5DD"/>
+            </a:solidFill>
+          </a:ln>
         </p:spPr>
         <p:txBody>
           <a:bodyPr/>
@@ -14761,7 +14801,7 @@
             <a:r>
               <a:rPr lang="en-US" sz="1400" dirty="0">
                 <a:solidFill>
-                  <a:srgbClr val="C9D3F5"/>
+                  <a:srgbClr val="1F2429"/>
                 </a:solidFill>
                 <a:latin typeface="Courier New" pitchFamily="34" charset="0"/>
                 <a:ea typeface="Courier New" pitchFamily="34" charset="-122"/>
@@ -14781,7 +14821,7 @@
             <a:r>
               <a:rPr lang="en-US" sz="1400" dirty="0">
                 <a:solidFill>
-                  <a:srgbClr val="C9D3F5"/>
+                  <a:srgbClr val="1F2429"/>
                 </a:solidFill>
                 <a:latin typeface="Courier New" pitchFamily="34" charset="0"/>
                 <a:ea typeface="Courier New" pitchFamily="34" charset="-122"/>
@@ -14801,7 +14841,7 @@
             <a:r>
               <a:rPr lang="en-US" sz="1400" dirty="0">
                 <a:solidFill>
-                  <a:srgbClr val="C9D3F5"/>
+                  <a:srgbClr val="1F2429"/>
                 </a:solidFill>
                 <a:latin typeface="Courier New" pitchFamily="34" charset="0"/>
                 <a:ea typeface="Courier New" pitchFamily="34" charset="-122"/>
@@ -14830,7 +14870,7 @@
             <a:r>
               <a:rPr lang="en-US" sz="1400" dirty="0">
                 <a:solidFill>
-                  <a:srgbClr val="C9D3F5"/>
+                  <a:srgbClr val="1F2429"/>
                 </a:solidFill>
                 <a:latin typeface="Courier New" pitchFamily="34" charset="0"/>
                 <a:ea typeface="Courier New" pitchFamily="34" charset="-122"/>
@@ -14850,7 +14890,7 @@
             <a:r>
               <a:rPr lang="en-US" sz="1400" dirty="0">
                 <a:solidFill>
-                  <a:srgbClr val="C9D3F5"/>
+                  <a:srgbClr val="1F2429"/>
                 </a:solidFill>
                 <a:latin typeface="Courier New" pitchFamily="34" charset="0"/>
                 <a:ea typeface="Courier New" pitchFamily="34" charset="-122"/>
@@ -14870,7 +14910,7 @@
             <a:r>
               <a:rPr lang="en-US" sz="1400" dirty="0">
                 <a:solidFill>
-                  <a:srgbClr val="C9D3F5"/>
+                  <a:srgbClr val="1F2429"/>
                 </a:solidFill>
                 <a:latin typeface="Courier New" pitchFamily="34" charset="0"/>
                 <a:ea typeface="Courier New" pitchFamily="34" charset="-122"/>
@@ -14890,7 +14930,7 @@
             <a:r>
               <a:rPr lang="en-US" sz="1400" dirty="0">
                 <a:solidFill>
-                  <a:srgbClr val="C9D3F5"/>
+                  <a:srgbClr val="1F2429"/>
                 </a:solidFill>
                 <a:latin typeface="Courier New" pitchFamily="34" charset="0"/>
                 <a:ea typeface="Courier New" pitchFamily="34" charset="-122"/>
@@ -14910,7 +14950,7 @@
             <a:r>
               <a:rPr lang="en-US" sz="1400" dirty="0">
                 <a:solidFill>
-                  <a:srgbClr val="C9D3F5"/>
+                  <a:srgbClr val="1F2429"/>
                 </a:solidFill>
                 <a:latin typeface="Courier New" pitchFamily="34" charset="0"/>
                 <a:ea typeface="Courier New" pitchFamily="34" charset="-122"/>
@@ -14930,7 +14970,7 @@
             <a:r>
               <a:rPr lang="en-US" sz="1400" dirty="0">
                 <a:solidFill>
-                  <a:srgbClr val="C9D3F5"/>
+                  <a:srgbClr val="1F2429"/>
                 </a:solidFill>
                 <a:latin typeface="Courier New" pitchFamily="34" charset="0"/>
                 <a:ea typeface="Courier New" pitchFamily="34" charset="-122"/>
@@ -14950,7 +14990,7 @@
             <a:r>
               <a:rPr lang="en-US" sz="1400" dirty="0">
                 <a:solidFill>
-                  <a:srgbClr val="C9D3F5"/>
+                  <a:srgbClr val="1F2429"/>
                 </a:solidFill>
                 <a:latin typeface="Courier New" pitchFamily="34" charset="0"/>
                 <a:ea typeface="Courier New" pitchFamily="34" charset="-122"/>
@@ -14970,7 +15010,7 @@
             <a:r>
               <a:rPr lang="en-US" sz="1400" dirty="0">
                 <a:solidFill>
-                  <a:srgbClr val="C9D3F5"/>
+                  <a:srgbClr val="1F2429"/>
                 </a:solidFill>
                 <a:latin typeface="Courier New" pitchFamily="34" charset="0"/>
                 <a:ea typeface="Courier New" pitchFamily="34" charset="-122"/>
@@ -15611,9 +15651,13 @@
             </a:avLst>
           </a:prstGeom>
           <a:solidFill>
-            <a:srgbClr val="1E1E4C"/>
+            <a:srgbClr val="F7F8F9"/>
           </a:solidFill>
-          <a:ln/>
+          <a:ln w="9525">
+            <a:solidFill>
+              <a:srgbClr val="D0D5DD"/>
+            </a:solidFill>
+          </a:ln>
         </p:spPr>
         <p:txBody>
           <a:bodyPr/>
@@ -15650,7 +15694,7 @@
             <a:r>
               <a:rPr lang="en-US" sz="1000" dirty="0">
                 <a:solidFill>
-                  <a:srgbClr val="C9D3F5"/>
+                  <a:srgbClr val="1F2429"/>
                 </a:solidFill>
                 <a:latin typeface="Courier New" pitchFamily="34" charset="0"/>
                 <a:ea typeface="Courier New" pitchFamily="34" charset="-122"/>
@@ -15670,7 +15714,7 @@
             <a:r>
               <a:rPr lang="en-US" sz="1000" dirty="0">
                 <a:solidFill>
-                  <a:srgbClr val="C9D3F5"/>
+                  <a:srgbClr val="1F2429"/>
                 </a:solidFill>
                 <a:latin typeface="Courier New" pitchFamily="34" charset="0"/>
                 <a:ea typeface="Courier New" pitchFamily="34" charset="-122"/>
@@ -15690,7 +15734,7 @@
             <a:r>
               <a:rPr lang="en-US" sz="1000" dirty="0">
                 <a:solidFill>
-                  <a:srgbClr val="C9D3F5"/>
+                  <a:srgbClr val="1F2429"/>
                 </a:solidFill>
                 <a:latin typeface="Courier New" pitchFamily="34" charset="0"/>
                 <a:ea typeface="Courier New" pitchFamily="34" charset="-122"/>
@@ -15710,7 +15754,7 @@
             <a:r>
               <a:rPr lang="en-US" sz="1000" dirty="0">
                 <a:solidFill>
-                  <a:srgbClr val="C9D3F5"/>
+                  <a:srgbClr val="1F2429"/>
                 </a:solidFill>
                 <a:latin typeface="Courier New" pitchFamily="34" charset="0"/>
                 <a:ea typeface="Courier New" pitchFamily="34" charset="-122"/>
@@ -15730,7 +15774,7 @@
             <a:r>
               <a:rPr lang="en-US" sz="1000" dirty="0">
                 <a:solidFill>
-                  <a:srgbClr val="C9D3F5"/>
+                  <a:srgbClr val="1F2429"/>
                 </a:solidFill>
                 <a:latin typeface="Courier New" pitchFamily="34" charset="0"/>
                 <a:ea typeface="Courier New" pitchFamily="34" charset="-122"/>
@@ -15750,7 +15794,7 @@
             <a:r>
               <a:rPr lang="en-US" sz="1000" dirty="0">
                 <a:solidFill>
-                  <a:srgbClr val="C9D3F5"/>
+                  <a:srgbClr val="1F2429"/>
                 </a:solidFill>
                 <a:latin typeface="Courier New" pitchFamily="34" charset="0"/>
                 <a:ea typeface="Courier New" pitchFamily="34" charset="-122"/>
@@ -15770,7 +15814,7 @@
             <a:r>
               <a:rPr lang="en-US" sz="1000" dirty="0">
                 <a:solidFill>
-                  <a:srgbClr val="C9D3F5"/>
+                  <a:srgbClr val="1F2429"/>
                 </a:solidFill>
                 <a:latin typeface="Courier New" pitchFamily="34" charset="0"/>
                 <a:ea typeface="Courier New" pitchFamily="34" charset="-122"/>
@@ -15790,7 +15834,7 @@
             <a:r>
               <a:rPr lang="en-US" sz="1000" dirty="0">
                 <a:solidFill>
-                  <a:srgbClr val="C9D3F5"/>
+                  <a:srgbClr val="1F2429"/>
                 </a:solidFill>
                 <a:latin typeface="Courier New" pitchFamily="34" charset="0"/>
                 <a:ea typeface="Courier New" pitchFamily="34" charset="-122"/>
@@ -15810,7 +15854,7 @@
             <a:r>
               <a:rPr lang="en-US" sz="1000" dirty="0">
                 <a:solidFill>
-                  <a:srgbClr val="C9D3F5"/>
+                  <a:srgbClr val="1F2429"/>
                 </a:solidFill>
                 <a:latin typeface="Courier New" pitchFamily="34" charset="0"/>
                 <a:ea typeface="Courier New" pitchFamily="34" charset="-122"/>
@@ -15830,7 +15874,7 @@
             <a:r>
               <a:rPr lang="en-US" sz="1000" dirty="0">
                 <a:solidFill>
-                  <a:srgbClr val="C9D3F5"/>
+                  <a:srgbClr val="1F2429"/>
                 </a:solidFill>
                 <a:latin typeface="Courier New" pitchFamily="34" charset="0"/>
                 <a:ea typeface="Courier New" pitchFamily="34" charset="-122"/>
@@ -15850,7 +15894,7 @@
             <a:r>
               <a:rPr lang="en-US" sz="1000" dirty="0">
                 <a:solidFill>
-                  <a:srgbClr val="C9D3F5"/>
+                  <a:srgbClr val="1F2429"/>
                 </a:solidFill>
                 <a:latin typeface="Courier New" pitchFamily="34" charset="0"/>
                 <a:ea typeface="Courier New" pitchFamily="34" charset="-122"/>
@@ -15870,7 +15914,7 @@
             <a:r>
               <a:rPr lang="en-US" sz="1000" dirty="0">
                 <a:solidFill>
-                  <a:srgbClr val="C9D3F5"/>
+                  <a:srgbClr val="1F2429"/>
                 </a:solidFill>
                 <a:latin typeface="Courier New" pitchFamily="34" charset="0"/>
                 <a:ea typeface="Courier New" pitchFamily="34" charset="-122"/>
@@ -15890,7 +15934,7 @@
             <a:r>
               <a:rPr lang="en-US" sz="1000" dirty="0">
                 <a:solidFill>
-                  <a:srgbClr val="C9D3F5"/>
+                  <a:srgbClr val="1F2429"/>
                 </a:solidFill>
                 <a:latin typeface="Courier New" pitchFamily="34" charset="0"/>
                 <a:ea typeface="Courier New" pitchFamily="34" charset="-122"/>
@@ -15910,7 +15954,7 @@
             <a:r>
               <a:rPr lang="en-US" sz="1000" dirty="0">
                 <a:solidFill>
-                  <a:srgbClr val="C9D3F5"/>
+                  <a:srgbClr val="1F2429"/>
                 </a:solidFill>
                 <a:latin typeface="Courier New" pitchFamily="34" charset="0"/>
                 <a:ea typeface="Courier New" pitchFamily="34" charset="-122"/>
@@ -15930,7 +15974,7 @@
             <a:r>
               <a:rPr lang="en-US" sz="1000" dirty="0">
                 <a:solidFill>
-                  <a:srgbClr val="C9D3F5"/>
+                  <a:srgbClr val="1F2429"/>
                 </a:solidFill>
                 <a:latin typeface="Courier New" pitchFamily="34" charset="0"/>
                 <a:ea typeface="Courier New" pitchFamily="34" charset="-122"/>
@@ -15950,7 +15994,7 @@
             <a:r>
               <a:rPr lang="en-US" sz="1000" dirty="0">
                 <a:solidFill>
-                  <a:srgbClr val="C9D3F5"/>
+                  <a:srgbClr val="1F2429"/>
                 </a:solidFill>
                 <a:latin typeface="Courier New" pitchFamily="34" charset="0"/>
                 <a:ea typeface="Courier New" pitchFamily="34" charset="-122"/>
@@ -15970,7 +16014,7 @@
             <a:r>
               <a:rPr lang="en-US" sz="1000" dirty="0">
                 <a:solidFill>
-                  <a:srgbClr val="C9D3F5"/>
+                  <a:srgbClr val="1F2429"/>
                 </a:solidFill>
                 <a:latin typeface="Courier New" pitchFamily="34" charset="0"/>
                 <a:ea typeface="Courier New" pitchFamily="34" charset="-122"/>
@@ -15990,7 +16034,7 @@
             <a:r>
               <a:rPr lang="en-US" sz="1000" dirty="0">
                 <a:solidFill>
-                  <a:srgbClr val="C9D3F5"/>
+                  <a:srgbClr val="1F2429"/>
                 </a:solidFill>
                 <a:latin typeface="Courier New" pitchFamily="34" charset="0"/>
                 <a:ea typeface="Courier New" pitchFamily="34" charset="-122"/>
